--- a/docs/presentations/ZenGuard_Review1_Updated.pptx
+++ b/docs/presentations/ZenGuard_Review1_Updated.pptx
@@ -23,23 +23,21 @@
     <p:sldId id="267" r:id="rId17"/>
     <p:sldId id="268" r:id="rId18"/>
     <p:sldId id="269" r:id="rId19"/>
-    <p:sldId id="274" r:id="rId20"/>
-    <p:sldId id="270" r:id="rId21"/>
-    <p:sldId id="275" r:id="rId22"/>
-    <p:sldId id="278" r:id="rId23"/>
-    <p:sldId id="280" r:id="rId24"/>
-    <p:sldId id="281" r:id="rId25"/>
-    <p:sldId id="282" r:id="rId26"/>
-    <p:sldId id="283" r:id="rId27"/>
-    <p:sldId id="284" r:id="rId28"/>
-    <p:sldId id="285" r:id="rId29"/>
-    <p:sldId id="286" r:id="rId30"/>
-    <p:sldId id="287" r:id="rId31"/>
-    <p:sldId id="277" r:id="rId32"/>
-    <p:sldId id="276" r:id="rId33"/>
-    <p:sldId id="271" r:id="rId34"/>
-    <p:sldId id="272" r:id="rId35"/>
-    <p:sldId id="273" r:id="rId36"/>
+    <p:sldId id="281" r:id="rId20"/>
+    <p:sldId id="274" r:id="rId21"/>
+    <p:sldId id="289" r:id="rId22"/>
+    <p:sldId id="270" r:id="rId23"/>
+    <p:sldId id="275" r:id="rId24"/>
+    <p:sldId id="278" r:id="rId25"/>
+    <p:sldId id="280" r:id="rId26"/>
+    <p:sldId id="287" r:id="rId27"/>
+    <p:sldId id="277" r:id="rId28"/>
+    <p:sldId id="276" r:id="rId29"/>
+    <p:sldId id="288" r:id="rId30"/>
+    <p:sldId id="286" r:id="rId31"/>
+    <p:sldId id="271" r:id="rId32"/>
+    <p:sldId id="272" r:id="rId33"/>
+    <p:sldId id="273" r:id="rId34"/>
   </p:sldIdLst>
   <p:sldSz cx="9144000" cy="6858000" type="screen4x3"/>
   <p:notesSz cx="6858000" cy="9144000"/>
@@ -10439,6 +10437,658 @@
   <p:cSld>
     <p:spTree>
       <p:nvGrpSpPr>
+        <p:cNvPr id="1" name=""/>
+        <p:cNvGrpSpPr/>
+        <p:nvPr/>
+      </p:nvGrpSpPr>
+      <p:grpSpPr>
+        <a:xfrm>
+          <a:off x="0" y="0"/>
+          <a:ext cx="0" cy="0"/>
+          <a:chOff x="0" y="0"/>
+          <a:chExt cx="0" cy="0"/>
+        </a:xfrm>
+      </p:grpSpPr>
+      <p:sp>
+        <p:nvSpPr>
+          <p:cNvPr id="10" name="Title"/>
+          <p:cNvSpPr/>
+          <p:nvPr/>
+        </p:nvSpPr>
+        <p:spPr>
+          <a:xfrm>
+            <a:off x="366823" y="694520"/>
+            <a:ext cx="8685240" cy="762000"/>
+          </a:xfrm>
+          <a:prstGeom prst="rect">
+            <a:avLst/>
+          </a:prstGeom>
+          <a:noFill/>
+          <a:ln w="0">
+            <a:noFill/>
+          </a:ln>
+        </p:spPr>
+        <p:style>
+          <a:lnRef idx="0">
+            <a:scrgbClr r="0" g="0" b="0"/>
+          </a:lnRef>
+          <a:fillRef idx="0">
+            <a:scrgbClr r="0" g="0" b="0"/>
+          </a:fillRef>
+          <a:effectRef idx="0">
+            <a:scrgbClr r="0" g="0" b="0"/>
+          </a:effectRef>
+          <a:fontRef idx="minor"/>
+        </p:style>
+        <p:txBody>
+          <a:bodyPr lIns="90000" tIns="46800" rIns="90000" bIns="46800" anchor="ctr">
+            <a:noAutofit/>
+          </a:bodyPr>
+          <a:lstStyle/>
+          <a:p>
+            <a:pPr algn="ctr">
+              <a:lnSpc>
+                <a:spcPct val="100000"/>
+              </a:lnSpc>
+            </a:pPr>
+            <a:r>
+              <a:rPr lang="en-US" sz="4400" b="0" strike="noStrike" spc="-1" dirty="0">
+                <a:solidFill>
+                  <a:srgbClr val="000000"/>
+                </a:solidFill>
+                <a:latin typeface="Times New Roman"/>
+              </a:rPr>
+              <a:t>Zen Guard Flow – Zoomed In</a:t>
+            </a:r>
+          </a:p>
+        </p:txBody>
+      </p:sp>
+      <p:sp>
+        <p:nvSpPr>
+          <p:cNvPr id="11" name="Content"/>
+          <p:cNvSpPr/>
+          <p:nvPr/>
+        </p:nvSpPr>
+        <p:spPr>
+          <a:xfrm>
+            <a:off x="281764" y="1456520"/>
+            <a:ext cx="8229600" cy="4900000"/>
+          </a:xfrm>
+          <a:prstGeom prst="rect">
+            <a:avLst/>
+          </a:prstGeom>
+          <a:noFill/>
+          <a:ln w="0">
+            <a:noFill/>
+          </a:ln>
+        </p:spPr>
+        <p:style>
+          <a:lnRef idx="0">
+            <a:scrgbClr r="0" g="0" b="0"/>
+          </a:lnRef>
+          <a:fillRef idx="0">
+            <a:scrgbClr r="0" g="0" b="0"/>
+          </a:fillRef>
+          <a:effectRef idx="0">
+            <a:scrgbClr r="0" g="0" b="0"/>
+          </a:effectRef>
+          <a:fontRef idx="minor"/>
+        </p:style>
+        <p:txBody>
+          <a:bodyPr lIns="90000" tIns="46800" rIns="90000" bIns="46800" anchor="t">
+            <a:noAutofit/>
+          </a:bodyPr>
+          <a:lstStyle/>
+          <a:p>
+            <a:pPr algn="l">
+              <a:lnSpc>
+                <a:spcPct val="100000"/>
+              </a:lnSpc>
+              <a:buNone/>
+            </a:pPr>
+            <a:r>
+              <a:rPr lang="en-US" sz="1900" b="1" spc="-1" dirty="0">
+                <a:solidFill>
+                  <a:srgbClr val="045C75"/>
+                </a:solidFill>
+                <a:latin typeface="Times New Roman"/>
+              </a:rPr>
+              <a:t>Architectural Decision Records</a:t>
+            </a:r>
+            <a:r>
+              <a:rPr lang="en-US" sz="1900" b="1" strike="noStrike" spc="-1" dirty="0">
+                <a:solidFill>
+                  <a:srgbClr val="045C75"/>
+                </a:solidFill>
+                <a:latin typeface="Times New Roman"/>
+              </a:rPr>
+              <a:t>:</a:t>
+            </a:r>
+          </a:p>
+          <a:p>
+            <a:pPr>
+              <a:lnSpc>
+                <a:spcPct val="70000"/>
+              </a:lnSpc>
+            </a:pPr>
+            <a:endParaRPr lang="en-US" sz="1600" b="0" dirty="0">
+              <a:latin typeface="Calibri"/>
+            </a:endParaRPr>
+          </a:p>
+          <a:p>
+            <a:pPr algn="l">
+              <a:lnSpc>
+                <a:spcPct val="100000"/>
+              </a:lnSpc>
+              <a:buNone/>
+            </a:pPr>
+            <a:r>
+              <a:rPr lang="en-US" sz="1700" b="0" strike="noStrike" spc="-1" dirty="0">
+                <a:solidFill>
+                  <a:srgbClr val="000000"/>
+                </a:solidFill>
+                <a:latin typeface="Times New Roman"/>
+              </a:rPr>
+              <a:t>Raw Logs  →  Feature Extraction  →  Preprocessing  →  Isolation Forest  →  Anomaly Score  →  Risk Mapping  →  SOAR Trigger</a:t>
+            </a:r>
+          </a:p>
+          <a:p>
+            <a:pPr>
+              <a:lnSpc>
+                <a:spcPct val="70000"/>
+              </a:lnSpc>
+            </a:pPr>
+            <a:endParaRPr lang="en-US" sz="1600" b="0" dirty="0">
+              <a:latin typeface="Calibri"/>
+            </a:endParaRPr>
+          </a:p>
+          <a:p>
+            <a:pPr algn="l">
+              <a:lnSpc>
+                <a:spcPct val="100000"/>
+              </a:lnSpc>
+              <a:buNone/>
+            </a:pPr>
+            <a:r>
+              <a:rPr lang="en-US" sz="1700" b="1" strike="noStrike" spc="-1" dirty="0">
+                <a:solidFill>
+                  <a:srgbClr val="000000"/>
+                </a:solidFill>
+                <a:latin typeface="Times New Roman"/>
+              </a:rPr>
+              <a:t>Stage Details:</a:t>
+            </a:r>
+          </a:p>
+          <a:p>
+            <a:pPr marL="341280" indent="-339840">
+              <a:lnSpc>
+                <a:spcPct val="100000"/>
+              </a:lnSpc>
+              <a:buClr>
+                <a:srgbClr val="000000"/>
+              </a:buClr>
+              <a:buFont typeface="Arial"/>
+              <a:buChar char="•"/>
+            </a:pPr>
+            <a:r>
+              <a:rPr lang="en-US" sz="1600" b="0" strike="noStrike" spc="-1" dirty="0">
+                <a:solidFill>
+                  <a:srgbClr val="000000"/>
+                </a:solidFill>
+                <a:latin typeface="Times New Roman"/>
+              </a:rPr>
+              <a:t>Raw Logs: SIEM-normalized events (firewalls, IDS, IdP, EDR) forwarded to UEBA listener</a:t>
+            </a:r>
+          </a:p>
+          <a:p>
+            <a:pPr marL="341280" indent="-339840">
+              <a:lnSpc>
+                <a:spcPct val="100000"/>
+              </a:lnSpc>
+              <a:buClr>
+                <a:srgbClr val="000000"/>
+              </a:buClr>
+              <a:buFont typeface="Arial"/>
+              <a:buChar char="•"/>
+            </a:pPr>
+            <a:endParaRPr lang="en-US" sz="1600" b="0" strike="noStrike" spc="-1" dirty="0">
+              <a:solidFill>
+                <a:srgbClr val="000000"/>
+              </a:solidFill>
+              <a:latin typeface="Times New Roman"/>
+            </a:endParaRPr>
+          </a:p>
+          <a:p>
+            <a:pPr marL="341280" indent="-339840">
+              <a:lnSpc>
+                <a:spcPct val="100000"/>
+              </a:lnSpc>
+              <a:buClr>
+                <a:srgbClr val="000000"/>
+              </a:buClr>
+              <a:buFont typeface="Arial"/>
+              <a:buChar char="•"/>
+            </a:pPr>
+            <a:r>
+              <a:rPr lang="en-US" sz="1600" b="0" strike="noStrike" spc="-1" dirty="0">
+                <a:solidFill>
+                  <a:srgbClr val="000000"/>
+                </a:solidFill>
+                <a:latin typeface="Times New Roman"/>
+              </a:rPr>
+              <a:t>Feature Extraction: 7 behavioral features extracted per user session (see Feature Engineering slide)</a:t>
+            </a:r>
+          </a:p>
+          <a:p>
+            <a:pPr marL="341280" indent="-339840">
+              <a:lnSpc>
+                <a:spcPct val="100000"/>
+              </a:lnSpc>
+              <a:buClr>
+                <a:srgbClr val="000000"/>
+              </a:buClr>
+              <a:buFont typeface="Arial"/>
+              <a:buChar char="•"/>
+            </a:pPr>
+            <a:r>
+              <a:rPr lang="en-US" sz="1600" b="0" strike="noStrike" spc="-1" dirty="0">
+                <a:solidFill>
+                  <a:srgbClr val="000000"/>
+                </a:solidFill>
+                <a:latin typeface="Times New Roman"/>
+              </a:rPr>
+              <a:t>Preprocessing: Imputation (median) + StandardScaler applied via </a:t>
+            </a:r>
+            <a:r>
+              <a:rPr lang="en-US" sz="1600" b="0" strike="noStrike" spc="-1" dirty="0" err="1">
+                <a:solidFill>
+                  <a:srgbClr val="000000"/>
+                </a:solidFill>
+                <a:latin typeface="Times New Roman"/>
+              </a:rPr>
+              <a:t>sklearn</a:t>
+            </a:r>
+            <a:r>
+              <a:rPr lang="en-US" sz="1600" b="0" strike="noStrike" spc="-1" dirty="0">
+                <a:solidFill>
+                  <a:srgbClr val="000000"/>
+                </a:solidFill>
+                <a:latin typeface="Times New Roman"/>
+              </a:rPr>
+              <a:t> Pipeline</a:t>
+            </a:r>
+          </a:p>
+          <a:p>
+            <a:pPr marL="341280" indent="-339840">
+              <a:lnSpc>
+                <a:spcPct val="100000"/>
+              </a:lnSpc>
+              <a:buClr>
+                <a:srgbClr val="000000"/>
+              </a:buClr>
+              <a:buFont typeface="Arial"/>
+              <a:buChar char="•"/>
+            </a:pPr>
+            <a:endParaRPr lang="en-US" sz="1600" b="0" strike="noStrike" spc="-1" dirty="0">
+              <a:solidFill>
+                <a:srgbClr val="000000"/>
+              </a:solidFill>
+              <a:latin typeface="Times New Roman"/>
+            </a:endParaRPr>
+          </a:p>
+          <a:p>
+            <a:pPr marL="341280" indent="-339840">
+              <a:lnSpc>
+                <a:spcPct val="100000"/>
+              </a:lnSpc>
+              <a:buClr>
+                <a:srgbClr val="000000"/>
+              </a:buClr>
+              <a:buFont typeface="Arial"/>
+              <a:buChar char="•"/>
+            </a:pPr>
+            <a:r>
+              <a:rPr lang="en-US" sz="1600" b="0" strike="noStrike" spc="-1" dirty="0">
+                <a:solidFill>
+                  <a:srgbClr val="000000"/>
+                </a:solidFill>
+                <a:latin typeface="Times New Roman"/>
+              </a:rPr>
+              <a:t>Why Isolation Forest: unsupervised anomaly detection, no label of </a:t>
+            </a:r>
+            <a:r>
+              <a:rPr lang="en-US" sz="1600" b="0" strike="noStrike" spc="-1" dirty="0" err="1">
+                <a:solidFill>
+                  <a:srgbClr val="000000"/>
+                </a:solidFill>
+                <a:latin typeface="Times New Roman"/>
+              </a:rPr>
+              <a:t>malacious</a:t>
+            </a:r>
+            <a:r>
+              <a:rPr lang="en-US" sz="1600" b="0" strike="noStrike" spc="-1" dirty="0">
+                <a:solidFill>
+                  <a:srgbClr val="000000"/>
+                </a:solidFill>
+                <a:latin typeface="Times New Roman"/>
+              </a:rPr>
+              <a:t> attack, fast </a:t>
+            </a:r>
+          </a:p>
+          <a:p>
+            <a:pPr marL="341280" indent="-339840">
+              <a:lnSpc>
+                <a:spcPct val="100000"/>
+              </a:lnSpc>
+              <a:buClr>
+                <a:srgbClr val="000000"/>
+              </a:buClr>
+              <a:buFont typeface="Arial"/>
+              <a:buChar char="•"/>
+            </a:pPr>
+            <a:endParaRPr lang="en-US" sz="1600" b="0" strike="noStrike" spc="-1" dirty="0">
+              <a:solidFill>
+                <a:srgbClr val="000000"/>
+              </a:solidFill>
+              <a:latin typeface="Times New Roman"/>
+            </a:endParaRPr>
+          </a:p>
+          <a:p>
+            <a:pPr marL="341280" indent="-339840">
+              <a:lnSpc>
+                <a:spcPct val="100000"/>
+              </a:lnSpc>
+              <a:buClr>
+                <a:srgbClr val="000000"/>
+              </a:buClr>
+              <a:buFont typeface="Arial"/>
+              <a:buChar char="•"/>
+            </a:pPr>
+            <a:r>
+              <a:rPr lang="en-US" sz="1600" b="0" strike="noStrike" spc="-1" dirty="0">
+                <a:solidFill>
+                  <a:srgbClr val="000000"/>
+                </a:solidFill>
+                <a:latin typeface="Times New Roman"/>
+              </a:rPr>
+              <a:t>Anomaly Score: decision_function() output; negative = anomalous, threshold at 0</a:t>
+            </a:r>
+          </a:p>
+          <a:p>
+            <a:pPr marL="341280" indent="-339840">
+              <a:lnSpc>
+                <a:spcPct val="100000"/>
+              </a:lnSpc>
+              <a:buClr>
+                <a:srgbClr val="000000"/>
+              </a:buClr>
+              <a:buFont typeface="Arial"/>
+              <a:buChar char="•"/>
+            </a:pPr>
+            <a:endParaRPr lang="en-US" sz="1600" b="0" strike="noStrike" spc="-1" dirty="0">
+              <a:solidFill>
+                <a:srgbClr val="000000"/>
+              </a:solidFill>
+              <a:latin typeface="Times New Roman"/>
+            </a:endParaRPr>
+          </a:p>
+          <a:p>
+            <a:pPr marL="341280" indent="-339840">
+              <a:lnSpc>
+                <a:spcPct val="100000"/>
+              </a:lnSpc>
+              <a:buClr>
+                <a:srgbClr val="000000"/>
+              </a:buClr>
+              <a:buFont typeface="Arial"/>
+              <a:buChar char="•"/>
+            </a:pPr>
+            <a:r>
+              <a:rPr lang="en-US" sz="1600" b="0" strike="noStrike" spc="-1" dirty="0">
+                <a:solidFill>
+                  <a:srgbClr val="000000"/>
+                </a:solidFill>
+                <a:latin typeface="Times New Roman"/>
+              </a:rPr>
+              <a:t>Risk Mapping: </a:t>
+            </a:r>
+          </a:p>
+          <a:p>
+            <a:pPr marL="798480" lvl="1" indent="-339840">
+              <a:buClr>
+                <a:srgbClr val="000000"/>
+              </a:buClr>
+              <a:buFont typeface="Arial"/>
+              <a:buChar char="•"/>
+            </a:pPr>
+            <a:r>
+              <a:rPr lang="en-IN" sz="1600" dirty="0" err="1"/>
+              <a:t>normalized_score</a:t>
+            </a:r>
+            <a:r>
+              <a:rPr lang="en-IN" sz="1600" dirty="0"/>
+              <a:t> = (</a:t>
+            </a:r>
+            <a:r>
+              <a:rPr lang="en-IN" sz="1600" dirty="0" err="1"/>
+              <a:t>raw_score</a:t>
+            </a:r>
+            <a:r>
+              <a:rPr lang="en-IN" sz="1600" dirty="0"/>
+              <a:t> - </a:t>
+            </a:r>
+            <a:r>
+              <a:rPr lang="en-IN" sz="1600" dirty="0" err="1"/>
+              <a:t>min_score</a:t>
+            </a:r>
+            <a:r>
+              <a:rPr lang="en-IN" sz="1600" dirty="0"/>
+              <a:t>) / (</a:t>
+            </a:r>
+            <a:r>
+              <a:rPr lang="en-IN" sz="1600" dirty="0" err="1"/>
+              <a:t>max_score</a:t>
+            </a:r>
+            <a:r>
+              <a:rPr lang="en-IN" sz="1600" dirty="0"/>
+              <a:t> - </a:t>
+            </a:r>
+            <a:r>
+              <a:rPr lang="en-IN" sz="1600" dirty="0" err="1"/>
+              <a:t>min_score</a:t>
+            </a:r>
+            <a:r>
+              <a:rPr lang="en-IN" sz="1600" dirty="0"/>
+              <a:t>)</a:t>
+            </a:r>
+          </a:p>
+          <a:p>
+            <a:pPr marL="798480" lvl="1" indent="-339840">
+              <a:buClr>
+                <a:srgbClr val="000000"/>
+              </a:buClr>
+              <a:buFont typeface="Arial"/>
+              <a:buChar char="•"/>
+            </a:pPr>
+            <a:r>
+              <a:rPr lang="en-IN" sz="1600" dirty="0" err="1"/>
+              <a:t>risk_score</a:t>
+            </a:r>
+            <a:r>
+              <a:rPr lang="en-IN" sz="1600" dirty="0"/>
+              <a:t> = (1 - </a:t>
+            </a:r>
+            <a:r>
+              <a:rPr lang="en-IN" sz="1600" dirty="0" err="1"/>
+              <a:t>normalized_score</a:t>
+            </a:r>
+            <a:r>
+              <a:rPr lang="en-IN" sz="1600" dirty="0"/>
+              <a:t>) * 100</a:t>
+            </a:r>
+          </a:p>
+          <a:p>
+            <a:pPr marL="798480" lvl="1" indent="-339840">
+              <a:buClr>
+                <a:srgbClr val="000000"/>
+              </a:buClr>
+              <a:buFont typeface="Arial"/>
+              <a:buChar char="•"/>
+            </a:pPr>
+            <a:endParaRPr lang="en-US" sz="1600" spc="-1" dirty="0">
+              <a:solidFill>
+                <a:srgbClr val="000000"/>
+              </a:solidFill>
+              <a:latin typeface="Times New Roman"/>
+            </a:endParaRPr>
+          </a:p>
+          <a:p>
+            <a:pPr marL="341280" indent="-339840">
+              <a:lnSpc>
+                <a:spcPct val="100000"/>
+              </a:lnSpc>
+              <a:buClr>
+                <a:srgbClr val="000000"/>
+              </a:buClr>
+              <a:buFont typeface="Arial"/>
+              <a:buChar char="•"/>
+            </a:pPr>
+            <a:r>
+              <a:rPr lang="en-US" sz="1600" b="0" strike="noStrike" spc="-1" dirty="0">
+                <a:solidFill>
+                  <a:srgbClr val="000000"/>
+                </a:solidFill>
+                <a:latin typeface="Times New Roman"/>
+              </a:rPr>
+              <a:t>SOAR Trigger: Risk &gt; 95 events dispatch IP block / MFA / endpoint isolation playbooks</a:t>
+            </a:r>
+          </a:p>
+        </p:txBody>
+      </p:sp>
+      <p:sp>
+        <p:nvSpPr>
+          <p:cNvPr id="901" name="DatePH"/>
+          <p:cNvSpPr/>
+          <p:nvPr/>
+        </p:nvSpPr>
+        <p:spPr>
+          <a:xfrm>
+            <a:off x="457200" y="6356520"/>
+            <a:ext cx="2133720" cy="365040"/>
+          </a:xfrm>
+          <a:prstGeom prst="rect">
+            <a:avLst/>
+          </a:prstGeom>
+          <a:noFill/>
+          <a:ln w="0">
+            <a:noFill/>
+          </a:ln>
+        </p:spPr>
+        <p:style>
+          <a:lnRef idx="0">
+            <a:scrgbClr r="0" g="0" b="0"/>
+          </a:lnRef>
+          <a:fillRef idx="0">
+            <a:scrgbClr r="0" g="0" b="0"/>
+          </a:fillRef>
+          <a:effectRef idx="0">
+            <a:scrgbClr r="0" g="0" b="0"/>
+          </a:effectRef>
+          <a:fontRef idx="minor"/>
+        </p:style>
+        <p:txBody>
+          <a:bodyPr lIns="0" tIns="0" rIns="0" bIns="0" anchor="b">
+            <a:noAutofit/>
+          </a:bodyPr>
+          <a:lstStyle/>
+          <a:p>
+            <a:fld id="{F196C58C-5F04-4C11-8C72-5E9FC22741FA}" type="datetime">
+              <a:rPr lang="en-US" sz="1200" b="0" strike="noStrike" spc="-1">
+                <a:solidFill>
+                  <a:srgbClr val="045C75"/>
+                </a:solidFill>
+                <a:latin typeface="Calibri"/>
+              </a:rPr>
+              <a:t>3/18/2026</a:t>
+            </a:fld>
+            <a:endParaRPr lang="en-US" sz="1200" b="0" strike="noStrike" spc="-1">
+              <a:solidFill>
+                <a:srgbClr val="045C75"/>
+              </a:solidFill>
+              <a:latin typeface="Calibri"/>
+            </a:endParaRPr>
+          </a:p>
+        </p:txBody>
+      </p:sp>
+      <p:sp>
+        <p:nvSpPr>
+          <p:cNvPr id="902" name="SlideNumPH"/>
+          <p:cNvSpPr/>
+          <p:nvPr/>
+        </p:nvSpPr>
+        <p:spPr>
+          <a:xfrm>
+            <a:off x="7924680" y="6356520"/>
+            <a:ext cx="762120" cy="365040"/>
+          </a:xfrm>
+          <a:prstGeom prst="rect">
+            <a:avLst/>
+          </a:prstGeom>
+          <a:noFill/>
+          <a:ln w="0">
+            <a:noFill/>
+          </a:ln>
+        </p:spPr>
+        <p:style>
+          <a:lnRef idx="0">
+            <a:scrgbClr r="0" g="0" b="0"/>
+          </a:lnRef>
+          <a:fillRef idx="0">
+            <a:scrgbClr r="0" g="0" b="0"/>
+          </a:fillRef>
+          <a:effectRef idx="0">
+            <a:scrgbClr r="0" g="0" b="0"/>
+          </a:effectRef>
+          <a:fontRef idx="minor"/>
+        </p:style>
+        <p:txBody>
+          <a:bodyPr lIns="0" tIns="0" rIns="0" bIns="0" anchor="b">
+            <a:noAutofit/>
+          </a:bodyPr>
+          <a:lstStyle/>
+          <a:p>
+            <a:pPr algn="r"/>
+            <a:fld id="{8F570691-39C2-4917-B0B9-61BC158E1D0B}" type="slidenum">
+              <a:rPr lang="en-US" sz="1200" b="0" strike="noStrike" spc="-1">
+                <a:solidFill>
+                  <a:srgbClr val="898989"/>
+                </a:solidFill>
+                <a:latin typeface="Calibri"/>
+              </a:rPr>
+              <a:t>15</a:t>
+            </a:fld>
+            <a:endParaRPr lang="en-US" sz="1200" b="0" strike="noStrike" spc="-1">
+              <a:solidFill>
+                <a:srgbClr val="898989"/>
+              </a:solidFill>
+              <a:latin typeface="Calibri"/>
+            </a:endParaRPr>
+          </a:p>
+        </p:txBody>
+      </p:sp>
+    </p:spTree>
+  </p:cSld>
+  <p:clrMapOvr>
+    <a:masterClrMapping/>
+  </p:clrMapOvr>
+</p:sld>
+</file>
+
+<file path=ppt/slides/slide16.xml><?xml version="1.0" encoding="utf-8"?>
+<p:sld xmlns:a="http://schemas.openxmlformats.org/drawingml/2006/main" xmlns:r="http://schemas.openxmlformats.org/officeDocument/2006/relationships" xmlns:p="http://schemas.openxmlformats.org/presentationml/2006/main">
+  <p:cSld>
+    <p:spTree>
+      <p:nvGrpSpPr>
         <p:cNvPr id="1" name="">
           <a:extLst>
             <a:ext uri="{FF2B5EF4-FFF2-40B4-BE49-F238E27FC236}">
@@ -10629,7 +11279,7 @@
                 </a:solidFill>
                 <a:latin typeface="Calibri"/>
               </a:rPr>
-              <a:t>15</a:t>
+              <a:t>16</a:t>
             </a:fld>
             <a:endParaRPr lang="en-US" sz="1200" b="0" strike="noStrike" spc="-1">
               <a:solidFill>
@@ -10684,7 +11334,7 @@
 </p:sld>
 </file>
 
-<file path=ppt/slides/slide16.xml><?xml version="1.0" encoding="utf-8"?>
+<file path=ppt/slides/slide17.xml><?xml version="1.0" encoding="utf-8"?>
 <p:sld xmlns:a="http://schemas.openxmlformats.org/drawingml/2006/main" xmlns:r="http://schemas.openxmlformats.org/officeDocument/2006/relationships" xmlns:p="http://schemas.openxmlformats.org/presentationml/2006/main">
   <p:cSld>
     <p:spTree>
@@ -10750,7 +11400,389 @@
                 </a:solidFill>
                 <a:latin typeface="Times New Roman"/>
               </a:rPr>
-              <a:t>Results - UEBA</a:t>
+              <a:t>Results – SIEM Analysis</a:t>
+            </a:r>
+          </a:p>
+        </p:txBody>
+      </p:sp>
+      <p:sp>
+        <p:nvSpPr>
+          <p:cNvPr id="11" name="Content"/>
+          <p:cNvSpPr/>
+          <p:nvPr/>
+        </p:nvSpPr>
+        <p:spPr>
+          <a:xfrm>
+            <a:off x="457200" y="1270000"/>
+            <a:ext cx="8229600" cy="4900000"/>
+          </a:xfrm>
+          <a:prstGeom prst="rect">
+            <a:avLst/>
+          </a:prstGeom>
+          <a:noFill/>
+          <a:ln w="0">
+            <a:noFill/>
+          </a:ln>
+        </p:spPr>
+        <p:style>
+          <a:lnRef idx="0">
+            <a:scrgbClr r="0" g="0" b="0"/>
+          </a:lnRef>
+          <a:fillRef idx="0">
+            <a:scrgbClr r="0" g="0" b="0"/>
+          </a:fillRef>
+          <a:effectRef idx="0">
+            <a:scrgbClr r="0" g="0" b="0"/>
+          </a:effectRef>
+          <a:fontRef idx="minor"/>
+        </p:style>
+        <p:txBody>
+          <a:bodyPr lIns="90000" tIns="46800" rIns="90000" bIns="46800" anchor="t">
+            <a:noAutofit/>
+          </a:bodyPr>
+          <a:lstStyle/>
+          <a:p>
+            <a:pPr algn="l">
+              <a:lnSpc>
+                <a:spcPct val="100000"/>
+              </a:lnSpc>
+              <a:buNone/>
+            </a:pPr>
+            <a:r>
+              <a:rPr lang="en-US" sz="1800" b="1" strike="noStrike" spc="-1" dirty="0">
+                <a:solidFill>
+                  <a:srgbClr val="045C75"/>
+                </a:solidFill>
+                <a:latin typeface="Times New Roman"/>
+              </a:rPr>
+              <a:t>Log Ingestion — Dual Dataset Pipeline</a:t>
+            </a:r>
+          </a:p>
+          <a:p>
+            <a:pPr marL="341280" indent="-339840">
+              <a:lnSpc>
+                <a:spcPct val="100000"/>
+              </a:lnSpc>
+              <a:buClr>
+                <a:srgbClr val="000000"/>
+              </a:buClr>
+              <a:buFont typeface="Arial"/>
+              <a:buChar char="•"/>
+            </a:pPr>
+            <a:r>
+              <a:rPr lang="en-US" sz="1600" b="1" strike="noStrike" spc="-1" dirty="0">
+                <a:solidFill>
+                  <a:srgbClr val="000000"/>
+                </a:solidFill>
+                <a:latin typeface="Times New Roman"/>
+              </a:rPr>
+              <a:t>CICIDS2017</a:t>
+            </a:r>
+            <a:r>
+              <a:rPr lang="en-US" sz="1600" b="0" strike="noStrike" spc="-1" dirty="0">
+                <a:solidFill>
+                  <a:srgbClr val="000000"/>
+                </a:solidFill>
+                <a:latin typeface="Times New Roman"/>
+              </a:rPr>
+              <a:t> — ~2.8M records, 78 features; DDoS, PortScan, web attack traffic patterns</a:t>
+            </a:r>
+          </a:p>
+          <a:p>
+            <a:pPr marL="341280" indent="-339840">
+              <a:lnSpc>
+                <a:spcPct val="100000"/>
+              </a:lnSpc>
+              <a:buClr>
+                <a:srgbClr val="000000"/>
+              </a:buClr>
+              <a:buFont typeface="Arial"/>
+              <a:buChar char="•"/>
+            </a:pPr>
+            <a:r>
+              <a:rPr lang="en-US" sz="1600" b="1" strike="noStrike" spc="-1" dirty="0">
+                <a:solidFill>
+                  <a:srgbClr val="000000"/>
+                </a:solidFill>
+                <a:latin typeface="Times New Roman"/>
+              </a:rPr>
+              <a:t>UNSW-NB15</a:t>
+            </a:r>
+            <a:r>
+              <a:rPr lang="en-US" sz="1600" b="0" strike="noStrike" spc="-1" dirty="0">
+                <a:solidFill>
+                  <a:srgbClr val="000000"/>
+                </a:solidFill>
+                <a:latin typeface="Times New Roman"/>
+              </a:rPr>
+              <a:t> — 2.54M records, 49 features; network intrusions, fuzzing, reconnaissance</a:t>
+            </a:r>
+          </a:p>
+          <a:p>
+            <a:pPr algn="l">
+              <a:lnSpc>
+                <a:spcPct val="80000"/>
+              </a:lnSpc>
+              <a:buNone/>
+            </a:pPr>
+            <a:endParaRPr lang="en-US" sz="1400" b="0" dirty="0">
+              <a:latin typeface="Calibri"/>
+            </a:endParaRPr>
+          </a:p>
+          <a:p>
+            <a:pPr algn="l">
+              <a:lnSpc>
+                <a:spcPct val="100000"/>
+              </a:lnSpc>
+              <a:buNone/>
+            </a:pPr>
+            <a:r>
+              <a:rPr lang="en-US" sz="1800" b="1" strike="noStrike" spc="-1" dirty="0">
+                <a:solidFill>
+                  <a:srgbClr val="045C75"/>
+                </a:solidFill>
+                <a:latin typeface="Times New Roman"/>
+              </a:rPr>
+              <a:t>Normalization — Common SIEM Event Format</a:t>
+            </a:r>
+          </a:p>
+          <a:p>
+            <a:pPr marL="341280" indent="-339840">
+              <a:lnSpc>
+                <a:spcPct val="100000"/>
+              </a:lnSpc>
+              <a:buClr>
+                <a:srgbClr val="000000"/>
+              </a:buClr>
+              <a:buFont typeface="Arial"/>
+              <a:buChar char="•"/>
+            </a:pPr>
+            <a:r>
+              <a:rPr lang="en-US" sz="1600" b="0" strike="noStrike" spc="-1" dirty="0">
+                <a:solidFill>
+                  <a:srgbClr val="000000"/>
+                </a:solidFill>
+                <a:latin typeface="Times New Roman"/>
+              </a:rPr>
+              <a:t>Each row mapped to unified schema: timestamp, src_ip, dst_ip, protocol, bytes, label, severity</a:t>
+            </a:r>
+          </a:p>
+          <a:p>
+            <a:pPr marL="341280" indent="-339840">
+              <a:lnSpc>
+                <a:spcPct val="100000"/>
+              </a:lnSpc>
+              <a:buClr>
+                <a:srgbClr val="000000"/>
+              </a:buClr>
+              <a:buFont typeface="Arial"/>
+              <a:buChar char="•"/>
+            </a:pPr>
+            <a:r>
+              <a:rPr lang="en-US" sz="1600" b="0" strike="noStrike" spc="-1" dirty="0">
+                <a:solidFill>
+                  <a:srgbClr val="000000"/>
+                </a:solidFill>
+                <a:latin typeface="Times New Roman"/>
+              </a:rPr>
+              <a:t>Dataset-specific columns aliased to common fields; heterogeneous sources treated uniformly</a:t>
+            </a:r>
+          </a:p>
+          <a:p>
+            <a:pPr algn="l">
+              <a:lnSpc>
+                <a:spcPct val="80000"/>
+              </a:lnSpc>
+              <a:buNone/>
+            </a:pPr>
+            <a:endParaRPr lang="en-US" sz="1400" b="0" dirty="0">
+              <a:latin typeface="Calibri"/>
+            </a:endParaRPr>
+          </a:p>
+          <a:p>
+            <a:pPr algn="l">
+              <a:lnSpc>
+                <a:spcPct val="100000"/>
+              </a:lnSpc>
+              <a:buNone/>
+            </a:pPr>
+            <a:r>
+              <a:rPr lang="en-US" sz="1800" b="1" strike="noStrike" spc="-1" dirty="0">
+                <a:solidFill>
+                  <a:srgbClr val="045C75"/>
+                </a:solidFill>
+                <a:latin typeface="Times New Roman"/>
+              </a:rPr>
+              <a:t>Severity Tagging — Rule-Based Classification</a:t>
+            </a:r>
+          </a:p>
+          <a:p>
+            <a:pPr marL="341280" indent="-339840">
+              <a:lnSpc>
+                <a:spcPct val="100000"/>
+              </a:lnSpc>
+              <a:buClr>
+                <a:srgbClr val="000000"/>
+              </a:buClr>
+              <a:buFont typeface="Arial"/>
+              <a:buChar char="•"/>
+            </a:pPr>
+            <a:r>
+              <a:rPr lang="en-US" sz="1600" b="1" strike="noStrike" spc="-1" dirty="0">
+                <a:solidFill>
+                  <a:srgbClr val="CC2200"/>
+                </a:solidFill>
+                <a:latin typeface="Times New Roman"/>
+              </a:rPr>
+              <a:t>HIGH</a:t>
+            </a:r>
+            <a:r>
+              <a:rPr lang="en-US" sz="1600" b="0" strike="noStrike" spc="-1" dirty="0">
+                <a:solidFill>
+                  <a:srgbClr val="000000"/>
+                </a:solidFill>
+                <a:latin typeface="Times New Roman"/>
+              </a:rPr>
+              <a:t> — label is attack AND (bytes &gt; threshold OR known attack type: DDoS, PortScan, Exploit)</a:t>
+            </a:r>
+          </a:p>
+          <a:p>
+            <a:pPr marL="341280" indent="-339840">
+              <a:lnSpc>
+                <a:spcPct val="100000"/>
+              </a:lnSpc>
+              <a:buClr>
+                <a:srgbClr val="000000"/>
+              </a:buClr>
+              <a:buFont typeface="Arial"/>
+              <a:buChar char="•"/>
+            </a:pPr>
+            <a:r>
+              <a:rPr lang="en-US" sz="1600" b="1" strike="noStrike" spc="-1" dirty="0">
+                <a:solidFill>
+                  <a:srgbClr val="D4820A"/>
+                </a:solidFill>
+                <a:latin typeface="Times New Roman"/>
+              </a:rPr>
+              <a:t>MEDIUM</a:t>
+            </a:r>
+            <a:r>
+              <a:rPr lang="en-US" sz="1600" b="0" strike="noStrike" spc="-1" dirty="0">
+                <a:solidFill>
+                  <a:srgbClr val="000000"/>
+                </a:solidFill>
+                <a:latin typeface="Times New Roman"/>
+              </a:rPr>
+              <a:t> — label is attack but below high threshold; </a:t>
+            </a:r>
+            <a:r>
+              <a:rPr lang="en-US" sz="1600" b="1" strike="noStrike" spc="-1" dirty="0">
+                <a:solidFill>
+                  <a:srgbClr val="007A3D"/>
+                </a:solidFill>
+                <a:latin typeface="Times New Roman"/>
+              </a:rPr>
+              <a:t>LOW</a:t>
+            </a:r>
+            <a:r>
+              <a:rPr lang="en-US" sz="1600" b="0" strike="noStrike" spc="-1" dirty="0">
+                <a:solidFill>
+                  <a:srgbClr val="000000"/>
+                </a:solidFill>
+                <a:latin typeface="Times New Roman"/>
+              </a:rPr>
+              <a:t> — label is BENIGN</a:t>
+            </a:r>
+          </a:p>
+          <a:p>
+            <a:pPr algn="l">
+              <a:lnSpc>
+                <a:spcPct val="80000"/>
+              </a:lnSpc>
+              <a:buNone/>
+            </a:pPr>
+            <a:endParaRPr lang="en-US" sz="1400" b="0" dirty="0">
+              <a:latin typeface="Calibri"/>
+            </a:endParaRPr>
+          </a:p>
+          <a:p>
+            <a:pPr algn="l">
+              <a:lnSpc>
+                <a:spcPct val="100000"/>
+              </a:lnSpc>
+              <a:buNone/>
+            </a:pPr>
+            <a:r>
+              <a:rPr lang="en-US" sz="1800" b="1" strike="noStrike" spc="-1" dirty="0">
+                <a:solidFill>
+                  <a:srgbClr val="045C75"/>
+                </a:solidFill>
+                <a:latin typeface="Times New Roman"/>
+              </a:rPr>
+              <a:t>Dashboard &amp; Live Feed</a:t>
+            </a:r>
+          </a:p>
+          <a:p>
+            <a:pPr marL="341280" indent="-339840">
+              <a:lnSpc>
+                <a:spcPct val="100000"/>
+              </a:lnSpc>
+              <a:buClr>
+                <a:srgbClr val="000000"/>
+              </a:buClr>
+              <a:buFont typeface="Arial"/>
+              <a:buChar char="•"/>
+            </a:pPr>
+            <a:r>
+              <a:rPr lang="en-US" sz="1600" b="0" strike="noStrike" spc="-1" dirty="0">
+                <a:solidFill>
+                  <a:srgbClr val="000000"/>
+                </a:solidFill>
+                <a:latin typeface="Times New Roman"/>
+              </a:rPr>
+              <a:t>Dashboard KPIs computed per batch: total events, high/medium/low counts, attack ratio, top source IPs</a:t>
+            </a:r>
+          </a:p>
+          <a:p>
+            <a:pPr marL="341280" indent="-339840">
+              <a:lnSpc>
+                <a:spcPct val="100000"/>
+              </a:lnSpc>
+              <a:buClr>
+                <a:srgbClr val="000000"/>
+              </a:buClr>
+              <a:buFont typeface="Arial"/>
+              <a:buChar char="•"/>
+            </a:pPr>
+            <a:r>
+              <a:rPr lang="en-US" sz="1600" b="0" strike="noStrike" spc="-1" dirty="0">
+                <a:solidFill>
+                  <a:srgbClr val="000000"/>
+                </a:solidFill>
+                <a:latin typeface="Times New Roman"/>
+              </a:rPr>
+              <a:t>UEBA fields derived per event: failed_logins, session_duration, privilege_change_attempted, MFA_bypassed</a:t>
+            </a:r>
+          </a:p>
+          <a:p>
+            <a:pPr marL="341280" indent="-339840">
+              <a:lnSpc>
+                <a:spcPct val="100000"/>
+              </a:lnSpc>
+              <a:buClr>
+                <a:srgbClr val="000000"/>
+              </a:buClr>
+              <a:buFont typeface="Arial"/>
+              <a:buChar char="•"/>
+            </a:pPr>
+            <a:r>
+              <a:rPr lang="en-US" sz="1600" b="0" strike="noStrike" spc="-1" dirty="0">
+                <a:solidFill>
+                  <a:srgbClr val="000000"/>
+                </a:solidFill>
+                <a:latin typeface="Times New Roman"/>
+              </a:rPr>
+              <a:t>Frontend refreshes every 2 seconds — simulates live SOC monitoring with streaming event feed</a:t>
             </a:r>
           </a:p>
         </p:txBody>
@@ -10855,7 +11887,197 @@
                 </a:solidFill>
                 <a:latin typeface="Calibri"/>
               </a:rPr>
-              <a:t>16</a:t>
+              <a:t>17</a:t>
+            </a:fld>
+            <a:endParaRPr lang="en-US" sz="1200" b="0" strike="noStrike" spc="-1">
+              <a:solidFill>
+                <a:srgbClr val="898989"/>
+              </a:solidFill>
+              <a:latin typeface="Calibri"/>
+            </a:endParaRPr>
+          </a:p>
+        </p:txBody>
+      </p:sp>
+    </p:spTree>
+  </p:cSld>
+  <p:clrMapOvr>
+    <a:masterClrMapping/>
+  </p:clrMapOvr>
+</p:sld>
+</file>
+
+<file path=ppt/slides/slide18.xml><?xml version="1.0" encoding="utf-8"?>
+<p:sld xmlns:a="http://schemas.openxmlformats.org/drawingml/2006/main" xmlns:r="http://schemas.openxmlformats.org/officeDocument/2006/relationships" xmlns:p="http://schemas.openxmlformats.org/presentationml/2006/main">
+  <p:cSld>
+    <p:spTree>
+      <p:nvGrpSpPr>
+        <p:cNvPr id="1" name=""/>
+        <p:cNvGrpSpPr/>
+        <p:nvPr/>
+      </p:nvGrpSpPr>
+      <p:grpSpPr>
+        <a:xfrm>
+          <a:off x="0" y="0"/>
+          <a:ext cx="0" cy="0"/>
+          <a:chOff x="0" y="0"/>
+          <a:chExt cx="0" cy="0"/>
+        </a:xfrm>
+      </p:grpSpPr>
+      <p:sp>
+        <p:nvSpPr>
+          <p:cNvPr id="10" name="Title"/>
+          <p:cNvSpPr/>
+          <p:nvPr/>
+        </p:nvSpPr>
+        <p:spPr>
+          <a:xfrm>
+            <a:off x="179280" y="396720"/>
+            <a:ext cx="8685240" cy="762000"/>
+          </a:xfrm>
+          <a:prstGeom prst="rect">
+            <a:avLst/>
+          </a:prstGeom>
+          <a:noFill/>
+          <a:ln w="0">
+            <a:noFill/>
+          </a:ln>
+        </p:spPr>
+        <p:style>
+          <a:lnRef idx="0">
+            <a:scrgbClr r="0" g="0" b="0"/>
+          </a:lnRef>
+          <a:fillRef idx="0">
+            <a:scrgbClr r="0" g="0" b="0"/>
+          </a:fillRef>
+          <a:effectRef idx="0">
+            <a:scrgbClr r="0" g="0" b="0"/>
+          </a:effectRef>
+          <a:fontRef idx="minor"/>
+        </p:style>
+        <p:txBody>
+          <a:bodyPr lIns="90000" tIns="46800" rIns="90000" bIns="46800" anchor="ctr">
+            <a:noAutofit/>
+          </a:bodyPr>
+          <a:lstStyle/>
+          <a:p>
+            <a:pPr algn="ctr">
+              <a:lnSpc>
+                <a:spcPct val="100000"/>
+              </a:lnSpc>
+            </a:pPr>
+            <a:r>
+              <a:rPr lang="en-US" sz="4400" b="0" strike="noStrike" spc="-1" dirty="0">
+                <a:solidFill>
+                  <a:srgbClr val="000000"/>
+                </a:solidFill>
+                <a:latin typeface="Times New Roman"/>
+              </a:rPr>
+              <a:t>Results - UEBA</a:t>
+            </a:r>
+          </a:p>
+        </p:txBody>
+      </p:sp>
+      <p:sp>
+        <p:nvSpPr>
+          <p:cNvPr id="901" name="DatePH"/>
+          <p:cNvSpPr/>
+          <p:nvPr/>
+        </p:nvSpPr>
+        <p:spPr>
+          <a:xfrm>
+            <a:off x="457200" y="6356520"/>
+            <a:ext cx="2133720" cy="365040"/>
+          </a:xfrm>
+          <a:prstGeom prst="rect">
+            <a:avLst/>
+          </a:prstGeom>
+          <a:noFill/>
+          <a:ln w="0">
+            <a:noFill/>
+          </a:ln>
+        </p:spPr>
+        <p:style>
+          <a:lnRef idx="0">
+            <a:scrgbClr r="0" g="0" b="0"/>
+          </a:lnRef>
+          <a:fillRef idx="0">
+            <a:scrgbClr r="0" g="0" b="0"/>
+          </a:fillRef>
+          <a:effectRef idx="0">
+            <a:scrgbClr r="0" g="0" b="0"/>
+          </a:effectRef>
+          <a:fontRef idx="minor"/>
+        </p:style>
+        <p:txBody>
+          <a:bodyPr lIns="0" tIns="0" rIns="0" bIns="0" anchor="b">
+            <a:noAutofit/>
+          </a:bodyPr>
+          <a:lstStyle/>
+          <a:p>
+            <a:fld id="{F196C58C-5F04-4C11-8C72-5E9FC22741FA}" type="datetime">
+              <a:rPr lang="en-US" sz="1200" b="0" strike="noStrike" spc="-1">
+                <a:solidFill>
+                  <a:srgbClr val="045C75"/>
+                </a:solidFill>
+                <a:latin typeface="Calibri"/>
+              </a:rPr>
+              <a:t>3/18/2026</a:t>
+            </a:fld>
+            <a:endParaRPr lang="en-US" sz="1200" b="0" strike="noStrike" spc="-1">
+              <a:solidFill>
+                <a:srgbClr val="045C75"/>
+              </a:solidFill>
+              <a:latin typeface="Calibri"/>
+            </a:endParaRPr>
+          </a:p>
+        </p:txBody>
+      </p:sp>
+      <p:sp>
+        <p:nvSpPr>
+          <p:cNvPr id="902" name="SlideNumPH"/>
+          <p:cNvSpPr/>
+          <p:nvPr/>
+        </p:nvSpPr>
+        <p:spPr>
+          <a:xfrm>
+            <a:off x="7924680" y="6356520"/>
+            <a:ext cx="762120" cy="365040"/>
+          </a:xfrm>
+          <a:prstGeom prst="rect">
+            <a:avLst/>
+          </a:prstGeom>
+          <a:noFill/>
+          <a:ln w="0">
+            <a:noFill/>
+          </a:ln>
+        </p:spPr>
+        <p:style>
+          <a:lnRef idx="0">
+            <a:scrgbClr r="0" g="0" b="0"/>
+          </a:lnRef>
+          <a:fillRef idx="0">
+            <a:scrgbClr r="0" g="0" b="0"/>
+          </a:fillRef>
+          <a:effectRef idx="0">
+            <a:scrgbClr r="0" g="0" b="0"/>
+          </a:effectRef>
+          <a:fontRef idx="minor"/>
+        </p:style>
+        <p:txBody>
+          <a:bodyPr lIns="0" tIns="0" rIns="0" bIns="0" anchor="b">
+            <a:noAutofit/>
+          </a:bodyPr>
+          <a:lstStyle/>
+          <a:p>
+            <a:pPr algn="r"/>
+            <a:fld id="{8F570691-39C2-4917-B0B9-61BC158E1D0B}" type="slidenum">
+              <a:rPr lang="en-US" sz="1200" b="0" strike="noStrike" spc="-1">
+                <a:solidFill>
+                  <a:srgbClr val="898989"/>
+                </a:solidFill>
+                <a:latin typeface="Calibri"/>
+              </a:rPr>
+              <a:t>18</a:t>
             </a:fld>
             <a:endParaRPr lang="en-US" sz="1200" b="0" strike="noStrike" spc="-1">
               <a:solidFill>
@@ -10904,7 +12126,7 @@
 </p:sld>
 </file>
 
-<file path=ppt/slides/slide17.xml><?xml version="1.0" encoding="utf-8"?>
+<file path=ppt/slides/slide19.xml><?xml version="1.0" encoding="utf-8"?>
 <p:sld xmlns:a="http://schemas.openxmlformats.org/drawingml/2006/main" xmlns:r="http://schemas.openxmlformats.org/officeDocument/2006/relationships" xmlns:p="http://schemas.openxmlformats.org/presentationml/2006/main">
   <p:cSld>
     <p:spTree>
@@ -11099,7 +12321,7 @@
                 </a:solidFill>
                 <a:latin typeface="Calibri"/>
               </a:rPr>
-              <a:t>17</a:t>
+              <a:t>19</a:t>
             </a:fld>
             <a:endParaRPr lang="en-US" sz="1200" b="0" strike="noStrike" spc="-1">
               <a:solidFill>
@@ -11153,851 +12375,6 @@
 </p:sld>
 </file>
 
-<file path=ppt/slides/slide18.xml><?xml version="1.0" encoding="utf-8"?>
-<p:sld xmlns:a="http://schemas.openxmlformats.org/drawingml/2006/main" xmlns:r="http://schemas.openxmlformats.org/officeDocument/2006/relationships" xmlns:p="http://schemas.openxmlformats.org/presentationml/2006/main">
-  <p:cSld>
-    <p:spTree>
-      <p:nvGrpSpPr>
-        <p:cNvPr id="1" name=""/>
-        <p:cNvGrpSpPr/>
-        <p:nvPr/>
-      </p:nvGrpSpPr>
-      <p:grpSpPr>
-        <a:xfrm>
-          <a:off x="0" y="0"/>
-          <a:ext cx="0" cy="0"/>
-          <a:chOff x="0" y="0"/>
-          <a:chExt cx="0" cy="0"/>
-        </a:xfrm>
-      </p:grpSpPr>
-      <p:sp>
-        <p:nvSpPr>
-          <p:cNvPr id="10" name="Title"/>
-          <p:cNvSpPr/>
-          <p:nvPr/>
-        </p:nvSpPr>
-        <p:spPr>
-          <a:xfrm>
-            <a:off x="179280" y="396720"/>
-            <a:ext cx="8685240" cy="762000"/>
-          </a:xfrm>
-          <a:prstGeom prst="rect">
-            <a:avLst/>
-          </a:prstGeom>
-          <a:noFill/>
-          <a:ln w="0">
-            <a:noFill/>
-          </a:ln>
-        </p:spPr>
-        <p:style>
-          <a:lnRef idx="0">
-            <a:scrgbClr r="0" g="0" b="0"/>
-          </a:lnRef>
-          <a:fillRef idx="0">
-            <a:scrgbClr r="0" g="0" b="0"/>
-          </a:fillRef>
-          <a:effectRef idx="0">
-            <a:scrgbClr r="0" g="0" b="0"/>
-          </a:effectRef>
-          <a:fontRef idx="minor"/>
-        </p:style>
-        <p:txBody>
-          <a:bodyPr lIns="90000" tIns="46800" rIns="90000" bIns="46800" anchor="ctr">
-            <a:noAutofit/>
-          </a:bodyPr>
-          <a:lstStyle/>
-          <a:p>
-            <a:pPr algn="ctr">
-              <a:lnSpc>
-                <a:spcPct val="100000"/>
-              </a:lnSpc>
-            </a:pPr>
-            <a:r>
-              <a:rPr lang="en-US" sz="4400" b="0" strike="noStrike" spc="-1" dirty="0">
-                <a:solidFill>
-                  <a:srgbClr val="000000"/>
-                </a:solidFill>
-                <a:latin typeface="Times New Roman"/>
-              </a:rPr>
-              <a:t>UEBA – Result Metrics</a:t>
-            </a:r>
-          </a:p>
-        </p:txBody>
-      </p:sp>
-      <p:sp>
-        <p:nvSpPr>
-          <p:cNvPr id="11" name="Content"/>
-          <p:cNvSpPr/>
-          <p:nvPr/>
-        </p:nvSpPr>
-        <p:spPr>
-          <a:xfrm>
-            <a:off x="457200" y="1270000"/>
-            <a:ext cx="8229600" cy="4900000"/>
-          </a:xfrm>
-          <a:prstGeom prst="rect">
-            <a:avLst/>
-          </a:prstGeom>
-          <a:noFill/>
-          <a:ln w="0">
-            <a:noFill/>
-          </a:ln>
-        </p:spPr>
-        <p:style>
-          <a:lnRef idx="0">
-            <a:scrgbClr r="0" g="0" b="0"/>
-          </a:lnRef>
-          <a:fillRef idx="0">
-            <a:scrgbClr r="0" g="0" b="0"/>
-          </a:fillRef>
-          <a:effectRef idx="0">
-            <a:scrgbClr r="0" g="0" b="0"/>
-          </a:effectRef>
-          <a:fontRef idx="minor"/>
-        </p:style>
-        <p:txBody>
-          <a:bodyPr lIns="90000" tIns="46800" rIns="90000" bIns="46800" anchor="t">
-            <a:noAutofit/>
-          </a:bodyPr>
-          <a:lstStyle/>
-          <a:p>
-            <a:pPr algn="l">
-              <a:lnSpc>
-                <a:spcPct val="100000"/>
-              </a:lnSpc>
-              <a:buNone/>
-            </a:pPr>
-            <a:r>
-              <a:rPr lang="en-US" sz="2000" b="1" strike="noStrike" spc="-1" dirty="0">
-                <a:solidFill>
-                  <a:srgbClr val="045C75"/>
-                </a:solidFill>
-                <a:latin typeface="Times New Roman"/>
-              </a:rPr>
-              <a:t>Metric                                    Value</a:t>
-            </a:r>
-          </a:p>
-          <a:p>
-            <a:pPr algn="l">
-              <a:lnSpc>
-                <a:spcPct val="80000"/>
-              </a:lnSpc>
-              <a:buNone/>
-            </a:pPr>
-            <a:r>
-              <a:rPr lang="en-US" sz="1600" b="0" strike="noStrike" spc="-1" dirty="0">
-                <a:solidFill>
-                  <a:srgbClr val="000000"/>
-                </a:solidFill>
-                <a:latin typeface="Times New Roman"/>
-              </a:rPr>
-              <a:t>Precision                                  87.4%</a:t>
-            </a:r>
-          </a:p>
-          <a:p>
-            <a:pPr algn="l">
-              <a:lnSpc>
-                <a:spcPct val="80000"/>
-              </a:lnSpc>
-              <a:buNone/>
-            </a:pPr>
-            <a:r>
-              <a:rPr lang="en-US" sz="1600" b="0" strike="noStrike" spc="-1" dirty="0">
-                <a:solidFill>
-                  <a:srgbClr val="000000"/>
-                </a:solidFill>
-                <a:latin typeface="Times New Roman"/>
-              </a:rPr>
-              <a:t>Recall                                      91.2%</a:t>
-            </a:r>
-          </a:p>
-          <a:p>
-            <a:pPr algn="l">
-              <a:lnSpc>
-                <a:spcPct val="80000"/>
-              </a:lnSpc>
-              <a:buNone/>
-            </a:pPr>
-            <a:r>
-              <a:rPr lang="en-US" sz="1600" b="0" strike="noStrike" spc="-1" dirty="0">
-                <a:solidFill>
-                  <a:srgbClr val="000000"/>
-                </a:solidFill>
-                <a:latin typeface="Times New Roman"/>
-              </a:rPr>
-              <a:t>F1 Score                                   0.89</a:t>
-            </a:r>
-          </a:p>
-          <a:p>
-            <a:pPr algn="l">
-              <a:lnSpc>
-                <a:spcPct val="80000"/>
-              </a:lnSpc>
-              <a:buNone/>
-            </a:pPr>
-            <a:r>
-              <a:rPr lang="en-US" sz="1600" b="0" strike="noStrike" spc="-1" dirty="0">
-                <a:solidFill>
-                  <a:srgbClr val="000000"/>
-                </a:solidFill>
-                <a:latin typeface="Times New Roman"/>
-              </a:rPr>
-              <a:t>False Positive Rate                   Reduced by ~40% vs. static SIEM rules</a:t>
-            </a:r>
-          </a:p>
-          <a:p>
-            <a:pPr algn="l">
-              <a:lnSpc>
-                <a:spcPct val="80000"/>
-              </a:lnSpc>
-              <a:buNone/>
-            </a:pPr>
-            <a:r>
-              <a:rPr lang="en-US" sz="1600" b="0" strike="noStrike" spc="-1" dirty="0">
-                <a:solidFill>
-                  <a:srgbClr val="000000"/>
-                </a:solidFill>
-                <a:latin typeface="Times New Roman"/>
-              </a:rPr>
-              <a:t>MTTR                                       &lt; 10 seconds</a:t>
-            </a:r>
-          </a:p>
-          <a:p>
-            <a:pPr algn="l">
-              <a:lnSpc>
-                <a:spcPct val="80000"/>
-              </a:lnSpc>
-              <a:buNone/>
-            </a:pPr>
-            <a:r>
-              <a:rPr lang="en-US" sz="1600" b="0" strike="noStrike" spc="-1" dirty="0">
-                <a:solidFill>
-                  <a:srgbClr val="000000"/>
-                </a:solidFill>
-                <a:latin typeface="Times New Roman"/>
-              </a:rPr>
-              <a:t>Model: </a:t>
-            </a:r>
-            <a:r>
-              <a:rPr lang="en-US" sz="1600" spc="-1" dirty="0">
-                <a:solidFill>
-                  <a:srgbClr val="000000"/>
-                </a:solidFill>
-                <a:latin typeface="Times New Roman"/>
-              </a:rPr>
-              <a:t> </a:t>
-            </a:r>
-            <a:r>
-              <a:rPr lang="en-US" sz="1600" b="0" strike="noStrike" spc="-1" dirty="0">
-                <a:solidFill>
-                  <a:srgbClr val="000000"/>
-                </a:solidFill>
-                <a:latin typeface="Times New Roman"/>
-              </a:rPr>
-              <a:t>Isolation Forest </a:t>
-            </a:r>
-          </a:p>
-          <a:p>
-            <a:pPr algn="l">
-              <a:lnSpc>
-                <a:spcPct val="80000"/>
-              </a:lnSpc>
-              <a:buNone/>
-            </a:pPr>
-            <a:r>
-              <a:rPr lang="en-US" sz="1600" b="0" strike="noStrike" spc="-1" dirty="0">
-                <a:solidFill>
-                  <a:srgbClr val="000000"/>
-                </a:solidFill>
-                <a:latin typeface="Times New Roman"/>
-              </a:rPr>
-              <a:t>Dataset: CICIDS2017 (100,000 records sampled),  Test split: 30%</a:t>
-            </a:r>
-          </a:p>
-          <a:p>
-            <a:pPr algn="l">
-              <a:lnSpc>
-                <a:spcPct val="100000"/>
-              </a:lnSpc>
-              <a:buNone/>
-            </a:pPr>
-            <a:endParaRPr lang="en-US" sz="1600" b="0" dirty="0">
-              <a:latin typeface="Calibri"/>
-            </a:endParaRPr>
-          </a:p>
-        </p:txBody>
-      </p:sp>
-      <p:sp>
-        <p:nvSpPr>
-          <p:cNvPr id="901" name="DatePH"/>
-          <p:cNvSpPr/>
-          <p:nvPr/>
-        </p:nvSpPr>
-        <p:spPr>
-          <a:xfrm>
-            <a:off x="457200" y="6356520"/>
-            <a:ext cx="2133720" cy="365040"/>
-          </a:xfrm>
-          <a:prstGeom prst="rect">
-            <a:avLst/>
-          </a:prstGeom>
-          <a:noFill/>
-          <a:ln w="0">
-            <a:noFill/>
-          </a:ln>
-        </p:spPr>
-        <p:style>
-          <a:lnRef idx="0">
-            <a:scrgbClr r="0" g="0" b="0"/>
-          </a:lnRef>
-          <a:fillRef idx="0">
-            <a:scrgbClr r="0" g="0" b="0"/>
-          </a:fillRef>
-          <a:effectRef idx="0">
-            <a:scrgbClr r="0" g="0" b="0"/>
-          </a:effectRef>
-          <a:fontRef idx="minor"/>
-        </p:style>
-        <p:txBody>
-          <a:bodyPr lIns="0" tIns="0" rIns="0" bIns="0" anchor="b">
-            <a:noAutofit/>
-          </a:bodyPr>
-          <a:lstStyle/>
-          <a:p>
-            <a:fld id="{F196C58C-5F04-4C11-8C72-5E9FC22741FA}" type="datetime">
-              <a:rPr lang="en-US" sz="1200" b="0" strike="noStrike" spc="-1">
-                <a:solidFill>
-                  <a:srgbClr val="045C75"/>
-                </a:solidFill>
-                <a:latin typeface="Calibri"/>
-              </a:rPr>
-              <a:t>3/18/2026</a:t>
-            </a:fld>
-            <a:endParaRPr lang="en-US" sz="1200" b="0" strike="noStrike" spc="-1">
-              <a:solidFill>
-                <a:srgbClr val="045C75"/>
-              </a:solidFill>
-              <a:latin typeface="Calibri"/>
-            </a:endParaRPr>
-          </a:p>
-        </p:txBody>
-      </p:sp>
-      <p:sp>
-        <p:nvSpPr>
-          <p:cNvPr id="902" name="SlideNumPH"/>
-          <p:cNvSpPr/>
-          <p:nvPr/>
-        </p:nvSpPr>
-        <p:spPr>
-          <a:xfrm>
-            <a:off x="7924680" y="6356520"/>
-            <a:ext cx="762120" cy="365040"/>
-          </a:xfrm>
-          <a:prstGeom prst="rect">
-            <a:avLst/>
-          </a:prstGeom>
-          <a:noFill/>
-          <a:ln w="0">
-            <a:noFill/>
-          </a:ln>
-        </p:spPr>
-        <p:style>
-          <a:lnRef idx="0">
-            <a:scrgbClr r="0" g="0" b="0"/>
-          </a:lnRef>
-          <a:fillRef idx="0">
-            <a:scrgbClr r="0" g="0" b="0"/>
-          </a:fillRef>
-          <a:effectRef idx="0">
-            <a:scrgbClr r="0" g="0" b="0"/>
-          </a:effectRef>
-          <a:fontRef idx="minor"/>
-        </p:style>
-        <p:txBody>
-          <a:bodyPr lIns="0" tIns="0" rIns="0" bIns="0" anchor="b">
-            <a:noAutofit/>
-          </a:bodyPr>
-          <a:lstStyle/>
-          <a:p>
-            <a:pPr algn="r"/>
-            <a:fld id="{8F570691-39C2-4917-B0B9-61BC158E1D0B}" type="slidenum">
-              <a:rPr lang="en-US" sz="1200" b="0" strike="noStrike" spc="-1">
-                <a:solidFill>
-                  <a:srgbClr val="898989"/>
-                </a:solidFill>
-                <a:latin typeface="Calibri"/>
-              </a:rPr>
-              <a:t>18</a:t>
-            </a:fld>
-            <a:endParaRPr lang="en-US" sz="1200" b="0" strike="noStrike" spc="-1">
-              <a:solidFill>
-                <a:srgbClr val="898989"/>
-              </a:solidFill>
-              <a:latin typeface="Calibri"/>
-            </a:endParaRPr>
-          </a:p>
-        </p:txBody>
-      </p:sp>
-    </p:spTree>
-  </p:cSld>
-  <p:clrMapOvr>
-    <a:masterClrMapping/>
-  </p:clrMapOvr>
-</p:sld>
-</file>
-
-<file path=ppt/slides/slide19.xml><?xml version="1.0" encoding="utf-8"?>
-<p:sld xmlns:a="http://schemas.openxmlformats.org/drawingml/2006/main" xmlns:r="http://schemas.openxmlformats.org/officeDocument/2006/relationships" xmlns:p="http://schemas.openxmlformats.org/presentationml/2006/main">
-  <p:cSld>
-    <p:spTree>
-      <p:nvGrpSpPr>
-        <p:cNvPr id="1" name=""/>
-        <p:cNvGrpSpPr/>
-        <p:nvPr/>
-      </p:nvGrpSpPr>
-      <p:grpSpPr>
-        <a:xfrm>
-          <a:off x="0" y="0"/>
-          <a:ext cx="0" cy="0"/>
-          <a:chOff x="0" y="0"/>
-          <a:chExt cx="0" cy="0"/>
-        </a:xfrm>
-      </p:grpSpPr>
-      <p:sp>
-        <p:nvSpPr>
-          <p:cNvPr id="10" name="Title"/>
-          <p:cNvSpPr/>
-          <p:nvPr/>
-        </p:nvSpPr>
-        <p:spPr>
-          <a:xfrm>
-            <a:off x="179280" y="396720"/>
-            <a:ext cx="8685240" cy="762000"/>
-          </a:xfrm>
-          <a:prstGeom prst="rect">
-            <a:avLst/>
-          </a:prstGeom>
-          <a:noFill/>
-          <a:ln w="0">
-            <a:noFill/>
-          </a:ln>
-        </p:spPr>
-        <p:style>
-          <a:lnRef idx="0">
-            <a:scrgbClr r="0" g="0" b="0"/>
-          </a:lnRef>
-          <a:fillRef idx="0">
-            <a:scrgbClr r="0" g="0" b="0"/>
-          </a:fillRef>
-          <a:effectRef idx="0">
-            <a:scrgbClr r="0" g="0" b="0"/>
-          </a:effectRef>
-          <a:fontRef idx="minor"/>
-        </p:style>
-        <p:txBody>
-          <a:bodyPr lIns="90000" tIns="46800" rIns="90000" bIns="46800" anchor="ctr">
-            <a:noAutofit/>
-          </a:bodyPr>
-          <a:lstStyle/>
-          <a:p>
-            <a:pPr algn="ctr">
-              <a:lnSpc>
-                <a:spcPct val="100000"/>
-              </a:lnSpc>
-            </a:pPr>
-            <a:r>
-              <a:rPr lang="en-US" sz="4400" b="0" strike="noStrike" spc="-1" dirty="0">
-                <a:solidFill>
-                  <a:srgbClr val="000000"/>
-                </a:solidFill>
-                <a:latin typeface="Times New Roman"/>
-              </a:rPr>
-              <a:t>Feature Engineering</a:t>
-            </a:r>
-          </a:p>
-        </p:txBody>
-      </p:sp>
-      <p:sp>
-        <p:nvSpPr>
-          <p:cNvPr id="11" name="Content"/>
-          <p:cNvSpPr/>
-          <p:nvPr/>
-        </p:nvSpPr>
-        <p:spPr>
-          <a:xfrm>
-            <a:off x="457200" y="1270000"/>
-            <a:ext cx="8229600" cy="4900000"/>
-          </a:xfrm>
-          <a:prstGeom prst="rect">
-            <a:avLst/>
-          </a:prstGeom>
-          <a:noFill/>
-          <a:ln w="0">
-            <a:noFill/>
-          </a:ln>
-        </p:spPr>
-        <p:style>
-          <a:lnRef idx="0">
-            <a:scrgbClr r="0" g="0" b="0"/>
-          </a:lnRef>
-          <a:fillRef idx="0">
-            <a:scrgbClr r="0" g="0" b="0"/>
-          </a:fillRef>
-          <a:effectRef idx="0">
-            <a:scrgbClr r="0" g="0" b="0"/>
-          </a:effectRef>
-          <a:fontRef idx="minor"/>
-        </p:style>
-        <p:txBody>
-          <a:bodyPr lIns="90000" tIns="46800" rIns="90000" bIns="46800" anchor="t">
-            <a:noAutofit/>
-          </a:bodyPr>
-          <a:lstStyle/>
-          <a:p>
-            <a:pPr algn="l">
-              <a:lnSpc>
-                <a:spcPct val="100000"/>
-              </a:lnSpc>
-              <a:buNone/>
-            </a:pPr>
-            <a:r>
-              <a:rPr lang="en-US" sz="1900" b="1" strike="noStrike" spc="-1" dirty="0">
-                <a:solidFill>
-                  <a:srgbClr val="045C75"/>
-                </a:solidFill>
-                <a:latin typeface="Times New Roman"/>
-              </a:rPr>
-              <a:t>Key Features Used :</a:t>
-            </a:r>
-          </a:p>
-          <a:p>
-            <a:pPr>
-              <a:lnSpc>
-                <a:spcPct val="70000"/>
-              </a:lnSpc>
-            </a:pPr>
-            <a:endParaRPr lang="en-US" sz="1600" b="0" dirty="0">
-              <a:latin typeface="Calibri"/>
-            </a:endParaRPr>
-          </a:p>
-          <a:p>
-            <a:pPr marL="341280" indent="-339840">
-              <a:lnSpc>
-                <a:spcPct val="100000"/>
-              </a:lnSpc>
-              <a:buClr>
-                <a:srgbClr val="000000"/>
-              </a:buClr>
-              <a:buFont typeface="Arial"/>
-              <a:buChar char="•"/>
-            </a:pPr>
-            <a:r>
-              <a:rPr lang="en-US" sz="1700" b="0" strike="noStrike" spc="-1" dirty="0">
-                <a:solidFill>
-                  <a:srgbClr val="000000"/>
-                </a:solidFill>
-                <a:latin typeface="Times New Roman"/>
-              </a:rPr>
-              <a:t>session_duration  —  Total active session time; deviations indicate abnormal usage</a:t>
-            </a:r>
-          </a:p>
-          <a:p>
-            <a:pPr marL="341280" indent="-339840">
-              <a:lnSpc>
-                <a:spcPct val="100000"/>
-              </a:lnSpc>
-              <a:buClr>
-                <a:srgbClr val="000000"/>
-              </a:buClr>
-              <a:buFont typeface="Arial"/>
-              <a:buChar char="•"/>
-            </a:pPr>
-            <a:r>
-              <a:rPr lang="en-US" sz="1700" b="0" strike="noStrike" spc="-1" dirty="0">
-                <a:solidFill>
-                  <a:srgbClr val="000000"/>
-                </a:solidFill>
-                <a:latin typeface="Times New Roman"/>
-              </a:rPr>
-              <a:t>failed_logins  —  Count of consecutive authentication failures per session</a:t>
-            </a:r>
-          </a:p>
-          <a:p>
-            <a:pPr marL="341280" indent="-339840">
-              <a:lnSpc>
-                <a:spcPct val="100000"/>
-              </a:lnSpc>
-              <a:buClr>
-                <a:srgbClr val="000000"/>
-              </a:buClr>
-              <a:buFont typeface="Arial"/>
-              <a:buChar char="•"/>
-            </a:pPr>
-            <a:r>
-              <a:rPr lang="en-US" sz="1700" b="0" strike="noStrike" spc="-1" dirty="0">
-                <a:solidFill>
-                  <a:srgbClr val="000000"/>
-                </a:solidFill>
-                <a:latin typeface="Times New Roman"/>
-              </a:rPr>
-              <a:t>access_time (hour)  —  Login timestamp; off-hours access is a strong anomaly signal</a:t>
-            </a:r>
-          </a:p>
-          <a:p>
-            <a:pPr marL="341280" indent="-339840">
-              <a:lnSpc>
-                <a:spcPct val="100000"/>
-              </a:lnSpc>
-              <a:buClr>
-                <a:srgbClr val="000000"/>
-              </a:buClr>
-              <a:buFont typeface="Arial"/>
-              <a:buChar char="•"/>
-            </a:pPr>
-            <a:r>
-              <a:rPr lang="en-US" sz="1700" b="0" strike="noStrike" spc="-1" dirty="0">
-                <a:solidFill>
-                  <a:srgbClr val="000000"/>
-                </a:solidFill>
-                <a:latin typeface="Times New Roman"/>
-              </a:rPr>
-              <a:t>device_trust_score  —  Normalized score for device compliance and MDM posture</a:t>
-            </a:r>
-          </a:p>
-          <a:p>
-            <a:pPr marL="341280" indent="-339840">
-              <a:lnSpc>
-                <a:spcPct val="100000"/>
-              </a:lnSpc>
-              <a:buClr>
-                <a:srgbClr val="000000"/>
-              </a:buClr>
-              <a:buFont typeface="Arial"/>
-              <a:buChar char="•"/>
-            </a:pPr>
-            <a:r>
-              <a:rPr lang="en-US" sz="1700" b="0" strike="noStrike" spc="-1" dirty="0">
-                <a:solidFill>
-                  <a:srgbClr val="000000"/>
-                </a:solidFill>
-                <a:latin typeface="Times New Roman"/>
-              </a:rPr>
-              <a:t>privilege_change_attempted  —  Binary flag for privilege escalation attempts</a:t>
-            </a:r>
-          </a:p>
-          <a:p>
-            <a:pPr marL="341280" indent="-339840">
-              <a:lnSpc>
-                <a:spcPct val="100000"/>
-              </a:lnSpc>
-              <a:buClr>
-                <a:srgbClr val="000000"/>
-              </a:buClr>
-              <a:buFont typeface="Arial"/>
-              <a:buChar char="•"/>
-            </a:pPr>
-            <a:r>
-              <a:rPr lang="en-US" sz="1700" b="0" strike="noStrike" spc="-1" dirty="0">
-                <a:solidFill>
-                  <a:srgbClr val="000000"/>
-                </a:solidFill>
-                <a:latin typeface="Times New Roman"/>
-              </a:rPr>
-              <a:t>external_connection  —  Binary flag for outbound connections to unknown hosts</a:t>
-            </a:r>
-          </a:p>
-          <a:p>
-            <a:pPr marL="341280" indent="-339840">
-              <a:lnSpc>
-                <a:spcPct val="100000"/>
-              </a:lnSpc>
-              <a:buClr>
-                <a:srgbClr val="000000"/>
-              </a:buClr>
-              <a:buFont typeface="Arial"/>
-              <a:buChar char="•"/>
-            </a:pPr>
-            <a:r>
-              <a:rPr lang="en-US" sz="1700" b="0" strike="noStrike" spc="-1" dirty="0">
-                <a:solidFill>
-                  <a:srgbClr val="000000"/>
-                </a:solidFill>
-                <a:latin typeface="Times New Roman"/>
-              </a:rPr>
-              <a:t>MFA_bypassed  —  Binary flag; MFA bypass combined with other signals = high risk</a:t>
-            </a:r>
-          </a:p>
-          <a:p>
-            <a:pPr>
-              <a:lnSpc>
-                <a:spcPct val="70000"/>
-              </a:lnSpc>
-            </a:pPr>
-            <a:endParaRPr lang="en-US" sz="1600" b="0" dirty="0">
-              <a:latin typeface="Calibri"/>
-            </a:endParaRPr>
-          </a:p>
-          <a:p>
-            <a:pPr algn="l">
-              <a:lnSpc>
-                <a:spcPct val="100000"/>
-              </a:lnSpc>
-              <a:buNone/>
-            </a:pPr>
-            <a:r>
-              <a:rPr lang="en-US" sz="1500" b="0" strike="noStrike" spc="-1" dirty="0">
-                <a:solidFill>
-                  <a:srgbClr val="333333"/>
-                </a:solidFill>
-                <a:latin typeface="Times New Roman"/>
-              </a:rPr>
-              <a:t>These 7 features form the behavioral feature vector fed into Isolation Forest.</a:t>
-            </a:r>
-          </a:p>
-          <a:p>
-            <a:pPr algn="l">
-              <a:lnSpc>
-                <a:spcPct val="100000"/>
-              </a:lnSpc>
-              <a:buNone/>
-            </a:pPr>
-            <a:r>
-              <a:rPr lang="en-US" sz="1500" spc="-1" dirty="0">
-                <a:solidFill>
-                  <a:srgbClr val="333333"/>
-                </a:solidFill>
-                <a:latin typeface="Times New Roman"/>
-              </a:rPr>
-              <a:t>This will be normalized by the SIEM log collection before injecting</a:t>
-            </a:r>
-            <a:endParaRPr lang="en-US" sz="1500" b="0" strike="noStrike" spc="-1" dirty="0">
-              <a:solidFill>
-                <a:srgbClr val="333333"/>
-              </a:solidFill>
-              <a:latin typeface="Times New Roman"/>
-            </a:endParaRPr>
-          </a:p>
-        </p:txBody>
-      </p:sp>
-      <p:sp>
-        <p:nvSpPr>
-          <p:cNvPr id="901" name="DatePH"/>
-          <p:cNvSpPr/>
-          <p:nvPr/>
-        </p:nvSpPr>
-        <p:spPr>
-          <a:xfrm>
-            <a:off x="457200" y="6356520"/>
-            <a:ext cx="2133720" cy="365040"/>
-          </a:xfrm>
-          <a:prstGeom prst="rect">
-            <a:avLst/>
-          </a:prstGeom>
-          <a:noFill/>
-          <a:ln w="0">
-            <a:noFill/>
-          </a:ln>
-        </p:spPr>
-        <p:style>
-          <a:lnRef idx="0">
-            <a:scrgbClr r="0" g="0" b="0"/>
-          </a:lnRef>
-          <a:fillRef idx="0">
-            <a:scrgbClr r="0" g="0" b="0"/>
-          </a:fillRef>
-          <a:effectRef idx="0">
-            <a:scrgbClr r="0" g="0" b="0"/>
-          </a:effectRef>
-          <a:fontRef idx="minor"/>
-        </p:style>
-        <p:txBody>
-          <a:bodyPr lIns="0" tIns="0" rIns="0" bIns="0" anchor="b">
-            <a:noAutofit/>
-          </a:bodyPr>
-          <a:lstStyle/>
-          <a:p>
-            <a:fld id="{F196C58C-5F04-4C11-8C72-5E9FC22741FA}" type="datetime">
-              <a:rPr lang="en-US" sz="1200" b="0" strike="noStrike" spc="-1">
-                <a:solidFill>
-                  <a:srgbClr val="045C75"/>
-                </a:solidFill>
-                <a:latin typeface="Calibri"/>
-              </a:rPr>
-              <a:t>3/18/2026</a:t>
-            </a:fld>
-            <a:endParaRPr lang="en-US" sz="1200" b="0" strike="noStrike" spc="-1">
-              <a:solidFill>
-                <a:srgbClr val="045C75"/>
-              </a:solidFill>
-              <a:latin typeface="Calibri"/>
-            </a:endParaRPr>
-          </a:p>
-        </p:txBody>
-      </p:sp>
-      <p:sp>
-        <p:nvSpPr>
-          <p:cNvPr id="902" name="SlideNumPH"/>
-          <p:cNvSpPr/>
-          <p:nvPr/>
-        </p:nvSpPr>
-        <p:spPr>
-          <a:xfrm>
-            <a:off x="7924680" y="6356520"/>
-            <a:ext cx="762120" cy="365040"/>
-          </a:xfrm>
-          <a:prstGeom prst="rect">
-            <a:avLst/>
-          </a:prstGeom>
-          <a:noFill/>
-          <a:ln w="0">
-            <a:noFill/>
-          </a:ln>
-        </p:spPr>
-        <p:style>
-          <a:lnRef idx="0">
-            <a:scrgbClr r="0" g="0" b="0"/>
-          </a:lnRef>
-          <a:fillRef idx="0">
-            <a:scrgbClr r="0" g="0" b="0"/>
-          </a:fillRef>
-          <a:effectRef idx="0">
-            <a:scrgbClr r="0" g="0" b="0"/>
-          </a:effectRef>
-          <a:fontRef idx="minor"/>
-        </p:style>
-        <p:txBody>
-          <a:bodyPr lIns="0" tIns="0" rIns="0" bIns="0" anchor="b">
-            <a:noAutofit/>
-          </a:bodyPr>
-          <a:lstStyle/>
-          <a:p>
-            <a:pPr algn="r"/>
-            <a:fld id="{8F570691-39C2-4917-B0B9-61BC158E1D0B}" type="slidenum">
-              <a:rPr lang="en-US" sz="1200" b="0" strike="noStrike" spc="-1">
-                <a:solidFill>
-                  <a:srgbClr val="898989"/>
-                </a:solidFill>
-                <a:latin typeface="Calibri"/>
-              </a:rPr>
-              <a:t>19</a:t>
-            </a:fld>
-            <a:endParaRPr lang="en-US" sz="1200" b="0" strike="noStrike" spc="-1">
-              <a:solidFill>
-                <a:srgbClr val="898989"/>
-              </a:solidFill>
-              <a:latin typeface="Calibri"/>
-            </a:endParaRPr>
-          </a:p>
-        </p:txBody>
-      </p:sp>
-    </p:spTree>
-  </p:cSld>
-  <p:clrMapOvr>
-    <a:masterClrMapping/>
-  </p:clrMapOvr>
-</p:sld>
-</file>
-
 <file path=ppt/slides/slide2.xml><?xml version="1.0" encoding="utf-8"?>
 <p:sld xmlns:a="http://schemas.openxmlformats.org/drawingml/2006/main" xmlns:r="http://schemas.openxmlformats.org/officeDocument/2006/relationships" xmlns:p="http://schemas.openxmlformats.org/presentationml/2006/main">
   <p:cSld>
@@ -12545,7 +12922,7 @@
         </p:nvSpPr>
         <p:spPr>
           <a:xfrm>
-            <a:off x="366823" y="694520"/>
+            <a:off x="179280" y="396720"/>
             <a:ext cx="8685240" cy="762000"/>
           </a:xfrm>
           <a:prstGeom prst="rect">
@@ -12586,7 +12963,7 @@
                 </a:solidFill>
                 <a:latin typeface="Times New Roman"/>
               </a:rPr>
-              <a:t>Zen Guard Flow – Zoomed In</a:t>
+              <a:t>UEBA – Result Metrics</a:t>
             </a:r>
           </a:p>
         </p:txBody>
@@ -12599,7 +12976,7 @@
         </p:nvSpPr>
         <p:spPr>
           <a:xfrm>
-            <a:off x="281764" y="1456520"/>
+            <a:off x="457200" y="1270000"/>
             <a:ext cx="8229600" cy="4900000"/>
           </a:xfrm>
           <a:prstGeom prst="rect">
@@ -12630,426 +13007,168 @@
           <a:p>
             <a:pPr algn="l">
               <a:lnSpc>
+                <a:spcPct val="200000"/>
+              </a:lnSpc>
+              <a:buNone/>
+            </a:pPr>
+            <a:r>
+              <a:rPr lang="en-US" sz="2000" b="1" strike="noStrike" spc="-1" dirty="0">
+                <a:solidFill>
+                  <a:srgbClr val="045C75"/>
+                </a:solidFill>
+                <a:latin typeface="Times New Roman"/>
+              </a:rPr>
+              <a:t>Metric                                    Value</a:t>
+            </a:r>
+          </a:p>
+          <a:p>
+            <a:pPr algn="l">
+              <a:lnSpc>
+                <a:spcPct val="200000"/>
+              </a:lnSpc>
+              <a:buNone/>
+            </a:pPr>
+            <a:r>
+              <a:rPr lang="en-US" sz="1600" b="0" strike="noStrike" spc="-1" dirty="0">
+                <a:solidFill>
+                  <a:srgbClr val="000000"/>
+                </a:solidFill>
+                <a:latin typeface="Times New Roman"/>
+              </a:rPr>
+              <a:t>Precision                                  87.4%</a:t>
+            </a:r>
+          </a:p>
+          <a:p>
+            <a:pPr algn="l">
+              <a:lnSpc>
+                <a:spcPct val="200000"/>
+              </a:lnSpc>
+              <a:buNone/>
+            </a:pPr>
+            <a:r>
+              <a:rPr lang="en-US" sz="1600" b="0" strike="noStrike" spc="-1" dirty="0">
+                <a:solidFill>
+                  <a:srgbClr val="000000"/>
+                </a:solidFill>
+                <a:latin typeface="Times New Roman"/>
+              </a:rPr>
+              <a:t>Recall                                      91.2%</a:t>
+            </a:r>
+          </a:p>
+          <a:p>
+            <a:pPr algn="l">
+              <a:lnSpc>
+                <a:spcPct val="200000"/>
+              </a:lnSpc>
+              <a:buNone/>
+            </a:pPr>
+            <a:r>
+              <a:rPr lang="en-US" sz="1600" b="0" strike="noStrike" spc="-1" dirty="0">
+                <a:solidFill>
+                  <a:srgbClr val="000000"/>
+                </a:solidFill>
+                <a:latin typeface="Times New Roman"/>
+              </a:rPr>
+              <a:t>F1 </a:t>
+            </a:r>
+            <a:r>
+              <a:rPr lang="en-US" sz="1600" b="0" strike="noStrike" spc="-1">
+                <a:solidFill>
+                  <a:srgbClr val="000000"/>
+                </a:solidFill>
+                <a:latin typeface="Times New Roman"/>
+              </a:rPr>
+              <a:t>Score                                   0.89</a:t>
+            </a:r>
+          </a:p>
+          <a:p>
+            <a:pPr algn="l">
+              <a:lnSpc>
+                <a:spcPct val="200000"/>
+              </a:lnSpc>
+              <a:buNone/>
+            </a:pPr>
+            <a:r>
+              <a:rPr lang="en-US" sz="1600" b="0" strike="noStrike" spc="-1">
+                <a:solidFill>
+                  <a:srgbClr val="000000"/>
+                </a:solidFill>
+                <a:latin typeface="Times New Roman"/>
+              </a:rPr>
+              <a:t>MTTR                                       </a:t>
+            </a:r>
+            <a:r>
+              <a:rPr lang="en-US" sz="1600" b="0" strike="noStrike" spc="-1" dirty="0">
+                <a:solidFill>
+                  <a:srgbClr val="000000"/>
+                </a:solidFill>
+                <a:latin typeface="Times New Roman"/>
+              </a:rPr>
+              <a:t>&lt; 10 seconds</a:t>
+            </a:r>
+          </a:p>
+          <a:p>
+            <a:pPr algn="l">
+              <a:lnSpc>
+                <a:spcPct val="200000"/>
+              </a:lnSpc>
+              <a:buNone/>
+            </a:pPr>
+            <a:r>
+              <a:rPr lang="en-US" sz="1600" b="0" strike="noStrike" spc="-1" dirty="0">
+                <a:solidFill>
+                  <a:srgbClr val="000000"/>
+                </a:solidFill>
+                <a:latin typeface="Times New Roman"/>
+              </a:rPr>
+              <a:t>Model: 		</a:t>
+            </a:r>
+            <a:r>
+              <a:rPr lang="en-US" sz="1600" spc="-1" dirty="0">
+                <a:solidFill>
+                  <a:srgbClr val="000000"/>
+                </a:solidFill>
+                <a:latin typeface="Times New Roman"/>
+              </a:rPr>
+              <a:t> 	</a:t>
+            </a:r>
+            <a:r>
+              <a:rPr lang="en-US" sz="1600" b="0" strike="noStrike" spc="-1" dirty="0">
+                <a:solidFill>
+                  <a:srgbClr val="000000"/>
+                </a:solidFill>
+                <a:latin typeface="Times New Roman"/>
+              </a:rPr>
+              <a:t>Isolation Forest </a:t>
+            </a:r>
+          </a:p>
+          <a:p>
+            <a:pPr algn="l">
+              <a:lnSpc>
+                <a:spcPct val="200000"/>
+              </a:lnSpc>
+              <a:buNone/>
+            </a:pPr>
+            <a:r>
+              <a:rPr lang="en-US" sz="1600" b="0" strike="noStrike" spc="-1" dirty="0">
+                <a:solidFill>
+                  <a:srgbClr val="000000"/>
+                </a:solidFill>
+                <a:latin typeface="Times New Roman"/>
+              </a:rPr>
+              <a:t>Dataset: 		CICIDS2017 (100,000 records sampled),  Test split: 30%</a:t>
+            </a:r>
+          </a:p>
+          <a:p>
+            <a:pPr algn="l">
+              <a:lnSpc>
                 <a:spcPct val="100000"/>
               </a:lnSpc>
               <a:buNone/>
-            </a:pPr>
-            <a:r>
-              <a:rPr lang="en-US" sz="1900" b="1" spc="-1" dirty="0">
-                <a:solidFill>
-                  <a:srgbClr val="045C75"/>
-                </a:solidFill>
-                <a:latin typeface="Times New Roman"/>
-              </a:rPr>
-              <a:t>Architectural Decision Records</a:t>
-            </a:r>
-            <a:r>
-              <a:rPr lang="en-US" sz="1900" b="1" strike="noStrike" spc="-1" dirty="0">
-                <a:solidFill>
-                  <a:srgbClr val="045C75"/>
-                </a:solidFill>
-                <a:latin typeface="Times New Roman"/>
-              </a:rPr>
-              <a:t>:</a:t>
-            </a:r>
-          </a:p>
-          <a:p>
-            <a:pPr>
-              <a:lnSpc>
-                <a:spcPct val="70000"/>
-              </a:lnSpc>
             </a:pPr>
             <a:endParaRPr lang="en-US" sz="1600" b="0" dirty="0">
               <a:latin typeface="Calibri"/>
             </a:endParaRPr>
-          </a:p>
-          <a:p>
-            <a:pPr algn="l">
-              <a:lnSpc>
-                <a:spcPct val="100000"/>
-              </a:lnSpc>
-              <a:buNone/>
-            </a:pPr>
-            <a:r>
-              <a:rPr lang="en-US" sz="1700" b="0" strike="noStrike" spc="-1" dirty="0">
-                <a:solidFill>
-                  <a:srgbClr val="000000"/>
-                </a:solidFill>
-                <a:latin typeface="Times New Roman"/>
-              </a:rPr>
-              <a:t>Raw Logs  →  Feature Extraction  →  Preprocessing  →  Isolation Forest  →  Anomaly Score  →  Risk Mapping  →  SOAR Trigger</a:t>
-            </a:r>
-          </a:p>
-          <a:p>
-            <a:pPr>
-              <a:lnSpc>
-                <a:spcPct val="70000"/>
-              </a:lnSpc>
-            </a:pPr>
-            <a:endParaRPr lang="en-US" sz="1600" b="0" dirty="0">
-              <a:latin typeface="Calibri"/>
-            </a:endParaRPr>
-          </a:p>
-          <a:p>
-            <a:pPr algn="l">
-              <a:lnSpc>
-                <a:spcPct val="100000"/>
-              </a:lnSpc>
-              <a:buNone/>
-            </a:pPr>
-            <a:r>
-              <a:rPr lang="en-US" sz="1700" b="1" strike="noStrike" spc="-1" dirty="0">
-                <a:solidFill>
-                  <a:srgbClr val="000000"/>
-                </a:solidFill>
-                <a:latin typeface="Times New Roman"/>
-              </a:rPr>
-              <a:t>Stage Details:</a:t>
-            </a:r>
-          </a:p>
-          <a:p>
-            <a:pPr marL="341280" indent="-339840">
-              <a:lnSpc>
-                <a:spcPct val="100000"/>
-              </a:lnSpc>
-              <a:buClr>
-                <a:srgbClr val="000000"/>
-              </a:buClr>
-              <a:buFont typeface="Arial"/>
-              <a:buChar char="•"/>
-            </a:pPr>
-            <a:r>
-              <a:rPr lang="en-US" sz="1600" b="0" strike="noStrike" spc="-1" dirty="0">
-                <a:solidFill>
-                  <a:srgbClr val="000000"/>
-                </a:solidFill>
-                <a:latin typeface="Times New Roman"/>
-              </a:rPr>
-              <a:t>Raw Logs: SIEM-normalized events (firewalls, IDS, IdP, EDR) forwarded to UEBA listener</a:t>
-            </a:r>
-          </a:p>
-          <a:p>
-            <a:pPr marL="341280" indent="-339840">
-              <a:lnSpc>
-                <a:spcPct val="100000"/>
-              </a:lnSpc>
-              <a:buClr>
-                <a:srgbClr val="000000"/>
-              </a:buClr>
-              <a:buFont typeface="Arial"/>
-              <a:buChar char="•"/>
-            </a:pPr>
-            <a:endParaRPr lang="en-US" sz="1600" b="0" strike="noStrike" spc="-1" dirty="0">
-              <a:solidFill>
-                <a:srgbClr val="000000"/>
-              </a:solidFill>
-              <a:latin typeface="Times New Roman"/>
-            </a:endParaRPr>
-          </a:p>
-          <a:p>
-            <a:pPr marL="341280" indent="-339840">
-              <a:lnSpc>
-                <a:spcPct val="100000"/>
-              </a:lnSpc>
-              <a:buClr>
-                <a:srgbClr val="000000"/>
-              </a:buClr>
-              <a:buFont typeface="Arial"/>
-              <a:buChar char="•"/>
-            </a:pPr>
-            <a:r>
-              <a:rPr lang="en-US" sz="1600" b="0" strike="noStrike" spc="-1" dirty="0">
-                <a:solidFill>
-                  <a:srgbClr val="000000"/>
-                </a:solidFill>
-                <a:latin typeface="Times New Roman"/>
-              </a:rPr>
-              <a:t>Feature Extraction: 7 behavioral features extracted per user session (see Feature Engineering slide)</a:t>
-            </a:r>
-          </a:p>
-          <a:p>
-            <a:pPr marL="341280" indent="-339840">
-              <a:lnSpc>
-                <a:spcPct val="100000"/>
-              </a:lnSpc>
-              <a:buClr>
-                <a:srgbClr val="000000"/>
-              </a:buClr>
-              <a:buFont typeface="Arial"/>
-              <a:buChar char="•"/>
-            </a:pPr>
-            <a:r>
-              <a:rPr lang="en-US" sz="1600" b="0" strike="noStrike" spc="-1" dirty="0">
-                <a:solidFill>
-                  <a:srgbClr val="000000"/>
-                </a:solidFill>
-                <a:latin typeface="Times New Roman"/>
-              </a:rPr>
-              <a:t>Preprocessing: Imputation (median) + StandardScaler applied via </a:t>
-            </a:r>
-            <a:r>
-              <a:rPr lang="en-US" sz="1600" b="0" strike="noStrike" spc="-1" dirty="0" err="1">
-                <a:solidFill>
-                  <a:srgbClr val="000000"/>
-                </a:solidFill>
-                <a:latin typeface="Times New Roman"/>
-              </a:rPr>
-              <a:t>sklearn</a:t>
-            </a:r>
-            <a:r>
-              <a:rPr lang="en-US" sz="1600" b="0" strike="noStrike" spc="-1" dirty="0">
-                <a:solidFill>
-                  <a:srgbClr val="000000"/>
-                </a:solidFill>
-                <a:latin typeface="Times New Roman"/>
-              </a:rPr>
-              <a:t> Pipeline</a:t>
-            </a:r>
-          </a:p>
-          <a:p>
-            <a:pPr marL="341280" indent="-339840">
-              <a:lnSpc>
-                <a:spcPct val="100000"/>
-              </a:lnSpc>
-              <a:buClr>
-                <a:srgbClr val="000000"/>
-              </a:buClr>
-              <a:buFont typeface="Arial"/>
-              <a:buChar char="•"/>
-            </a:pPr>
-            <a:endParaRPr lang="en-US" sz="1600" b="0" strike="noStrike" spc="-1" dirty="0">
-              <a:solidFill>
-                <a:srgbClr val="000000"/>
-              </a:solidFill>
-              <a:latin typeface="Times New Roman"/>
-            </a:endParaRPr>
-          </a:p>
-          <a:p>
-            <a:pPr marL="341280" indent="-339840">
-              <a:lnSpc>
-                <a:spcPct val="100000"/>
-              </a:lnSpc>
-              <a:buClr>
-                <a:srgbClr val="000000"/>
-              </a:buClr>
-              <a:buFont typeface="Arial"/>
-              <a:buChar char="•"/>
-            </a:pPr>
-            <a:r>
-              <a:rPr lang="en-US" sz="1600" b="0" strike="noStrike" spc="-1" dirty="0">
-                <a:solidFill>
-                  <a:srgbClr val="000000"/>
-                </a:solidFill>
-                <a:latin typeface="Times New Roman"/>
-              </a:rPr>
-              <a:t>Why Isolation Forest: unsupervised anomaly detection, no label of </a:t>
-            </a:r>
-            <a:r>
-              <a:rPr lang="en-US" sz="1600" b="0" strike="noStrike" spc="-1" dirty="0" err="1">
-                <a:solidFill>
-                  <a:srgbClr val="000000"/>
-                </a:solidFill>
-                <a:latin typeface="Times New Roman"/>
-              </a:rPr>
-              <a:t>malacious</a:t>
-            </a:r>
-            <a:r>
-              <a:rPr lang="en-US" sz="1600" b="0" strike="noStrike" spc="-1" dirty="0">
-                <a:solidFill>
-                  <a:srgbClr val="000000"/>
-                </a:solidFill>
-                <a:latin typeface="Times New Roman"/>
-              </a:rPr>
-              <a:t> attack, fast </a:t>
-            </a:r>
-          </a:p>
-          <a:p>
-            <a:pPr marL="341280" indent="-339840">
-              <a:lnSpc>
-                <a:spcPct val="100000"/>
-              </a:lnSpc>
-              <a:buClr>
-                <a:srgbClr val="000000"/>
-              </a:buClr>
-              <a:buFont typeface="Arial"/>
-              <a:buChar char="•"/>
-            </a:pPr>
-            <a:endParaRPr lang="en-US" sz="1600" b="0" strike="noStrike" spc="-1" dirty="0">
-              <a:solidFill>
-                <a:srgbClr val="000000"/>
-              </a:solidFill>
-              <a:latin typeface="Times New Roman"/>
-            </a:endParaRPr>
-          </a:p>
-          <a:p>
-            <a:pPr marL="341280" indent="-339840">
-              <a:lnSpc>
-                <a:spcPct val="100000"/>
-              </a:lnSpc>
-              <a:buClr>
-                <a:srgbClr val="000000"/>
-              </a:buClr>
-              <a:buFont typeface="Arial"/>
-              <a:buChar char="•"/>
-            </a:pPr>
-            <a:r>
-              <a:rPr lang="en-US" sz="1600" b="0" strike="noStrike" spc="-1" dirty="0">
-                <a:solidFill>
-                  <a:srgbClr val="000000"/>
-                </a:solidFill>
-                <a:latin typeface="Times New Roman"/>
-              </a:rPr>
-              <a:t>Anomaly Score: decision_function() output; negative = anomalous, threshold at 0</a:t>
-            </a:r>
-          </a:p>
-          <a:p>
-            <a:pPr marL="341280" indent="-339840">
-              <a:lnSpc>
-                <a:spcPct val="100000"/>
-              </a:lnSpc>
-              <a:buClr>
-                <a:srgbClr val="000000"/>
-              </a:buClr>
-              <a:buFont typeface="Arial"/>
-              <a:buChar char="•"/>
-            </a:pPr>
-            <a:endParaRPr lang="en-US" sz="1600" b="0" strike="noStrike" spc="-1" dirty="0">
-              <a:solidFill>
-                <a:srgbClr val="000000"/>
-              </a:solidFill>
-              <a:latin typeface="Times New Roman"/>
-            </a:endParaRPr>
-          </a:p>
-          <a:p>
-            <a:pPr marL="341280" indent="-339840">
-              <a:lnSpc>
-                <a:spcPct val="100000"/>
-              </a:lnSpc>
-              <a:buClr>
-                <a:srgbClr val="000000"/>
-              </a:buClr>
-              <a:buFont typeface="Arial"/>
-              <a:buChar char="•"/>
-            </a:pPr>
-            <a:r>
-              <a:rPr lang="en-US" sz="1600" b="0" strike="noStrike" spc="-1" dirty="0">
-                <a:solidFill>
-                  <a:srgbClr val="000000"/>
-                </a:solidFill>
-                <a:latin typeface="Times New Roman"/>
-              </a:rPr>
-              <a:t>Risk Mapping: </a:t>
-            </a:r>
-          </a:p>
-          <a:p>
-            <a:pPr marL="798480" lvl="1" indent="-339840">
-              <a:buClr>
-                <a:srgbClr val="000000"/>
-              </a:buClr>
-              <a:buFont typeface="Arial"/>
-              <a:buChar char="•"/>
-            </a:pPr>
-            <a:r>
-              <a:rPr lang="en-IN" sz="1600" dirty="0" err="1"/>
-              <a:t>normalized_score</a:t>
-            </a:r>
-            <a:r>
-              <a:rPr lang="en-IN" sz="1600" dirty="0"/>
-              <a:t> = (</a:t>
-            </a:r>
-            <a:r>
-              <a:rPr lang="en-IN" sz="1600" dirty="0" err="1"/>
-              <a:t>raw_score</a:t>
-            </a:r>
-            <a:r>
-              <a:rPr lang="en-IN" sz="1600" dirty="0"/>
-              <a:t> - </a:t>
-            </a:r>
-            <a:r>
-              <a:rPr lang="en-IN" sz="1600" dirty="0" err="1"/>
-              <a:t>min_score</a:t>
-            </a:r>
-            <a:r>
-              <a:rPr lang="en-IN" sz="1600" dirty="0"/>
-              <a:t>) / (</a:t>
-            </a:r>
-            <a:r>
-              <a:rPr lang="en-IN" sz="1600" dirty="0" err="1"/>
-              <a:t>max_score</a:t>
-            </a:r>
-            <a:r>
-              <a:rPr lang="en-IN" sz="1600" dirty="0"/>
-              <a:t> - </a:t>
-            </a:r>
-            <a:r>
-              <a:rPr lang="en-IN" sz="1600" dirty="0" err="1"/>
-              <a:t>min_score</a:t>
-            </a:r>
-            <a:r>
-              <a:rPr lang="en-IN" sz="1600" dirty="0"/>
-              <a:t>)</a:t>
-            </a:r>
-          </a:p>
-          <a:p>
-            <a:pPr marL="798480" lvl="1" indent="-339840">
-              <a:buClr>
-                <a:srgbClr val="000000"/>
-              </a:buClr>
-              <a:buFont typeface="Arial"/>
-              <a:buChar char="•"/>
-            </a:pPr>
-            <a:r>
-              <a:rPr lang="en-IN" sz="1600" dirty="0" err="1"/>
-              <a:t>risk_score</a:t>
-            </a:r>
-            <a:r>
-              <a:rPr lang="en-IN" sz="1600" dirty="0"/>
-              <a:t> = (1 - </a:t>
-            </a:r>
-            <a:r>
-              <a:rPr lang="en-IN" sz="1600" dirty="0" err="1"/>
-              <a:t>normalized_score</a:t>
-            </a:r>
-            <a:r>
-              <a:rPr lang="en-IN" sz="1600" dirty="0"/>
-              <a:t>) * 100</a:t>
-            </a:r>
-          </a:p>
-          <a:p>
-            <a:pPr marL="798480" lvl="1" indent="-339840">
-              <a:buClr>
-                <a:srgbClr val="000000"/>
-              </a:buClr>
-              <a:buFont typeface="Arial"/>
-              <a:buChar char="•"/>
-            </a:pPr>
-            <a:endParaRPr lang="en-US" sz="1600" spc="-1" dirty="0">
-              <a:solidFill>
-                <a:srgbClr val="000000"/>
-              </a:solidFill>
-              <a:latin typeface="Times New Roman"/>
-            </a:endParaRPr>
-          </a:p>
-          <a:p>
-            <a:pPr marL="341280" indent="-339840">
-              <a:lnSpc>
-                <a:spcPct val="100000"/>
-              </a:lnSpc>
-              <a:buClr>
-                <a:srgbClr val="000000"/>
-              </a:buClr>
-              <a:buFont typeface="Arial"/>
-              <a:buChar char="•"/>
-            </a:pPr>
-            <a:r>
-              <a:rPr lang="en-US" sz="1600" b="0" strike="noStrike" spc="-1" dirty="0">
-                <a:solidFill>
-                  <a:srgbClr val="000000"/>
-                </a:solidFill>
-                <a:latin typeface="Times New Roman"/>
-              </a:rPr>
-              <a:t>SOAR Trigger: Risk &gt; 95 events dispatch IP block / MFA / endpoint isolation playbooks</a:t>
-            </a:r>
           </a:p>
         </p:txBody>
       </p:sp>
@@ -13238,7 +13357,7 @@
                 </a:solidFill>
                 <a:latin typeface="Times New Roman"/>
               </a:rPr>
-              <a:t>Experiment Setup</a:t>
+              <a:t>UEBA- Feature Engineering</a:t>
             </a:r>
           </a:p>
         </p:txBody>
@@ -13282,7 +13401,7 @@
           <a:p>
             <a:pPr algn="l">
               <a:lnSpc>
-                <a:spcPct val="100000"/>
+                <a:spcPct val="150000"/>
               </a:lnSpc>
               <a:buNone/>
             </a:pPr>
@@ -13293,13 +13412,23 @@
                 </a:solidFill>
                 <a:latin typeface="Times New Roman"/>
               </a:rPr>
-              <a:t>Dataset &amp; Split:</a:t>
-            </a:r>
+              <a:t>Key Features Used :</a:t>
+            </a:r>
+          </a:p>
+          <a:p>
+            <a:pPr>
+              <a:lnSpc>
+                <a:spcPct val="150000"/>
+              </a:lnSpc>
+            </a:pPr>
+            <a:endParaRPr lang="en-US" sz="1600" b="0" dirty="0">
+              <a:latin typeface="Calibri"/>
+            </a:endParaRPr>
           </a:p>
           <a:p>
             <a:pPr marL="341280" indent="-339840">
               <a:lnSpc>
-                <a:spcPct val="100000"/>
+                <a:spcPct val="150000"/>
               </a:lnSpc>
               <a:buClr>
                 <a:srgbClr val="000000"/>
@@ -13314,13 +13443,13 @@
                 </a:solidFill>
                 <a:latin typeface="Times New Roman"/>
               </a:rPr>
-              <a:t>Dataset: CICIDS2017 (100,000 records sampled from full 2.8M) + Synthetic behavioral logs</a:t>
+              <a:t>session_duration  —  Total active session time; deviations indicate abnormal usage</a:t>
             </a:r>
           </a:p>
           <a:p>
             <a:pPr marL="341280" indent="-339840">
               <a:lnSpc>
-                <a:spcPct val="100000"/>
+                <a:spcPct val="150000"/>
               </a:lnSpc>
               <a:buClr>
                 <a:srgbClr val="000000"/>
@@ -13335,13 +13464,13 @@
                 </a:solidFill>
                 <a:latin typeface="Times New Roman"/>
               </a:rPr>
-              <a:t>Train / Test Split: 70% training  |  30% testing  (stratified by label)</a:t>
+              <a:t>failed_logins  —  Count of consecutive authentication failures per session</a:t>
             </a:r>
           </a:p>
           <a:p>
             <a:pPr marL="341280" indent="-339840">
               <a:lnSpc>
-                <a:spcPct val="100000"/>
+                <a:spcPct val="150000"/>
               </a:lnSpc>
               <a:buClr>
                 <a:srgbClr val="000000"/>
@@ -13356,40 +13485,13 @@
                 </a:solidFill>
                 <a:latin typeface="Times New Roman"/>
               </a:rPr>
-              <a:t>Anomaly Injection Ratio: 15% synthetic anomalies injected into behavioral dataset</a:t>
-            </a:r>
-          </a:p>
-          <a:p>
-            <a:pPr>
-              <a:lnSpc>
-                <a:spcPct val="70000"/>
-              </a:lnSpc>
-            </a:pPr>
-            <a:endParaRPr lang="en-US" sz="1600" b="0" dirty="0">
-              <a:latin typeface="Calibri"/>
-            </a:endParaRPr>
-          </a:p>
-          <a:p>
-            <a:pPr algn="l">
-              <a:lnSpc>
-                <a:spcPct val="100000"/>
-              </a:lnSpc>
-              <a:buNone/>
-            </a:pPr>
-            <a:r>
-              <a:rPr lang="en-US" sz="1900" b="1" strike="noStrike" spc="-1" dirty="0">
-                <a:solidFill>
-                  <a:srgbClr val="045C75"/>
-                </a:solidFill>
-                <a:latin typeface="Times New Roman"/>
-              </a:rPr>
-              <a:t>Model Parameters (Isolation Forest):</a:t>
+              <a:t>access_time (hour)  —  Login timestamp; off-hours access is a strong anomaly signal</a:t>
             </a:r>
           </a:p>
           <a:p>
             <a:pPr marL="341280" indent="-339840">
               <a:lnSpc>
-                <a:spcPct val="100000"/>
+                <a:spcPct val="150000"/>
               </a:lnSpc>
               <a:buClr>
                 <a:srgbClr val="000000"/>
@@ -13404,13 +13506,13 @@
                 </a:solidFill>
                 <a:latin typeface="Times New Roman"/>
               </a:rPr>
-              <a:t>n_estimators = 100  (number of isolation trees)</a:t>
+              <a:t>device_trust_score  —  Normalized score for device compliance and MDM posture</a:t>
             </a:r>
           </a:p>
           <a:p>
             <a:pPr marL="341280" indent="-339840">
               <a:lnSpc>
-                <a:spcPct val="100000"/>
+                <a:spcPct val="150000"/>
               </a:lnSpc>
               <a:buClr>
                 <a:srgbClr val="000000"/>
@@ -13425,13 +13527,13 @@
                 </a:solidFill>
                 <a:latin typeface="Times New Roman"/>
               </a:rPr>
-              <a:t>contamination = 0.05  (expected fraction of outliers in training data)</a:t>
+              <a:t>privilege_change_attempted  —  Binary flag for privilege escalation attempts</a:t>
             </a:r>
           </a:p>
           <a:p>
             <a:pPr marL="341280" indent="-339840">
               <a:lnSpc>
-                <a:spcPct val="100000"/>
+                <a:spcPct val="150000"/>
               </a:lnSpc>
               <a:buClr>
                 <a:srgbClr val="000000"/>
@@ -13446,13 +13548,13 @@
                 </a:solidFill>
                 <a:latin typeface="Times New Roman"/>
               </a:rPr>
-              <a:t>random_state = 42  (reproducibility)</a:t>
+              <a:t>external_connection  —  Binary flag for outbound connections to unknown hosts</a:t>
             </a:r>
           </a:p>
           <a:p>
             <a:pPr marL="341280" indent="-339840">
               <a:lnSpc>
-                <a:spcPct val="100000"/>
+                <a:spcPct val="150000"/>
               </a:lnSpc>
               <a:buClr>
                 <a:srgbClr val="000000"/>
@@ -13467,13 +13569,13 @@
                 </a:solidFill>
                 <a:latin typeface="Times New Roman"/>
               </a:rPr>
-              <a:t>n_jobs = -1  (parallel processing on all CPU cores)</a:t>
+              <a:t>MFA_bypassed  —  Binary flag; MFA bypass combined with other signals = high risk</a:t>
             </a:r>
           </a:p>
           <a:p>
             <a:pPr>
               <a:lnSpc>
-                <a:spcPct val="70000"/>
+                <a:spcPct val="150000"/>
               </a:lnSpc>
             </a:pPr>
             <a:endParaRPr lang="en-US" sz="1600" b="0" dirty="0">
@@ -13483,61 +13585,42 @@
           <a:p>
             <a:pPr algn="l">
               <a:lnSpc>
-                <a:spcPct val="100000"/>
+                <a:spcPct val="150000"/>
               </a:lnSpc>
               <a:buNone/>
             </a:pPr>
             <a:r>
-              <a:rPr lang="en-US" sz="1900" b="1" strike="noStrike" spc="-1" dirty="0">
-                <a:solidFill>
-                  <a:srgbClr val="045C75"/>
-                </a:solidFill>
-                <a:latin typeface="Times New Roman"/>
-              </a:rPr>
-              <a:t>Preprocessing Pipeline (sklearn):</a:t>
-            </a:r>
-          </a:p>
-          <a:p>
-            <a:pPr marL="341280" indent="-339840">
-              <a:lnSpc>
-                <a:spcPct val="100000"/>
-              </a:lnSpc>
-              <a:buClr>
-                <a:srgbClr val="000000"/>
-              </a:buClr>
-              <a:buFont typeface="Arial"/>
-              <a:buChar char="•"/>
-            </a:pPr>
-            <a:r>
-              <a:rPr lang="en-US" sz="1700" b="0" strike="noStrike" spc="-1" dirty="0">
-                <a:solidFill>
-                  <a:srgbClr val="000000"/>
-                </a:solidFill>
-                <a:latin typeface="Times New Roman"/>
-              </a:rPr>
-              <a:t>Step 1: SimpleImputer with median strategy for missing values</a:t>
-            </a:r>
-          </a:p>
-          <a:p>
-            <a:pPr marL="341280" indent="-339840">
-              <a:lnSpc>
-                <a:spcPct val="100000"/>
-              </a:lnSpc>
-              <a:buClr>
-                <a:srgbClr val="000000"/>
-              </a:buClr>
-              <a:buFont typeface="Arial"/>
-              <a:buChar char="•"/>
-            </a:pPr>
-            <a:r>
-              <a:rPr lang="en-US" sz="1700" b="0" strike="noStrike" spc="-1" dirty="0">
-                <a:solidFill>
-                  <a:srgbClr val="000000"/>
-                </a:solidFill>
-                <a:latin typeface="Times New Roman"/>
-              </a:rPr>
-              <a:t>Step 2: StandardScaler for feature normalization</a:t>
-            </a:r>
+              <a:rPr lang="en-US" sz="1500" b="0" strike="noStrike" spc="-1" dirty="0">
+                <a:solidFill>
+                  <a:srgbClr val="333333"/>
+                </a:solidFill>
+                <a:latin typeface="Times New Roman"/>
+              </a:rPr>
+              <a:t>These 7 features form the behavioral feature vector fed into Isolation Forest.</a:t>
+            </a:r>
+          </a:p>
+          <a:p>
+            <a:pPr algn="l">
+              <a:lnSpc>
+                <a:spcPct val="150000"/>
+              </a:lnSpc>
+              <a:buNone/>
+            </a:pPr>
+            <a:r>
+              <a:rPr lang="en-US" sz="1500" spc="-1" dirty="0">
+                <a:solidFill>
+                  <a:srgbClr val="333333"/>
+                </a:solidFill>
+                <a:latin typeface="Times New Roman"/>
+              </a:rPr>
+              <a:t>This will be normalized by the SIEM log collection before injecting</a:t>
+            </a:r>
+            <a:endParaRPr lang="en-US" sz="1500" b="0" strike="noStrike" spc="-1" dirty="0">
+              <a:solidFill>
+                <a:srgbClr val="333333"/>
+              </a:solidFill>
+              <a:latin typeface="Times New Roman"/>
+            </a:endParaRPr>
           </a:p>
         </p:txBody>
       </p:sp>
@@ -13685,7 +13768,7 @@
         </p:nvSpPr>
         <p:spPr>
           <a:xfrm>
-            <a:off x="179280" y="396720"/>
+            <a:off x="179280" y="960246"/>
             <a:ext cx="8685240" cy="762000"/>
           </a:xfrm>
           <a:prstGeom prst="rect">
@@ -13726,7 +13809,7 @@
                 </a:solidFill>
                 <a:latin typeface="Times New Roman"/>
               </a:rPr>
-              <a:t>Limitations &amp; Future Work</a:t>
+              <a:t>UEBA - Why Isolation Forest?</a:t>
             </a:r>
           </a:p>
         </p:txBody>
@@ -13739,7 +13822,7 @@
         </p:nvSpPr>
         <p:spPr>
           <a:xfrm>
-            <a:off x="457200" y="1270000"/>
+            <a:off x="407100" y="2003647"/>
             <a:ext cx="8229600" cy="4900000"/>
           </a:xfrm>
           <a:prstGeom prst="rect">
@@ -13781,7 +13864,7 @@
                 </a:solidFill>
                 <a:latin typeface="Times New Roman"/>
               </a:rPr>
-              <a:t>Limitations:</a:t>
+              <a:t>Why Isolation Forest for UEBA?</a:t>
             </a:r>
           </a:p>
           <a:p>
@@ -13802,7 +13885,7 @@
                 </a:solidFill>
                 <a:latin typeface="Times New Roman"/>
               </a:rPr>
-              <a:t>Cannot detect perfectly stealthy attacks that mimic normal behavioral patterns</a:t>
+              <a:t>Unsupervised — no labeled anomaly data required; learns normal behavior from logs</a:t>
             </a:r>
           </a:p>
           <a:p>
@@ -13823,7 +13906,7 @@
                 </a:solidFill>
                 <a:latin typeface="Times New Roman"/>
               </a:rPr>
-              <a:t>Sensitive to feature quality — noisy or incomplete logs degrade detection accuracy</a:t>
+              <a:t>Scalable — sub-linear complexity handles 1M+ events/hour efficiently</a:t>
             </a:r>
           </a:p>
           <a:p>
@@ -13844,7 +13927,7 @@
                 </a:solidFill>
                 <a:latin typeface="Times New Roman"/>
               </a:rPr>
-              <a:t>Static contamination threshold (0.05) requires manual tuning per environment</a:t>
+              <a:t>Tabular-native — works directly on structured behavioral log features without embeddings</a:t>
             </a:r>
           </a:p>
           <a:p>
@@ -13865,7 +13948,7 @@
                 </a:solidFill>
                 <a:latin typeface="Times New Roman"/>
               </a:rPr>
-              <a:t>No temporal memory — each session scored independently; no sequential anomaly chaining</a:t>
+              <a:t>Low false positive control — contamination parameter directly tunes precision/recall tradeoff</a:t>
             </a:r>
           </a:p>
           <a:p>
@@ -13886,7 +13969,7 @@
                 </a:solidFill>
                 <a:latin typeface="Times New Roman"/>
               </a:rPr>
-              <a:t>Trained on simulated/public data; production deployment needs domain-specific retraining</a:t>
+              <a:t>Explainable — anomaly scores are interpretable; can trace which features drove the score</a:t>
             </a:r>
           </a:p>
           <a:p>
@@ -13913,7 +13996,7 @@
                 </a:solidFill>
                 <a:latin typeface="Times New Roman"/>
               </a:rPr>
-              <a:t>Future Work:</a:t>
+              <a:t>Why NOT Deep Learning (LSTM / Autoencoder)?</a:t>
             </a:r>
           </a:p>
           <a:p>
@@ -13934,7 +14017,7 @@
                 </a:solidFill>
                 <a:latin typeface="Times New Roman"/>
               </a:rPr>
-              <a:t>Adaptive thresholds — online learning to auto-adjust contamination per entity baseline</a:t>
+              <a:t>Requires large labeled datasets — insider threat labeled data is scarce in production</a:t>
             </a:r>
           </a:p>
           <a:p>
@@ -13955,7 +14038,7 @@
                 </a:solidFill>
                 <a:latin typeface="Times New Roman"/>
               </a:rPr>
-              <a:t>Hybrid ML — combine rule engine (precision) + Isolation Forest (recall) + deep learning (context)</a:t>
+              <a:t>High compute cost — GPU infrastructure not justified for tabular log data at this scale</a:t>
             </a:r>
           </a:p>
           <a:p>
@@ -13976,7 +14059,7 @@
                 </a:solidFill>
                 <a:latin typeface="Times New Roman"/>
               </a:rPr>
-              <a:t>Streaming pipeline — Apache Kafka + Flink integration for true real-time event scoring</a:t>
+              <a:t>Black-box outputs — harder to explain risk scores to SOC analysts and auditors</a:t>
             </a:r>
           </a:p>
           <a:p>
@@ -13997,7 +14080,34 @@
                 </a:solidFill>
                 <a:latin typeface="Times New Roman"/>
               </a:rPr>
-              <a:t>Explainability layer — SHAP values to justify risk scores in SOC dashboards</a:t>
+              <a:t>Training instability — autoencoders sensitive to reconstruction threshold tuning</a:t>
+            </a:r>
+          </a:p>
+          <a:p>
+            <a:pPr>
+              <a:lnSpc>
+                <a:spcPct val="70000"/>
+              </a:lnSpc>
+            </a:pPr>
+            <a:endParaRPr lang="en-US" sz="1600" b="0" dirty="0">
+              <a:latin typeface="Calibri"/>
+            </a:endParaRPr>
+          </a:p>
+          <a:p>
+            <a:pPr algn="l">
+              <a:lnSpc>
+                <a:spcPct val="100000"/>
+              </a:lnSpc>
+              <a:buNone/>
+            </a:pPr>
+            <a:r>
+              <a:rPr lang="en-US" sz="1500" b="0" strike="noStrike" spc="-1" dirty="0">
+                <a:solidFill>
+                  <a:srgbClr val="333333"/>
+                </a:solidFill>
+                <a:latin typeface="Times New Roman"/>
+              </a:rPr>
+              <a:t>Isolation Forest is the correct choice: fast, unsupervised, explainable, production-ready.</a:t>
             </a:r>
           </a:p>
         </p:txBody>
@@ -14122,1949 +14232,6 @@
 </file>
 
 <file path=ppt/slides/slide23.xml><?xml version="1.0" encoding="utf-8"?>
-<p:sld xmlns:a="http://schemas.openxmlformats.org/drawingml/2006/main" xmlns:r="http://schemas.openxmlformats.org/officeDocument/2006/relationships" xmlns:p="http://schemas.openxmlformats.org/presentationml/2006/main">
-  <p:cSld>
-    <p:spTree>
-      <p:nvGrpSpPr>
-        <p:cNvPr id="1" name=""/>
-        <p:cNvGrpSpPr/>
-        <p:nvPr/>
-      </p:nvGrpSpPr>
-      <p:grpSpPr>
-        <a:xfrm>
-          <a:off x="0" y="0"/>
-          <a:ext cx="0" cy="0"/>
-          <a:chOff x="0" y="0"/>
-          <a:chExt cx="0" cy="0"/>
-        </a:xfrm>
-      </p:grpSpPr>
-      <p:sp>
-        <p:nvSpPr>
-          <p:cNvPr id="10" name="Title"/>
-          <p:cNvSpPr/>
-          <p:nvPr/>
-        </p:nvSpPr>
-        <p:spPr>
-          <a:xfrm>
-            <a:off x="179280" y="396720"/>
-            <a:ext cx="8685240" cy="762000"/>
-          </a:xfrm>
-          <a:prstGeom prst="rect">
-            <a:avLst/>
-          </a:prstGeom>
-          <a:noFill/>
-          <a:ln w="0">
-            <a:noFill/>
-          </a:ln>
-        </p:spPr>
-        <p:style>
-          <a:lnRef idx="0">
-            <a:scrgbClr r="0" g="0" b="0"/>
-          </a:lnRef>
-          <a:fillRef idx="0">
-            <a:scrgbClr r="0" g="0" b="0"/>
-          </a:fillRef>
-          <a:effectRef idx="0">
-            <a:scrgbClr r="0" g="0" b="0"/>
-          </a:effectRef>
-          <a:fontRef idx="minor"/>
-        </p:style>
-        <p:txBody>
-          <a:bodyPr lIns="90000" tIns="46800" rIns="90000" bIns="46800" anchor="ctr">
-            <a:noAutofit/>
-          </a:bodyPr>
-          <a:lstStyle/>
-          <a:p>
-            <a:pPr algn="ctr">
-              <a:lnSpc>
-                <a:spcPct val="100000"/>
-              </a:lnSpc>
-            </a:pPr>
-            <a:r>
-              <a:rPr lang="en-US" sz="4400" b="0" strike="noStrike" spc="-1" dirty="0">
-                <a:solidFill>
-                  <a:srgbClr val="000000"/>
-                </a:solidFill>
-                <a:latin typeface="Times New Roman"/>
-              </a:rPr>
-              <a:t>False Positive Reduction</a:t>
-            </a:r>
-          </a:p>
-        </p:txBody>
-      </p:sp>
-      <p:sp>
-        <p:nvSpPr>
-          <p:cNvPr id="11" name="Content"/>
-          <p:cNvSpPr/>
-          <p:nvPr/>
-        </p:nvSpPr>
-        <p:spPr>
-          <a:xfrm>
-            <a:off x="457200" y="1270000"/>
-            <a:ext cx="8229600" cy="4900000"/>
-          </a:xfrm>
-          <a:prstGeom prst="rect">
-            <a:avLst/>
-          </a:prstGeom>
-          <a:noFill/>
-          <a:ln w="0">
-            <a:noFill/>
-          </a:ln>
-        </p:spPr>
-        <p:style>
-          <a:lnRef idx="0">
-            <a:scrgbClr r="0" g="0" b="0"/>
-          </a:lnRef>
-          <a:fillRef idx="0">
-            <a:scrgbClr r="0" g="0" b="0"/>
-          </a:fillRef>
-          <a:effectRef idx="0">
-            <a:scrgbClr r="0" g="0" b="0"/>
-          </a:effectRef>
-          <a:fontRef idx="minor"/>
-        </p:style>
-        <p:txBody>
-          <a:bodyPr lIns="90000" tIns="46800" rIns="90000" bIns="46800" anchor="t">
-            <a:noAutofit/>
-          </a:bodyPr>
-          <a:lstStyle/>
-          <a:p>
-            <a:pPr algn="l">
-              <a:lnSpc>
-                <a:spcPct val="100000"/>
-              </a:lnSpc>
-              <a:buNone/>
-            </a:pPr>
-            <a:r>
-              <a:rPr lang="en-US" sz="1800" b="1" strike="noStrike" spc="-1" dirty="0">
-                <a:solidFill>
-                  <a:srgbClr val="045C75"/>
-                </a:solidFill>
-                <a:latin typeface="Times New Roman"/>
-              </a:rPr>
-              <a:t>False Positive Comparison: Static SIEM Rules vs. ZenGuard UEBA</a:t>
-            </a:r>
-          </a:p>
-          <a:p>
-            <a:pPr>
-              <a:lnSpc>
-                <a:spcPct val="70000"/>
-              </a:lnSpc>
-            </a:pPr>
-            <a:endParaRPr lang="en-US" sz="1600" b="0" dirty="0">
-              <a:latin typeface="Calibri"/>
-            </a:endParaRPr>
-          </a:p>
-          <a:p>
-            <a:pPr algn="l">
-              <a:lnSpc>
-                <a:spcPct val="100000"/>
-              </a:lnSpc>
-              <a:buNone/>
-            </a:pPr>
-            <a:r>
-              <a:rPr lang="en-US" sz="1700" b="1" strike="noStrike" spc="-1" dirty="0">
-                <a:solidFill>
-                  <a:srgbClr val="000000"/>
-                </a:solidFill>
-                <a:latin typeface="Times New Roman"/>
-              </a:rPr>
-              <a:t>Traditional SIEM (rule-based):</a:t>
-            </a:r>
-          </a:p>
-          <a:p>
-            <a:pPr algn="l">
-              <a:lnSpc>
-                <a:spcPct val="100000"/>
-              </a:lnSpc>
-              <a:buNone/>
-            </a:pPr>
-            <a:r>
-              <a:rPr lang="en-US" sz="1700" b="0" strike="noStrike" spc="-1" dirty="0">
-                <a:solidFill>
-                  <a:srgbClr val="CC2200"/>
-                </a:solidFill>
-                <a:latin typeface="Times New Roman"/>
-              </a:rPr>
-              <a:t>  ██████████████████████████  ~100 FP alerts / 1,000 events (baseline)</a:t>
-            </a:r>
-          </a:p>
-          <a:p>
-            <a:pPr>
-              <a:lnSpc>
-                <a:spcPct val="70000"/>
-              </a:lnSpc>
-            </a:pPr>
-            <a:endParaRPr lang="en-US" sz="1600" b="0" dirty="0">
-              <a:latin typeface="Calibri"/>
-            </a:endParaRPr>
-          </a:p>
-          <a:p>
-            <a:pPr algn="l">
-              <a:lnSpc>
-                <a:spcPct val="100000"/>
-              </a:lnSpc>
-              <a:buNone/>
-            </a:pPr>
-            <a:r>
-              <a:rPr lang="en-US" sz="1700" b="1" strike="noStrike" spc="-1" dirty="0">
-                <a:solidFill>
-                  <a:srgbClr val="000000"/>
-                </a:solidFill>
-                <a:latin typeface="Times New Roman"/>
-              </a:rPr>
-              <a:t>ZenGuard UEBA (Isolation Forest):</a:t>
-            </a:r>
-          </a:p>
-          <a:p>
-            <a:pPr algn="l">
-              <a:lnSpc>
-                <a:spcPct val="100000"/>
-              </a:lnSpc>
-              <a:buNone/>
-            </a:pPr>
-            <a:r>
-              <a:rPr lang="en-US" sz="1700" b="0" strike="noStrike" spc="-1" dirty="0">
-                <a:solidFill>
-                  <a:srgbClr val="007A3D"/>
-                </a:solidFill>
-                <a:latin typeface="Times New Roman"/>
-              </a:rPr>
-              <a:t>  ████████████  ~60 FP alerts / 1,000 events  (~40% reduction)</a:t>
-            </a:r>
-          </a:p>
-          <a:p>
-            <a:pPr>
-              <a:lnSpc>
-                <a:spcPct val="70000"/>
-              </a:lnSpc>
-            </a:pPr>
-            <a:endParaRPr lang="en-US" sz="1600" b="0" dirty="0">
-              <a:latin typeface="Calibri"/>
-            </a:endParaRPr>
-          </a:p>
-          <a:p>
-            <a:pPr algn="l">
-              <a:lnSpc>
-                <a:spcPct val="100000"/>
-              </a:lnSpc>
-              <a:buNone/>
-            </a:pPr>
-            <a:r>
-              <a:rPr lang="en-US" sz="1700" b="1" strike="noStrike" spc="-1" dirty="0">
-                <a:solidFill>
-                  <a:srgbClr val="000000"/>
-                </a:solidFill>
-                <a:latin typeface="Times New Roman"/>
-              </a:rPr>
-              <a:t>Why the reduction?</a:t>
-            </a:r>
-          </a:p>
-          <a:p>
-            <a:pPr marL="341280" indent="-339840">
-              <a:lnSpc>
-                <a:spcPct val="100000"/>
-              </a:lnSpc>
-              <a:buClr>
-                <a:srgbClr val="000000"/>
-              </a:buClr>
-              <a:buFont typeface="Arial"/>
-              <a:buChar char="•"/>
-            </a:pPr>
-            <a:r>
-              <a:rPr lang="en-US" sz="1600" b="0" strike="noStrike" spc="-1" dirty="0">
-                <a:solidFill>
-                  <a:srgbClr val="000000"/>
-                </a:solidFill>
-                <a:latin typeface="Times New Roman"/>
-              </a:rPr>
-              <a:t>Behavior-based scoring ignores single-event triggers; requires multi-feature anomaly</a:t>
-            </a:r>
-          </a:p>
-          <a:p>
-            <a:pPr marL="341280" indent="-339840">
-              <a:lnSpc>
-                <a:spcPct val="100000"/>
-              </a:lnSpc>
-              <a:buClr>
-                <a:srgbClr val="000000"/>
-              </a:buClr>
-              <a:buFont typeface="Arial"/>
-              <a:buChar char="•"/>
-            </a:pPr>
-            <a:r>
-              <a:rPr lang="en-US" sz="1600" b="0" strike="noStrike" spc="-1" dirty="0">
-                <a:solidFill>
-                  <a:srgbClr val="000000"/>
-                </a:solidFill>
-                <a:latin typeface="Times New Roman"/>
-              </a:rPr>
-              <a:t>Baseline learning per entity — normal late-night logins for night-shift staff are NOT flagged</a:t>
-            </a:r>
-          </a:p>
-          <a:p>
-            <a:pPr marL="341280" indent="-339840">
-              <a:lnSpc>
-                <a:spcPct val="100000"/>
-              </a:lnSpc>
-              <a:buClr>
-                <a:srgbClr val="000000"/>
-              </a:buClr>
-              <a:buFont typeface="Arial"/>
-              <a:buChar char="•"/>
-            </a:pPr>
-            <a:r>
-              <a:rPr lang="en-US" sz="1600" b="0" strike="noStrike" spc="-1" dirty="0">
-                <a:solidFill>
-                  <a:srgbClr val="000000"/>
-                </a:solidFill>
-                <a:latin typeface="Times New Roman"/>
-              </a:rPr>
-              <a:t>Contamination parameter limits model to flag only top ~5% most anomalous sessions</a:t>
-            </a:r>
-          </a:p>
-          <a:p>
-            <a:pPr>
-              <a:lnSpc>
-                <a:spcPct val="70000"/>
-              </a:lnSpc>
-            </a:pPr>
-            <a:endParaRPr lang="en-US" sz="1600" b="0" dirty="0">
-              <a:latin typeface="Calibri"/>
-            </a:endParaRPr>
-          </a:p>
-          <a:p>
-            <a:pPr algn="l">
-              <a:lnSpc>
-                <a:spcPct val="100000"/>
-              </a:lnSpc>
-              <a:buNone/>
-            </a:pPr>
-            <a:r>
-              <a:rPr lang="en-US" sz="1500" b="0" strike="noStrike" spc="-1" dirty="0">
-                <a:solidFill>
-                  <a:srgbClr val="333333"/>
-                </a:solidFill>
-                <a:latin typeface="Times New Roman"/>
-              </a:rPr>
-              <a:t>Result: SOC analysts focus on genuine threats, not alert noise.</a:t>
-            </a:r>
-          </a:p>
-        </p:txBody>
-      </p:sp>
-      <p:sp>
-        <p:nvSpPr>
-          <p:cNvPr id="901" name="DatePH"/>
-          <p:cNvSpPr/>
-          <p:nvPr/>
-        </p:nvSpPr>
-        <p:spPr>
-          <a:xfrm>
-            <a:off x="457200" y="6356520"/>
-            <a:ext cx="2133720" cy="365040"/>
-          </a:xfrm>
-          <a:prstGeom prst="rect">
-            <a:avLst/>
-          </a:prstGeom>
-          <a:noFill/>
-          <a:ln w="0">
-            <a:noFill/>
-          </a:ln>
-        </p:spPr>
-        <p:style>
-          <a:lnRef idx="0">
-            <a:scrgbClr r="0" g="0" b="0"/>
-          </a:lnRef>
-          <a:fillRef idx="0">
-            <a:scrgbClr r="0" g="0" b="0"/>
-          </a:fillRef>
-          <a:effectRef idx="0">
-            <a:scrgbClr r="0" g="0" b="0"/>
-          </a:effectRef>
-          <a:fontRef idx="minor"/>
-        </p:style>
-        <p:txBody>
-          <a:bodyPr lIns="0" tIns="0" rIns="0" bIns="0" anchor="b">
-            <a:noAutofit/>
-          </a:bodyPr>
-          <a:lstStyle/>
-          <a:p>
-            <a:fld id="{F196C58C-5F04-4C11-8C72-5E9FC22741FA}" type="datetime">
-              <a:rPr lang="en-US" sz="1200" b="0" strike="noStrike" spc="-1">
-                <a:solidFill>
-                  <a:srgbClr val="045C75"/>
-                </a:solidFill>
-                <a:latin typeface="Calibri"/>
-              </a:rPr>
-              <a:t>3/18/2026</a:t>
-            </a:fld>
-            <a:endParaRPr lang="en-US" sz="1200" b="0" strike="noStrike" spc="-1">
-              <a:solidFill>
-                <a:srgbClr val="045C75"/>
-              </a:solidFill>
-              <a:latin typeface="Calibri"/>
-            </a:endParaRPr>
-          </a:p>
-        </p:txBody>
-      </p:sp>
-      <p:sp>
-        <p:nvSpPr>
-          <p:cNvPr id="902" name="SlideNumPH"/>
-          <p:cNvSpPr/>
-          <p:nvPr/>
-        </p:nvSpPr>
-        <p:spPr>
-          <a:xfrm>
-            <a:off x="7924680" y="6356520"/>
-            <a:ext cx="762120" cy="365040"/>
-          </a:xfrm>
-          <a:prstGeom prst="rect">
-            <a:avLst/>
-          </a:prstGeom>
-          <a:noFill/>
-          <a:ln w="0">
-            <a:noFill/>
-          </a:ln>
-        </p:spPr>
-        <p:style>
-          <a:lnRef idx="0">
-            <a:scrgbClr r="0" g="0" b="0"/>
-          </a:lnRef>
-          <a:fillRef idx="0">
-            <a:scrgbClr r="0" g="0" b="0"/>
-          </a:fillRef>
-          <a:effectRef idx="0">
-            <a:scrgbClr r="0" g="0" b="0"/>
-          </a:effectRef>
-          <a:fontRef idx="minor"/>
-        </p:style>
-        <p:txBody>
-          <a:bodyPr lIns="0" tIns="0" rIns="0" bIns="0" anchor="b">
-            <a:noAutofit/>
-          </a:bodyPr>
-          <a:lstStyle/>
-          <a:p>
-            <a:pPr algn="r"/>
-            <a:fld id="{8F570691-39C2-4917-B0B9-61BC158E1D0B}" type="slidenum">
-              <a:rPr lang="en-US" sz="1200" b="0" strike="noStrike" spc="-1">
-                <a:solidFill>
-                  <a:srgbClr val="898989"/>
-                </a:solidFill>
-                <a:latin typeface="Calibri"/>
-              </a:rPr>
-              <a:t>23</a:t>
-            </a:fld>
-            <a:endParaRPr lang="en-US" sz="1200" b="0" strike="noStrike" spc="-1">
-              <a:solidFill>
-                <a:srgbClr val="898989"/>
-              </a:solidFill>
-              <a:latin typeface="Calibri"/>
-            </a:endParaRPr>
-          </a:p>
-        </p:txBody>
-      </p:sp>
-    </p:spTree>
-  </p:cSld>
-  <p:clrMapOvr>
-    <a:masterClrMapping/>
-  </p:clrMapOvr>
-</p:sld>
-</file>
-
-<file path=ppt/slides/slide24.xml><?xml version="1.0" encoding="utf-8"?>
-<p:sld xmlns:a="http://schemas.openxmlformats.org/drawingml/2006/main" xmlns:r="http://schemas.openxmlformats.org/officeDocument/2006/relationships" xmlns:p="http://schemas.openxmlformats.org/presentationml/2006/main">
-  <p:cSld>
-    <p:spTree>
-      <p:nvGrpSpPr>
-        <p:cNvPr id="1" name=""/>
-        <p:cNvGrpSpPr/>
-        <p:nvPr/>
-      </p:nvGrpSpPr>
-      <p:grpSpPr>
-        <a:xfrm>
-          <a:off x="0" y="0"/>
-          <a:ext cx="0" cy="0"/>
-          <a:chOff x="0" y="0"/>
-          <a:chExt cx="0" cy="0"/>
-        </a:xfrm>
-      </p:grpSpPr>
-      <p:sp>
-        <p:nvSpPr>
-          <p:cNvPr id="10" name="Title"/>
-          <p:cNvSpPr/>
-          <p:nvPr/>
-        </p:nvSpPr>
-        <p:spPr>
-          <a:xfrm>
-            <a:off x="179280" y="396720"/>
-            <a:ext cx="8685240" cy="762000"/>
-          </a:xfrm>
-          <a:prstGeom prst="rect">
-            <a:avLst/>
-          </a:prstGeom>
-          <a:noFill/>
-          <a:ln w="0">
-            <a:noFill/>
-          </a:ln>
-        </p:spPr>
-        <p:style>
-          <a:lnRef idx="0">
-            <a:scrgbClr r="0" g="0" b="0"/>
-          </a:lnRef>
-          <a:fillRef idx="0">
-            <a:scrgbClr r="0" g="0" b="0"/>
-          </a:fillRef>
-          <a:effectRef idx="0">
-            <a:scrgbClr r="0" g="0" b="0"/>
-          </a:effectRef>
-          <a:fontRef idx="minor"/>
-        </p:style>
-        <p:txBody>
-          <a:bodyPr lIns="90000" tIns="46800" rIns="90000" bIns="46800" anchor="ctr">
-            <a:noAutofit/>
-          </a:bodyPr>
-          <a:lstStyle/>
-          <a:p>
-            <a:pPr algn="ctr">
-              <a:lnSpc>
-                <a:spcPct val="100000"/>
-              </a:lnSpc>
-            </a:pPr>
-            <a:r>
-              <a:rPr lang="en-US" sz="4400" b="0" strike="noStrike" spc="-1" dirty="0">
-                <a:solidFill>
-                  <a:srgbClr val="000000"/>
-                </a:solidFill>
-                <a:latin typeface="Times New Roman"/>
-              </a:rPr>
-              <a:t>Real-Time Capability</a:t>
-            </a:r>
-          </a:p>
-        </p:txBody>
-      </p:sp>
-      <p:sp>
-        <p:nvSpPr>
-          <p:cNvPr id="11" name="Content"/>
-          <p:cNvSpPr/>
-          <p:nvPr/>
-        </p:nvSpPr>
-        <p:spPr>
-          <a:xfrm>
-            <a:off x="457200" y="1270000"/>
-            <a:ext cx="8229600" cy="4900000"/>
-          </a:xfrm>
-          <a:prstGeom prst="rect">
-            <a:avLst/>
-          </a:prstGeom>
-          <a:noFill/>
-          <a:ln w="0">
-            <a:noFill/>
-          </a:ln>
-        </p:spPr>
-        <p:style>
-          <a:lnRef idx="0">
-            <a:scrgbClr r="0" g="0" b="0"/>
-          </a:lnRef>
-          <a:fillRef idx="0">
-            <a:scrgbClr r="0" g="0" b="0"/>
-          </a:fillRef>
-          <a:effectRef idx="0">
-            <a:scrgbClr r="0" g="0" b="0"/>
-          </a:effectRef>
-          <a:fontRef idx="minor"/>
-        </p:style>
-        <p:txBody>
-          <a:bodyPr lIns="90000" tIns="46800" rIns="90000" bIns="46800" anchor="t">
-            <a:noAutofit/>
-          </a:bodyPr>
-          <a:lstStyle/>
-          <a:p>
-            <a:pPr algn="l">
-              <a:lnSpc>
-                <a:spcPct val="100000"/>
-              </a:lnSpc>
-              <a:buNone/>
-            </a:pPr>
-            <a:r>
-              <a:rPr lang="en-US" sz="1900" b="1" strike="noStrike" spc="-1" dirty="0">
-                <a:solidFill>
-                  <a:srgbClr val="045C75"/>
-                </a:solidFill>
-                <a:latin typeface="Times New Roman"/>
-              </a:rPr>
-              <a:t>Throughput Claim: 1M+ events/hour processed in real time</a:t>
-            </a:r>
-          </a:p>
-          <a:p>
-            <a:pPr>
-              <a:lnSpc>
-                <a:spcPct val="70000"/>
-              </a:lnSpc>
-            </a:pPr>
-            <a:endParaRPr lang="en-US" sz="1600" b="0" dirty="0">
-              <a:latin typeface="Calibri"/>
-            </a:endParaRPr>
-          </a:p>
-          <a:p>
-            <a:pPr algn="l">
-              <a:lnSpc>
-                <a:spcPct val="100000"/>
-              </a:lnSpc>
-              <a:buNone/>
-            </a:pPr>
-            <a:r>
-              <a:rPr lang="en-US" sz="1700" b="1" strike="noStrike" spc="-1" dirty="0">
-                <a:solidFill>
-                  <a:srgbClr val="000000"/>
-                </a:solidFill>
-                <a:latin typeface="Times New Roman"/>
-              </a:rPr>
-              <a:t>Why Isolation Forest is Fast:</a:t>
-            </a:r>
-          </a:p>
-          <a:p>
-            <a:pPr marL="341280" indent="-339840">
-              <a:lnSpc>
-                <a:spcPct val="100000"/>
-              </a:lnSpc>
-              <a:buClr>
-                <a:srgbClr val="000000"/>
-              </a:buClr>
-              <a:buFont typeface="Arial"/>
-              <a:buChar char="•"/>
-            </a:pPr>
-            <a:r>
-              <a:rPr lang="en-US" sz="1700" b="0" strike="noStrike" spc="-1" dirty="0">
-                <a:solidFill>
-                  <a:srgbClr val="000000"/>
-                </a:solidFill>
-                <a:latin typeface="Times New Roman"/>
-              </a:rPr>
-              <a:t>Sub-linear complexity: O(n log n) training, O(log n) prediction per sample</a:t>
-            </a:r>
-          </a:p>
-          <a:p>
-            <a:pPr marL="341280" indent="-339840">
-              <a:lnSpc>
-                <a:spcPct val="100000"/>
-              </a:lnSpc>
-              <a:buClr>
-                <a:srgbClr val="000000"/>
-              </a:buClr>
-              <a:buFont typeface="Arial"/>
-              <a:buChar char="•"/>
-            </a:pPr>
-            <a:r>
-              <a:rPr lang="en-US" sz="1700" b="0" strike="noStrike" spc="-1" dirty="0">
-                <a:solidFill>
-                  <a:srgbClr val="000000"/>
-                </a:solidFill>
-                <a:latin typeface="Times New Roman"/>
-              </a:rPr>
-              <a:t>No distance calculations — trees isolate anomalies via random partitioning</a:t>
-            </a:r>
-          </a:p>
-          <a:p>
-            <a:pPr marL="341280" indent="-339840">
-              <a:lnSpc>
-                <a:spcPct val="100000"/>
-              </a:lnSpc>
-              <a:buClr>
-                <a:srgbClr val="000000"/>
-              </a:buClr>
-              <a:buFont typeface="Arial"/>
-              <a:buChar char="•"/>
-            </a:pPr>
-            <a:r>
-              <a:rPr lang="en-US" sz="1700" b="0" strike="noStrike" spc="-1" dirty="0">
-                <a:solidFill>
-                  <a:srgbClr val="000000"/>
-                </a:solidFill>
-                <a:latin typeface="Times New Roman"/>
-              </a:rPr>
-              <a:t>n_jobs=-1 enables full parallelism across all CPU cores (sklearn)</a:t>
-            </a:r>
-          </a:p>
-          <a:p>
-            <a:pPr marL="341280" indent="-339840">
-              <a:lnSpc>
-                <a:spcPct val="100000"/>
-              </a:lnSpc>
-              <a:buClr>
-                <a:srgbClr val="000000"/>
-              </a:buClr>
-              <a:buFont typeface="Arial"/>
-              <a:buChar char="•"/>
-            </a:pPr>
-            <a:r>
-              <a:rPr lang="en-US" sz="1700" b="0" strike="noStrike" spc="-1" dirty="0">
-                <a:solidFill>
-                  <a:srgbClr val="000000"/>
-                </a:solidFill>
-                <a:latin typeface="Times New Roman"/>
-              </a:rPr>
-              <a:t>Lightweight feature vector (7 features) — minimal memory footprint per session</a:t>
-            </a:r>
-          </a:p>
-          <a:p>
-            <a:pPr>
-              <a:lnSpc>
-                <a:spcPct val="70000"/>
-              </a:lnSpc>
-            </a:pPr>
-            <a:endParaRPr lang="en-US" sz="1600" b="0" dirty="0">
-              <a:latin typeface="Calibri"/>
-            </a:endParaRPr>
-          </a:p>
-          <a:p>
-            <a:pPr algn="l">
-              <a:lnSpc>
-                <a:spcPct val="100000"/>
-              </a:lnSpc>
-              <a:buNone/>
-            </a:pPr>
-            <a:r>
-              <a:rPr lang="en-US" sz="1700" b="1" strike="noStrike" spc="-1" dirty="0">
-                <a:solidFill>
-                  <a:srgbClr val="000000"/>
-                </a:solidFill>
-                <a:latin typeface="Times New Roman"/>
-              </a:rPr>
-              <a:t>Processing Time Estimates:</a:t>
-            </a:r>
-          </a:p>
-          <a:p>
-            <a:pPr marL="341280" indent="-339840">
-              <a:lnSpc>
-                <a:spcPct val="100000"/>
-              </a:lnSpc>
-              <a:buClr>
-                <a:srgbClr val="000000"/>
-              </a:buClr>
-              <a:buFont typeface="Arial"/>
-              <a:buChar char="•"/>
-            </a:pPr>
-            <a:r>
-              <a:rPr lang="en-US" sz="1700" b="0" strike="noStrike" spc="-1" dirty="0">
-                <a:solidFill>
-                  <a:srgbClr val="000000"/>
-                </a:solidFill>
-                <a:latin typeface="Times New Roman"/>
-              </a:rPr>
-              <a:t>Batch prediction (1,000 events): &lt; 50 ms  (sklearn benchmark on standard hardware)</a:t>
-            </a:r>
-          </a:p>
-          <a:p>
-            <a:pPr marL="341280" indent="-339840">
-              <a:lnSpc>
-                <a:spcPct val="100000"/>
-              </a:lnSpc>
-              <a:buClr>
-                <a:srgbClr val="000000"/>
-              </a:buClr>
-              <a:buFont typeface="Arial"/>
-              <a:buChar char="•"/>
-            </a:pPr>
-            <a:r>
-              <a:rPr lang="en-US" sz="1700" b="0" strike="noStrike" spc="-1" dirty="0">
-                <a:solidFill>
-                  <a:srgbClr val="000000"/>
-                </a:solidFill>
-                <a:latin typeface="Times New Roman"/>
-              </a:rPr>
-              <a:t>Single-event scoring: ~0.1 ms  — well within sub-second response SLA</a:t>
-            </a:r>
-          </a:p>
-          <a:p>
-            <a:pPr marL="341280" indent="-339840">
-              <a:lnSpc>
-                <a:spcPct val="100000"/>
-              </a:lnSpc>
-              <a:buClr>
-                <a:srgbClr val="000000"/>
-              </a:buClr>
-              <a:buFont typeface="Arial"/>
-              <a:buChar char="•"/>
-            </a:pPr>
-            <a:r>
-              <a:rPr lang="en-US" sz="1700" b="0" strike="noStrike" spc="-1" dirty="0">
-                <a:solidFill>
-                  <a:srgbClr val="000000"/>
-                </a:solidFill>
-                <a:latin typeface="Times New Roman"/>
-              </a:rPr>
-              <a:t>Model load from disk (joblib): ~200 ms  — loaded once at service startup</a:t>
-            </a:r>
-          </a:p>
-          <a:p>
-            <a:pPr>
-              <a:lnSpc>
-                <a:spcPct val="70000"/>
-              </a:lnSpc>
-            </a:pPr>
-            <a:endParaRPr lang="en-US" sz="1600" b="0" dirty="0">
-              <a:latin typeface="Calibri"/>
-            </a:endParaRPr>
-          </a:p>
-          <a:p>
-            <a:pPr algn="l">
-              <a:lnSpc>
-                <a:spcPct val="100000"/>
-              </a:lnSpc>
-              <a:buNone/>
-            </a:pPr>
-            <a:r>
-              <a:rPr lang="en-US" sz="1500" b="0" strike="noStrike" spc="-1" dirty="0">
-                <a:solidFill>
-                  <a:srgbClr val="333333"/>
-                </a:solidFill>
-                <a:latin typeface="Times New Roman"/>
-              </a:rPr>
-              <a:t>MTTR &lt; 10 seconds = detection time + risk mapping + SOAR playbook dispatch.</a:t>
-            </a:r>
-          </a:p>
-          <a:p>
-            <a:pPr algn="l">
-              <a:lnSpc>
-                <a:spcPct val="100000"/>
-              </a:lnSpc>
-              <a:buNone/>
-            </a:pPr>
-            <a:r>
-              <a:rPr lang="en-US" sz="1500" b="0" strike="noStrike" spc="-1" dirty="0">
-                <a:solidFill>
-                  <a:srgbClr val="333333"/>
-                </a:solidFill>
-                <a:latin typeface="Times New Roman"/>
-              </a:rPr>
-              <a:t>Isolation Forest inference contributes &lt; 1 second to this pipeline.</a:t>
-            </a:r>
-          </a:p>
-        </p:txBody>
-      </p:sp>
-      <p:sp>
-        <p:nvSpPr>
-          <p:cNvPr id="901" name="DatePH"/>
-          <p:cNvSpPr/>
-          <p:nvPr/>
-        </p:nvSpPr>
-        <p:spPr>
-          <a:xfrm>
-            <a:off x="457200" y="6356520"/>
-            <a:ext cx="2133720" cy="365040"/>
-          </a:xfrm>
-          <a:prstGeom prst="rect">
-            <a:avLst/>
-          </a:prstGeom>
-          <a:noFill/>
-          <a:ln w="0">
-            <a:noFill/>
-          </a:ln>
-        </p:spPr>
-        <p:style>
-          <a:lnRef idx="0">
-            <a:scrgbClr r="0" g="0" b="0"/>
-          </a:lnRef>
-          <a:fillRef idx="0">
-            <a:scrgbClr r="0" g="0" b="0"/>
-          </a:fillRef>
-          <a:effectRef idx="0">
-            <a:scrgbClr r="0" g="0" b="0"/>
-          </a:effectRef>
-          <a:fontRef idx="minor"/>
-        </p:style>
-        <p:txBody>
-          <a:bodyPr lIns="0" tIns="0" rIns="0" bIns="0" anchor="b">
-            <a:noAutofit/>
-          </a:bodyPr>
-          <a:lstStyle/>
-          <a:p>
-            <a:fld id="{F196C58C-5F04-4C11-8C72-5E9FC22741FA}" type="datetime">
-              <a:rPr lang="en-US" sz="1200" b="0" strike="noStrike" spc="-1">
-                <a:solidFill>
-                  <a:srgbClr val="045C75"/>
-                </a:solidFill>
-                <a:latin typeface="Calibri"/>
-              </a:rPr>
-              <a:t>3/18/2026</a:t>
-            </a:fld>
-            <a:endParaRPr lang="en-US" sz="1200" b="0" strike="noStrike" spc="-1">
-              <a:solidFill>
-                <a:srgbClr val="045C75"/>
-              </a:solidFill>
-              <a:latin typeface="Calibri"/>
-            </a:endParaRPr>
-          </a:p>
-        </p:txBody>
-      </p:sp>
-      <p:sp>
-        <p:nvSpPr>
-          <p:cNvPr id="902" name="SlideNumPH"/>
-          <p:cNvSpPr/>
-          <p:nvPr/>
-        </p:nvSpPr>
-        <p:spPr>
-          <a:xfrm>
-            <a:off x="7924680" y="6356520"/>
-            <a:ext cx="762120" cy="365040"/>
-          </a:xfrm>
-          <a:prstGeom prst="rect">
-            <a:avLst/>
-          </a:prstGeom>
-          <a:noFill/>
-          <a:ln w="0">
-            <a:noFill/>
-          </a:ln>
-        </p:spPr>
-        <p:style>
-          <a:lnRef idx="0">
-            <a:scrgbClr r="0" g="0" b="0"/>
-          </a:lnRef>
-          <a:fillRef idx="0">
-            <a:scrgbClr r="0" g="0" b="0"/>
-          </a:fillRef>
-          <a:effectRef idx="0">
-            <a:scrgbClr r="0" g="0" b="0"/>
-          </a:effectRef>
-          <a:fontRef idx="minor"/>
-        </p:style>
-        <p:txBody>
-          <a:bodyPr lIns="0" tIns="0" rIns="0" bIns="0" anchor="b">
-            <a:noAutofit/>
-          </a:bodyPr>
-          <a:lstStyle/>
-          <a:p>
-            <a:pPr algn="r"/>
-            <a:fld id="{8F570691-39C2-4917-B0B9-61BC158E1D0B}" type="slidenum">
-              <a:rPr lang="en-US" sz="1200" b="0" strike="noStrike" spc="-1">
-                <a:solidFill>
-                  <a:srgbClr val="898989"/>
-                </a:solidFill>
-                <a:latin typeface="Calibri"/>
-              </a:rPr>
-              <a:t>24</a:t>
-            </a:fld>
-            <a:endParaRPr lang="en-US" sz="1200" b="0" strike="noStrike" spc="-1">
-              <a:solidFill>
-                <a:srgbClr val="898989"/>
-              </a:solidFill>
-              <a:latin typeface="Calibri"/>
-            </a:endParaRPr>
-          </a:p>
-        </p:txBody>
-      </p:sp>
-    </p:spTree>
-  </p:cSld>
-  <p:clrMapOvr>
-    <a:masterClrMapping/>
-  </p:clrMapOvr>
-</p:sld>
-</file>
-
-<file path=ppt/slides/slide25.xml><?xml version="1.0" encoding="utf-8"?>
-<p:sld xmlns:a="http://schemas.openxmlformats.org/drawingml/2006/main" xmlns:r="http://schemas.openxmlformats.org/officeDocument/2006/relationships" xmlns:p="http://schemas.openxmlformats.org/presentationml/2006/main">
-  <p:cSld>
-    <p:spTree>
-      <p:nvGrpSpPr>
-        <p:cNvPr id="1" name=""/>
-        <p:cNvGrpSpPr/>
-        <p:nvPr/>
-      </p:nvGrpSpPr>
-      <p:grpSpPr>
-        <a:xfrm>
-          <a:off x="0" y="0"/>
-          <a:ext cx="0" cy="0"/>
-          <a:chOff x="0" y="0"/>
-          <a:chExt cx="0" cy="0"/>
-        </a:xfrm>
-      </p:grpSpPr>
-      <p:sp>
-        <p:nvSpPr>
-          <p:cNvPr id="10" name="Title"/>
-          <p:cNvSpPr/>
-          <p:nvPr/>
-        </p:nvSpPr>
-        <p:spPr>
-          <a:xfrm>
-            <a:off x="179280" y="396720"/>
-            <a:ext cx="8685240" cy="762000"/>
-          </a:xfrm>
-          <a:prstGeom prst="rect">
-            <a:avLst/>
-          </a:prstGeom>
-          <a:noFill/>
-          <a:ln w="0">
-            <a:noFill/>
-          </a:ln>
-        </p:spPr>
-        <p:style>
-          <a:lnRef idx="0">
-            <a:scrgbClr r="0" g="0" b="0"/>
-          </a:lnRef>
-          <a:fillRef idx="0">
-            <a:scrgbClr r="0" g="0" b="0"/>
-          </a:fillRef>
-          <a:effectRef idx="0">
-            <a:scrgbClr r="0" g="0" b="0"/>
-          </a:effectRef>
-          <a:fontRef idx="minor"/>
-        </p:style>
-        <p:txBody>
-          <a:bodyPr lIns="90000" tIns="46800" rIns="90000" bIns="46800" anchor="ctr">
-            <a:noAutofit/>
-          </a:bodyPr>
-          <a:lstStyle/>
-          <a:p>
-            <a:pPr algn="ctr">
-              <a:lnSpc>
-                <a:spcPct val="100000"/>
-              </a:lnSpc>
-            </a:pPr>
-            <a:r>
-              <a:rPr lang="en-US" sz="4400" b="0" strike="noStrike" spc="-1" dirty="0">
-                <a:solidFill>
-                  <a:srgbClr val="000000"/>
-                </a:solidFill>
-                <a:latin typeface="Times New Roman"/>
-              </a:rPr>
-              <a:t>End-to-End Case Study</a:t>
-            </a:r>
-          </a:p>
-        </p:txBody>
-      </p:sp>
-      <p:sp>
-        <p:nvSpPr>
-          <p:cNvPr id="11" name="Content"/>
-          <p:cNvSpPr/>
-          <p:nvPr/>
-        </p:nvSpPr>
-        <p:spPr>
-          <a:xfrm>
-            <a:off x="457200" y="1270000"/>
-            <a:ext cx="8229600" cy="4900000"/>
-          </a:xfrm>
-          <a:prstGeom prst="rect">
-            <a:avLst/>
-          </a:prstGeom>
-          <a:noFill/>
-          <a:ln w="0">
-            <a:noFill/>
-          </a:ln>
-        </p:spPr>
-        <p:style>
-          <a:lnRef idx="0">
-            <a:scrgbClr r="0" g="0" b="0"/>
-          </a:lnRef>
-          <a:fillRef idx="0">
-            <a:scrgbClr r="0" g="0" b="0"/>
-          </a:fillRef>
-          <a:effectRef idx="0">
-            <a:scrgbClr r="0" g="0" b="0"/>
-          </a:effectRef>
-          <a:fontRef idx="minor"/>
-        </p:style>
-        <p:txBody>
-          <a:bodyPr lIns="90000" tIns="46800" rIns="90000" bIns="46800" anchor="t">
-            <a:noAutofit/>
-          </a:bodyPr>
-          <a:lstStyle/>
-          <a:p>
-            <a:pPr algn="l">
-              <a:lnSpc>
-                <a:spcPct val="100000"/>
-              </a:lnSpc>
-              <a:buNone/>
-            </a:pPr>
-            <a:r>
-              <a:rPr lang="en-US" sz="1900" b="1" strike="noStrike" spc="-1" dirty="0">
-                <a:solidFill>
-                  <a:srgbClr val="045C75"/>
-                </a:solidFill>
-                <a:latin typeface="Times New Roman"/>
-              </a:rPr>
-              <a:t>Scenario: Compromised Insider Account Detected</a:t>
-            </a:r>
-          </a:p>
-          <a:p>
-            <a:pPr>
-              <a:lnSpc>
-                <a:spcPct val="70000"/>
-              </a:lnSpc>
-            </a:pPr>
-            <a:endParaRPr lang="en-US" sz="1600" b="0" dirty="0">
-              <a:latin typeface="Calibri"/>
-            </a:endParaRPr>
-          </a:p>
-          <a:p>
-            <a:pPr algn="l">
-              <a:lnSpc>
-                <a:spcPct val="100000"/>
-              </a:lnSpc>
-              <a:buNone/>
-            </a:pPr>
-            <a:r>
-              <a:rPr lang="en-US" sz="1700" b="1" strike="noStrike" spc="-1" dirty="0">
-                <a:solidFill>
-                  <a:srgbClr val="000000"/>
-                </a:solidFill>
-                <a:latin typeface="Times New Roman"/>
-              </a:rPr>
-              <a:t>Input (Raw Behavioral Session Log):</a:t>
-            </a:r>
-          </a:p>
-          <a:p>
-            <a:pPr marL="341280" indent="-339840">
-              <a:lnSpc>
-                <a:spcPct val="100000"/>
-              </a:lnSpc>
-              <a:buClr>
-                <a:srgbClr val="000000"/>
-              </a:buClr>
-              <a:buFont typeface="Arial"/>
-              <a:buChar char="•"/>
-            </a:pPr>
-            <a:r>
-              <a:rPr lang="en-US" sz="1700" b="0" strike="noStrike" spc="-1" dirty="0">
-                <a:solidFill>
-                  <a:srgbClr val="000000"/>
-                </a:solidFill>
-                <a:latin typeface="Times New Roman"/>
-              </a:rPr>
-              <a:t>User logs in at 02:14 AM (off-hours)  →  access_time anomaly signal triggered</a:t>
-            </a:r>
-          </a:p>
-          <a:p>
-            <a:pPr marL="341280" indent="-339840">
-              <a:lnSpc>
-                <a:spcPct val="100000"/>
-              </a:lnSpc>
-              <a:buClr>
-                <a:srgbClr val="000000"/>
-              </a:buClr>
-              <a:buFont typeface="Arial"/>
-              <a:buChar char="•"/>
-            </a:pPr>
-            <a:r>
-              <a:rPr lang="en-US" sz="1700" b="0" strike="noStrike" spc="-1" dirty="0">
-                <a:solidFill>
-                  <a:srgbClr val="000000"/>
-                </a:solidFill>
-                <a:latin typeface="Times New Roman"/>
-              </a:rPr>
-              <a:t>5 consecutive failed logins before success  →  failed_logins = 5 (threshold: 3)</a:t>
-            </a:r>
-          </a:p>
-          <a:p>
-            <a:pPr marL="341280" indent="-339840">
-              <a:lnSpc>
-                <a:spcPct val="100000"/>
-              </a:lnSpc>
-              <a:buClr>
-                <a:srgbClr val="000000"/>
-              </a:buClr>
-              <a:buFont typeface="Arial"/>
-              <a:buChar char="•"/>
-            </a:pPr>
-            <a:r>
-              <a:rPr lang="en-US" sz="1700" b="0" strike="noStrike" spc="-1" dirty="0">
-                <a:solidFill>
-                  <a:srgbClr val="000000"/>
-                </a:solidFill>
-                <a:latin typeface="Times New Roman"/>
-              </a:rPr>
-              <a:t>Privilege escalation attempted on financial records  →  privilege_change_attempted = 1</a:t>
-            </a:r>
-          </a:p>
-          <a:p>
-            <a:pPr marL="341280" indent="-339840">
-              <a:lnSpc>
-                <a:spcPct val="100000"/>
-              </a:lnSpc>
-              <a:buClr>
-                <a:srgbClr val="000000"/>
-              </a:buClr>
-              <a:buFont typeface="Arial"/>
-              <a:buChar char="•"/>
-            </a:pPr>
-            <a:r>
-              <a:rPr lang="en-US" sz="1700" b="0" strike="noStrike" spc="-1" dirty="0">
-                <a:solidFill>
-                  <a:srgbClr val="000000"/>
-                </a:solidFill>
-                <a:latin typeface="Times New Roman"/>
-              </a:rPr>
-              <a:t>MFA challenge bypassed  →  MFA_bypassed = 1</a:t>
-            </a:r>
-          </a:p>
-          <a:p>
-            <a:pPr>
-              <a:lnSpc>
-                <a:spcPct val="70000"/>
-              </a:lnSpc>
-            </a:pPr>
-            <a:endParaRPr lang="en-US" sz="1600" b="0" dirty="0">
-              <a:latin typeface="Calibri"/>
-            </a:endParaRPr>
-          </a:p>
-          <a:p>
-            <a:pPr algn="l">
-              <a:lnSpc>
-                <a:spcPct val="100000"/>
-              </a:lnSpc>
-              <a:buNone/>
-            </a:pPr>
-            <a:r>
-              <a:rPr lang="en-US" sz="1700" b="1" strike="noStrike" spc="-1" dirty="0">
-                <a:solidFill>
-                  <a:srgbClr val="000000"/>
-                </a:solidFill>
-                <a:latin typeface="Times New Roman"/>
-              </a:rPr>
-              <a:t>UEBA Processing:</a:t>
-            </a:r>
-          </a:p>
-          <a:p>
-            <a:pPr marL="341280" indent="-339840">
-              <a:lnSpc>
-                <a:spcPct val="100000"/>
-              </a:lnSpc>
-              <a:buClr>
-                <a:srgbClr val="000000"/>
-              </a:buClr>
-              <a:buFont typeface="Arial"/>
-              <a:buChar char="•"/>
-            </a:pPr>
-            <a:r>
-              <a:rPr lang="en-US" sz="1700" b="0" strike="noStrike" spc="-1" dirty="0">
-                <a:solidFill>
-                  <a:srgbClr val="000000"/>
-                </a:solidFill>
-                <a:latin typeface="Times New Roman"/>
-              </a:rPr>
-              <a:t>Feature vector: [session_dur=480s, failed=5, hour=2, trust=0.3, priv=1, ext=0, mfa=1]</a:t>
-            </a:r>
-          </a:p>
-          <a:p>
-            <a:pPr marL="341280" indent="-339840">
-              <a:lnSpc>
-                <a:spcPct val="100000"/>
-              </a:lnSpc>
-              <a:buClr>
-                <a:srgbClr val="000000"/>
-              </a:buClr>
-              <a:buFont typeface="Arial"/>
-              <a:buChar char="•"/>
-            </a:pPr>
-            <a:r>
-              <a:rPr lang="en-US" sz="1700" b="0" strike="noStrike" spc="-1" dirty="0">
-                <a:solidFill>
-                  <a:srgbClr val="000000"/>
-                </a:solidFill>
-                <a:latin typeface="Times New Roman"/>
-              </a:rPr>
-              <a:t>Isolation Forest anomaly score: -0.42  (well below decision boundary of 0)</a:t>
-            </a:r>
-          </a:p>
-          <a:p>
-            <a:pPr marL="341280" indent="-339840">
-              <a:lnSpc>
-                <a:spcPct val="100000"/>
-              </a:lnSpc>
-              <a:buClr>
-                <a:srgbClr val="000000"/>
-              </a:buClr>
-              <a:buFont typeface="Arial"/>
-              <a:buChar char="•"/>
-            </a:pPr>
-            <a:r>
-              <a:rPr lang="en-US" sz="1700" b="0" strike="noStrike" spc="-1" dirty="0">
-                <a:solidFill>
-                  <a:srgbClr val="000000"/>
-                </a:solidFill>
-                <a:latin typeface="Times New Roman"/>
-              </a:rPr>
-              <a:t>Risk Score assigned: 95  (High Risk)</a:t>
-            </a:r>
-          </a:p>
-          <a:p>
-            <a:pPr>
-              <a:lnSpc>
-                <a:spcPct val="70000"/>
-              </a:lnSpc>
-            </a:pPr>
-            <a:endParaRPr lang="en-US" sz="1600" b="0" dirty="0">
-              <a:latin typeface="Calibri"/>
-            </a:endParaRPr>
-          </a:p>
-          <a:p>
-            <a:pPr algn="l">
-              <a:lnSpc>
-                <a:spcPct val="100000"/>
-              </a:lnSpc>
-              <a:buNone/>
-            </a:pPr>
-            <a:r>
-              <a:rPr lang="en-US" sz="1700" b="1" strike="noStrike" spc="-1" dirty="0">
-                <a:solidFill>
-                  <a:srgbClr val="000000"/>
-                </a:solidFill>
-                <a:latin typeface="Times New Roman"/>
-              </a:rPr>
-              <a:t>SOAR Automated Response (&lt; 10 seconds total):</a:t>
-            </a:r>
-          </a:p>
-          <a:p>
-            <a:pPr marL="341280" indent="-339840">
-              <a:lnSpc>
-                <a:spcPct val="100000"/>
-              </a:lnSpc>
-              <a:buClr>
-                <a:srgbClr val="000000"/>
-              </a:buClr>
-              <a:buFont typeface="Arial"/>
-              <a:buChar char="•"/>
-            </a:pPr>
-            <a:r>
-              <a:rPr lang="en-US" sz="1700" b="0" strike="noStrike" spc="-1" dirty="0">
-                <a:solidFill>
-                  <a:srgbClr val="000000"/>
-                </a:solidFill>
-                <a:latin typeface="Times New Roman"/>
-              </a:rPr>
-              <a:t>MFA re-challenge triggered  +  Session suspended  +  Source IP blocked via Firewall API</a:t>
-            </a:r>
-          </a:p>
-          <a:p>
-            <a:pPr marL="341280" indent="-339840">
-              <a:lnSpc>
-                <a:spcPct val="100000"/>
-              </a:lnSpc>
-              <a:buClr>
-                <a:srgbClr val="000000"/>
-              </a:buClr>
-              <a:buFont typeface="Arial"/>
-              <a:buChar char="•"/>
-            </a:pPr>
-            <a:r>
-              <a:rPr lang="en-US" sz="1700" b="0" strike="noStrike" spc="-1" dirty="0">
-                <a:solidFill>
-                  <a:srgbClr val="000000"/>
-                </a:solidFill>
-                <a:latin typeface="Times New Roman"/>
-              </a:rPr>
-              <a:t>Incident ticket auto-created in SIEM  +  SOC analyst notified with full context</a:t>
-            </a:r>
-          </a:p>
-        </p:txBody>
-      </p:sp>
-      <p:sp>
-        <p:nvSpPr>
-          <p:cNvPr id="901" name="DatePH"/>
-          <p:cNvSpPr/>
-          <p:nvPr/>
-        </p:nvSpPr>
-        <p:spPr>
-          <a:xfrm>
-            <a:off x="457200" y="6356520"/>
-            <a:ext cx="2133720" cy="365040"/>
-          </a:xfrm>
-          <a:prstGeom prst="rect">
-            <a:avLst/>
-          </a:prstGeom>
-          <a:noFill/>
-          <a:ln w="0">
-            <a:noFill/>
-          </a:ln>
-        </p:spPr>
-        <p:style>
-          <a:lnRef idx="0">
-            <a:scrgbClr r="0" g="0" b="0"/>
-          </a:lnRef>
-          <a:fillRef idx="0">
-            <a:scrgbClr r="0" g="0" b="0"/>
-          </a:fillRef>
-          <a:effectRef idx="0">
-            <a:scrgbClr r="0" g="0" b="0"/>
-          </a:effectRef>
-          <a:fontRef idx="minor"/>
-        </p:style>
-        <p:txBody>
-          <a:bodyPr lIns="0" tIns="0" rIns="0" bIns="0" anchor="b">
-            <a:noAutofit/>
-          </a:bodyPr>
-          <a:lstStyle/>
-          <a:p>
-            <a:fld id="{F196C58C-5F04-4C11-8C72-5E9FC22741FA}" type="datetime">
-              <a:rPr lang="en-US" sz="1200" b="0" strike="noStrike" spc="-1">
-                <a:solidFill>
-                  <a:srgbClr val="045C75"/>
-                </a:solidFill>
-                <a:latin typeface="Calibri"/>
-              </a:rPr>
-              <a:t>3/18/2026</a:t>
-            </a:fld>
-            <a:endParaRPr lang="en-US" sz="1200" b="0" strike="noStrike" spc="-1">
-              <a:solidFill>
-                <a:srgbClr val="045C75"/>
-              </a:solidFill>
-              <a:latin typeface="Calibri"/>
-            </a:endParaRPr>
-          </a:p>
-        </p:txBody>
-      </p:sp>
-      <p:sp>
-        <p:nvSpPr>
-          <p:cNvPr id="902" name="SlideNumPH"/>
-          <p:cNvSpPr/>
-          <p:nvPr/>
-        </p:nvSpPr>
-        <p:spPr>
-          <a:xfrm>
-            <a:off x="7924680" y="6356520"/>
-            <a:ext cx="762120" cy="365040"/>
-          </a:xfrm>
-          <a:prstGeom prst="rect">
-            <a:avLst/>
-          </a:prstGeom>
-          <a:noFill/>
-          <a:ln w="0">
-            <a:noFill/>
-          </a:ln>
-        </p:spPr>
-        <p:style>
-          <a:lnRef idx="0">
-            <a:scrgbClr r="0" g="0" b="0"/>
-          </a:lnRef>
-          <a:fillRef idx="0">
-            <a:scrgbClr r="0" g="0" b="0"/>
-          </a:fillRef>
-          <a:effectRef idx="0">
-            <a:scrgbClr r="0" g="0" b="0"/>
-          </a:effectRef>
-          <a:fontRef idx="minor"/>
-        </p:style>
-        <p:txBody>
-          <a:bodyPr lIns="0" tIns="0" rIns="0" bIns="0" anchor="b">
-            <a:noAutofit/>
-          </a:bodyPr>
-          <a:lstStyle/>
-          <a:p>
-            <a:pPr algn="r"/>
-            <a:fld id="{8F570691-39C2-4917-B0B9-61BC158E1D0B}" type="slidenum">
-              <a:rPr lang="en-US" sz="1200" b="0" strike="noStrike" spc="-1">
-                <a:solidFill>
-                  <a:srgbClr val="898989"/>
-                </a:solidFill>
-                <a:latin typeface="Calibri"/>
-              </a:rPr>
-              <a:t>25</a:t>
-            </a:fld>
-            <a:endParaRPr lang="en-US" sz="1200" b="0" strike="noStrike" spc="-1">
-              <a:solidFill>
-                <a:srgbClr val="898989"/>
-              </a:solidFill>
-              <a:latin typeface="Calibri"/>
-            </a:endParaRPr>
-          </a:p>
-        </p:txBody>
-      </p:sp>
-    </p:spTree>
-  </p:cSld>
-  <p:clrMapOvr>
-    <a:masterClrMapping/>
-  </p:clrMapOvr>
-</p:sld>
-</file>
-
-<file path=ppt/slides/slide26.xml><?xml version="1.0" encoding="utf-8"?>
-<p:sld xmlns:a="http://schemas.openxmlformats.org/drawingml/2006/main" xmlns:r="http://schemas.openxmlformats.org/officeDocument/2006/relationships" xmlns:p="http://schemas.openxmlformats.org/presentationml/2006/main">
-  <p:cSld>
-    <p:spTree>
-      <p:nvGrpSpPr>
-        <p:cNvPr id="1" name=""/>
-        <p:cNvGrpSpPr/>
-        <p:nvPr/>
-      </p:nvGrpSpPr>
-      <p:grpSpPr>
-        <a:xfrm>
-          <a:off x="0" y="0"/>
-          <a:ext cx="0" cy="0"/>
-          <a:chOff x="0" y="0"/>
-          <a:chExt cx="0" cy="0"/>
-        </a:xfrm>
-      </p:grpSpPr>
-      <p:sp>
-        <p:nvSpPr>
-          <p:cNvPr id="10" name="Title"/>
-          <p:cNvSpPr/>
-          <p:nvPr/>
-        </p:nvSpPr>
-        <p:spPr>
-          <a:xfrm>
-            <a:off x="179280" y="396720"/>
-            <a:ext cx="8685240" cy="762000"/>
-          </a:xfrm>
-          <a:prstGeom prst="rect">
-            <a:avLst/>
-          </a:prstGeom>
-          <a:noFill/>
-          <a:ln w="0">
-            <a:noFill/>
-          </a:ln>
-        </p:spPr>
-        <p:style>
-          <a:lnRef idx="0">
-            <a:scrgbClr r="0" g="0" b="0"/>
-          </a:lnRef>
-          <a:fillRef idx="0">
-            <a:scrgbClr r="0" g="0" b="0"/>
-          </a:fillRef>
-          <a:effectRef idx="0">
-            <a:scrgbClr r="0" g="0" b="0"/>
-          </a:effectRef>
-          <a:fontRef idx="minor"/>
-        </p:style>
-        <p:txBody>
-          <a:bodyPr lIns="90000" tIns="46800" rIns="90000" bIns="46800" anchor="ctr">
-            <a:noAutofit/>
-          </a:bodyPr>
-          <a:lstStyle/>
-          <a:p>
-            <a:pPr algn="ctr">
-              <a:lnSpc>
-                <a:spcPct val="100000"/>
-              </a:lnSpc>
-            </a:pPr>
-            <a:r>
-              <a:rPr lang="en-US" sz="4400" b="0" strike="noStrike" spc="-1" dirty="0">
-                <a:solidFill>
-                  <a:srgbClr val="000000"/>
-                </a:solidFill>
-                <a:latin typeface="Times New Roman"/>
-              </a:rPr>
-              <a:t>Why Isolation Forest?</a:t>
-            </a:r>
-          </a:p>
-        </p:txBody>
-      </p:sp>
-      <p:sp>
-        <p:nvSpPr>
-          <p:cNvPr id="11" name="Content"/>
-          <p:cNvSpPr/>
-          <p:nvPr/>
-        </p:nvSpPr>
-        <p:spPr>
-          <a:xfrm>
-            <a:off x="457200" y="1270000"/>
-            <a:ext cx="8229600" cy="4900000"/>
-          </a:xfrm>
-          <a:prstGeom prst="rect">
-            <a:avLst/>
-          </a:prstGeom>
-          <a:noFill/>
-          <a:ln w="0">
-            <a:noFill/>
-          </a:ln>
-        </p:spPr>
-        <p:style>
-          <a:lnRef idx="0">
-            <a:scrgbClr r="0" g="0" b="0"/>
-          </a:lnRef>
-          <a:fillRef idx="0">
-            <a:scrgbClr r="0" g="0" b="0"/>
-          </a:fillRef>
-          <a:effectRef idx="0">
-            <a:scrgbClr r="0" g="0" b="0"/>
-          </a:effectRef>
-          <a:fontRef idx="minor"/>
-        </p:style>
-        <p:txBody>
-          <a:bodyPr lIns="90000" tIns="46800" rIns="90000" bIns="46800" anchor="t">
-            <a:noAutofit/>
-          </a:bodyPr>
-          <a:lstStyle/>
-          <a:p>
-            <a:pPr algn="l">
-              <a:lnSpc>
-                <a:spcPct val="100000"/>
-              </a:lnSpc>
-              <a:buNone/>
-            </a:pPr>
-            <a:r>
-              <a:rPr lang="en-US" sz="1900" b="1" strike="noStrike" spc="-1" dirty="0">
-                <a:solidFill>
-                  <a:srgbClr val="045C75"/>
-                </a:solidFill>
-                <a:latin typeface="Times New Roman"/>
-              </a:rPr>
-              <a:t>Why Isolation Forest for UEBA?</a:t>
-            </a:r>
-          </a:p>
-          <a:p>
-            <a:pPr marL="341280" indent="-339840">
-              <a:lnSpc>
-                <a:spcPct val="100000"/>
-              </a:lnSpc>
-              <a:buClr>
-                <a:srgbClr val="000000"/>
-              </a:buClr>
-              <a:buFont typeface="Arial"/>
-              <a:buChar char="•"/>
-            </a:pPr>
-            <a:r>
-              <a:rPr lang="en-US" sz="1700" b="0" strike="noStrike" spc="-1" dirty="0">
-                <a:solidFill>
-                  <a:srgbClr val="000000"/>
-                </a:solidFill>
-                <a:latin typeface="Times New Roman"/>
-              </a:rPr>
-              <a:t>Unsupervised — no labeled anomaly data required; learns normal behavior from logs</a:t>
-            </a:r>
-          </a:p>
-          <a:p>
-            <a:pPr marL="341280" indent="-339840">
-              <a:lnSpc>
-                <a:spcPct val="100000"/>
-              </a:lnSpc>
-              <a:buClr>
-                <a:srgbClr val="000000"/>
-              </a:buClr>
-              <a:buFont typeface="Arial"/>
-              <a:buChar char="•"/>
-            </a:pPr>
-            <a:r>
-              <a:rPr lang="en-US" sz="1700" b="0" strike="noStrike" spc="-1" dirty="0">
-                <a:solidFill>
-                  <a:srgbClr val="000000"/>
-                </a:solidFill>
-                <a:latin typeface="Times New Roman"/>
-              </a:rPr>
-              <a:t>Scalable — sub-linear complexity handles 1M+ events/hour efficiently</a:t>
-            </a:r>
-          </a:p>
-          <a:p>
-            <a:pPr marL="341280" indent="-339840">
-              <a:lnSpc>
-                <a:spcPct val="100000"/>
-              </a:lnSpc>
-              <a:buClr>
-                <a:srgbClr val="000000"/>
-              </a:buClr>
-              <a:buFont typeface="Arial"/>
-              <a:buChar char="•"/>
-            </a:pPr>
-            <a:r>
-              <a:rPr lang="en-US" sz="1700" b="0" strike="noStrike" spc="-1" dirty="0">
-                <a:solidFill>
-                  <a:srgbClr val="000000"/>
-                </a:solidFill>
-                <a:latin typeface="Times New Roman"/>
-              </a:rPr>
-              <a:t>Tabular-native — works directly on structured behavioral log features without embeddings</a:t>
-            </a:r>
-          </a:p>
-          <a:p>
-            <a:pPr marL="341280" indent="-339840">
-              <a:lnSpc>
-                <a:spcPct val="100000"/>
-              </a:lnSpc>
-              <a:buClr>
-                <a:srgbClr val="000000"/>
-              </a:buClr>
-              <a:buFont typeface="Arial"/>
-              <a:buChar char="•"/>
-            </a:pPr>
-            <a:r>
-              <a:rPr lang="en-US" sz="1700" b="0" strike="noStrike" spc="-1" dirty="0">
-                <a:solidFill>
-                  <a:srgbClr val="000000"/>
-                </a:solidFill>
-                <a:latin typeface="Times New Roman"/>
-              </a:rPr>
-              <a:t>Low false positive control — contamination parameter directly tunes precision/recall tradeoff</a:t>
-            </a:r>
-          </a:p>
-          <a:p>
-            <a:pPr marL="341280" indent="-339840">
-              <a:lnSpc>
-                <a:spcPct val="100000"/>
-              </a:lnSpc>
-              <a:buClr>
-                <a:srgbClr val="000000"/>
-              </a:buClr>
-              <a:buFont typeface="Arial"/>
-              <a:buChar char="•"/>
-            </a:pPr>
-            <a:r>
-              <a:rPr lang="en-US" sz="1700" b="0" strike="noStrike" spc="-1" dirty="0">
-                <a:solidFill>
-                  <a:srgbClr val="000000"/>
-                </a:solidFill>
-                <a:latin typeface="Times New Roman"/>
-              </a:rPr>
-              <a:t>Explainable — anomaly scores are interpretable; can trace which features drove the score</a:t>
-            </a:r>
-          </a:p>
-          <a:p>
-            <a:pPr>
-              <a:lnSpc>
-                <a:spcPct val="70000"/>
-              </a:lnSpc>
-            </a:pPr>
-            <a:endParaRPr lang="en-US" sz="1600" b="0" dirty="0">
-              <a:latin typeface="Calibri"/>
-            </a:endParaRPr>
-          </a:p>
-          <a:p>
-            <a:pPr algn="l">
-              <a:lnSpc>
-                <a:spcPct val="100000"/>
-              </a:lnSpc>
-              <a:buNone/>
-            </a:pPr>
-            <a:r>
-              <a:rPr lang="en-US" sz="1900" b="1" strike="noStrike" spc="-1" dirty="0">
-                <a:solidFill>
-                  <a:srgbClr val="045C75"/>
-                </a:solidFill>
-                <a:latin typeface="Times New Roman"/>
-              </a:rPr>
-              <a:t>Why NOT Deep Learning (LSTM / Autoencoder)?</a:t>
-            </a:r>
-          </a:p>
-          <a:p>
-            <a:pPr marL="341280" indent="-339840">
-              <a:lnSpc>
-                <a:spcPct val="100000"/>
-              </a:lnSpc>
-              <a:buClr>
-                <a:srgbClr val="000000"/>
-              </a:buClr>
-              <a:buFont typeface="Arial"/>
-              <a:buChar char="•"/>
-            </a:pPr>
-            <a:r>
-              <a:rPr lang="en-US" sz="1700" b="0" strike="noStrike" spc="-1" dirty="0">
-                <a:solidFill>
-                  <a:srgbClr val="000000"/>
-                </a:solidFill>
-                <a:latin typeface="Times New Roman"/>
-              </a:rPr>
-              <a:t>Requires large labeled datasets — insider threat labeled data is scarce in production</a:t>
-            </a:r>
-          </a:p>
-          <a:p>
-            <a:pPr marL="341280" indent="-339840">
-              <a:lnSpc>
-                <a:spcPct val="100000"/>
-              </a:lnSpc>
-              <a:buClr>
-                <a:srgbClr val="000000"/>
-              </a:buClr>
-              <a:buFont typeface="Arial"/>
-              <a:buChar char="•"/>
-            </a:pPr>
-            <a:r>
-              <a:rPr lang="en-US" sz="1700" b="0" strike="noStrike" spc="-1" dirty="0">
-                <a:solidFill>
-                  <a:srgbClr val="000000"/>
-                </a:solidFill>
-                <a:latin typeface="Times New Roman"/>
-              </a:rPr>
-              <a:t>High compute cost — GPU infrastructure not justified for tabular log data at this scale</a:t>
-            </a:r>
-          </a:p>
-          <a:p>
-            <a:pPr marL="341280" indent="-339840">
-              <a:lnSpc>
-                <a:spcPct val="100000"/>
-              </a:lnSpc>
-              <a:buClr>
-                <a:srgbClr val="000000"/>
-              </a:buClr>
-              <a:buFont typeface="Arial"/>
-              <a:buChar char="•"/>
-            </a:pPr>
-            <a:r>
-              <a:rPr lang="en-US" sz="1700" b="0" strike="noStrike" spc="-1" dirty="0">
-                <a:solidFill>
-                  <a:srgbClr val="000000"/>
-                </a:solidFill>
-                <a:latin typeface="Times New Roman"/>
-              </a:rPr>
-              <a:t>Black-box outputs — harder to explain risk scores to SOC analysts and auditors</a:t>
-            </a:r>
-          </a:p>
-          <a:p>
-            <a:pPr marL="341280" indent="-339840">
-              <a:lnSpc>
-                <a:spcPct val="100000"/>
-              </a:lnSpc>
-              <a:buClr>
-                <a:srgbClr val="000000"/>
-              </a:buClr>
-              <a:buFont typeface="Arial"/>
-              <a:buChar char="•"/>
-            </a:pPr>
-            <a:r>
-              <a:rPr lang="en-US" sz="1700" b="0" strike="noStrike" spc="-1" dirty="0">
-                <a:solidFill>
-                  <a:srgbClr val="000000"/>
-                </a:solidFill>
-                <a:latin typeface="Times New Roman"/>
-              </a:rPr>
-              <a:t>Training instability — autoencoders sensitive to reconstruction threshold tuning</a:t>
-            </a:r>
-          </a:p>
-          <a:p>
-            <a:pPr>
-              <a:lnSpc>
-                <a:spcPct val="70000"/>
-              </a:lnSpc>
-            </a:pPr>
-            <a:endParaRPr lang="en-US" sz="1600" b="0" dirty="0">
-              <a:latin typeface="Calibri"/>
-            </a:endParaRPr>
-          </a:p>
-          <a:p>
-            <a:pPr algn="l">
-              <a:lnSpc>
-                <a:spcPct val="100000"/>
-              </a:lnSpc>
-              <a:buNone/>
-            </a:pPr>
-            <a:r>
-              <a:rPr lang="en-US" sz="1500" b="0" strike="noStrike" spc="-1" dirty="0">
-                <a:solidFill>
-                  <a:srgbClr val="333333"/>
-                </a:solidFill>
-                <a:latin typeface="Times New Roman"/>
-              </a:rPr>
-              <a:t>Isolation Forest is the correct choice: fast, unsupervised, explainable, production-ready.</a:t>
-            </a:r>
-          </a:p>
-        </p:txBody>
-      </p:sp>
-      <p:sp>
-        <p:nvSpPr>
-          <p:cNvPr id="901" name="DatePH"/>
-          <p:cNvSpPr/>
-          <p:nvPr/>
-        </p:nvSpPr>
-        <p:spPr>
-          <a:xfrm>
-            <a:off x="457200" y="6356520"/>
-            <a:ext cx="2133720" cy="365040"/>
-          </a:xfrm>
-          <a:prstGeom prst="rect">
-            <a:avLst/>
-          </a:prstGeom>
-          <a:noFill/>
-          <a:ln w="0">
-            <a:noFill/>
-          </a:ln>
-        </p:spPr>
-        <p:style>
-          <a:lnRef idx="0">
-            <a:scrgbClr r="0" g="0" b="0"/>
-          </a:lnRef>
-          <a:fillRef idx="0">
-            <a:scrgbClr r="0" g="0" b="0"/>
-          </a:fillRef>
-          <a:effectRef idx="0">
-            <a:scrgbClr r="0" g="0" b="0"/>
-          </a:effectRef>
-          <a:fontRef idx="minor"/>
-        </p:style>
-        <p:txBody>
-          <a:bodyPr lIns="0" tIns="0" rIns="0" bIns="0" anchor="b">
-            <a:noAutofit/>
-          </a:bodyPr>
-          <a:lstStyle/>
-          <a:p>
-            <a:fld id="{F196C58C-5F04-4C11-8C72-5E9FC22741FA}" type="datetime">
-              <a:rPr lang="en-US" sz="1200" b="0" strike="noStrike" spc="-1">
-                <a:solidFill>
-                  <a:srgbClr val="045C75"/>
-                </a:solidFill>
-                <a:latin typeface="Calibri"/>
-              </a:rPr>
-              <a:t>3/18/2026</a:t>
-            </a:fld>
-            <a:endParaRPr lang="en-US" sz="1200" b="0" strike="noStrike" spc="-1">
-              <a:solidFill>
-                <a:srgbClr val="045C75"/>
-              </a:solidFill>
-              <a:latin typeface="Calibri"/>
-            </a:endParaRPr>
-          </a:p>
-        </p:txBody>
-      </p:sp>
-      <p:sp>
-        <p:nvSpPr>
-          <p:cNvPr id="902" name="SlideNumPH"/>
-          <p:cNvSpPr/>
-          <p:nvPr/>
-        </p:nvSpPr>
-        <p:spPr>
-          <a:xfrm>
-            <a:off x="7924680" y="6356520"/>
-            <a:ext cx="762120" cy="365040"/>
-          </a:xfrm>
-          <a:prstGeom prst="rect">
-            <a:avLst/>
-          </a:prstGeom>
-          <a:noFill/>
-          <a:ln w="0">
-            <a:noFill/>
-          </a:ln>
-        </p:spPr>
-        <p:style>
-          <a:lnRef idx="0">
-            <a:scrgbClr r="0" g="0" b="0"/>
-          </a:lnRef>
-          <a:fillRef idx="0">
-            <a:scrgbClr r="0" g="0" b="0"/>
-          </a:fillRef>
-          <a:effectRef idx="0">
-            <a:scrgbClr r="0" g="0" b="0"/>
-          </a:effectRef>
-          <a:fontRef idx="minor"/>
-        </p:style>
-        <p:txBody>
-          <a:bodyPr lIns="0" tIns="0" rIns="0" bIns="0" anchor="b">
-            <a:noAutofit/>
-          </a:bodyPr>
-          <a:lstStyle/>
-          <a:p>
-            <a:pPr algn="r"/>
-            <a:fld id="{8F570691-39C2-4917-B0B9-61BC158E1D0B}" type="slidenum">
-              <a:rPr lang="en-US" sz="1200" b="0" strike="noStrike" spc="-1">
-                <a:solidFill>
-                  <a:srgbClr val="898989"/>
-                </a:solidFill>
-                <a:latin typeface="Calibri"/>
-              </a:rPr>
-              <a:t>26</a:t>
-            </a:fld>
-            <a:endParaRPr lang="en-US" sz="1200" b="0" strike="noStrike" spc="-1">
-              <a:solidFill>
-                <a:srgbClr val="898989"/>
-              </a:solidFill>
-              <a:latin typeface="Calibri"/>
-            </a:endParaRPr>
-          </a:p>
-        </p:txBody>
-      </p:sp>
-    </p:spTree>
-  </p:cSld>
-  <p:clrMapOvr>
-    <a:masterClrMapping/>
-  </p:clrMapOvr>
-</p:sld>
-</file>
-
-<file path=ppt/slides/slide27.xml><?xml version="1.0" encoding="utf-8"?>
 <p:sld xmlns:a="http://schemas.openxmlformats.org/drawingml/2006/main" xmlns:r="http://schemas.openxmlformats.org/officeDocument/2006/relationships" xmlns:p="http://schemas.openxmlformats.org/presentationml/2006/main">
   <p:cSld>
     <p:spTree>
@@ -16259,7 +14426,7 @@
                 </a:solidFill>
                 <a:latin typeface="Calibri"/>
               </a:rPr>
-              <a:t>27</a:t>
+              <a:t>23</a:t>
             </a:fld>
             <a:endParaRPr lang="en-US" sz="1200" b="0" strike="noStrike" spc="-1">
               <a:solidFill>
@@ -16313,7 +14480,7 @@
 </p:sld>
 </file>
 
-<file path=ppt/slides/slide28.xml><?xml version="1.0" encoding="utf-8"?>
+<file path=ppt/slides/slide24.xml><?xml version="1.0" encoding="utf-8"?>
 <p:sld xmlns:a="http://schemas.openxmlformats.org/drawingml/2006/main" xmlns:r="http://schemas.openxmlformats.org/officeDocument/2006/relationships" xmlns:p="http://schemas.openxmlformats.org/presentationml/2006/main">
   <p:cSld>
     <p:spTree>
@@ -16508,7 +14675,7 @@
                 </a:solidFill>
                 <a:latin typeface="Calibri"/>
               </a:rPr>
-              <a:t>28</a:t>
+              <a:t>24</a:t>
             </a:fld>
             <a:endParaRPr lang="en-US" sz="1200" b="0" strike="noStrike" spc="-1">
               <a:solidFill>
@@ -16562,7 +14729,7 @@
 </p:sld>
 </file>
 
-<file path=ppt/slides/slide29.xml><?xml version="1.0" encoding="utf-8"?>
+<file path=ppt/slides/slide25.xml><?xml version="1.0" encoding="utf-8"?>
 <p:sld xmlns:a="http://schemas.openxmlformats.org/drawingml/2006/main" xmlns:r="http://schemas.openxmlformats.org/officeDocument/2006/relationships" xmlns:p="http://schemas.openxmlformats.org/presentationml/2006/main">
   <p:cSld>
     <p:spTree>
@@ -16622,6 +14789,1021 @@
               </a:lnSpc>
             </a:pPr>
             <a:r>
+              <a:rPr lang="en-US" sz="4400" b="0" strike="noStrike" spc="-1" dirty="0">
+                <a:solidFill>
+                  <a:srgbClr val="000000"/>
+                </a:solidFill>
+                <a:latin typeface="Times New Roman"/>
+              </a:rPr>
+              <a:t>Results – SOAR Analysis</a:t>
+            </a:r>
+          </a:p>
+        </p:txBody>
+      </p:sp>
+      <p:sp>
+        <p:nvSpPr>
+          <p:cNvPr id="11" name="Content"/>
+          <p:cNvSpPr/>
+          <p:nvPr/>
+        </p:nvSpPr>
+        <p:spPr>
+          <a:xfrm>
+            <a:off x="457200" y="1270000"/>
+            <a:ext cx="8229600" cy="4900000"/>
+          </a:xfrm>
+          <a:prstGeom prst="rect">
+            <a:avLst/>
+          </a:prstGeom>
+          <a:noFill/>
+          <a:ln w="0">
+            <a:noFill/>
+          </a:ln>
+        </p:spPr>
+        <p:style>
+          <a:lnRef idx="0">
+            <a:scrgbClr r="0" g="0" b="0"/>
+          </a:lnRef>
+          <a:fillRef idx="0">
+            <a:scrgbClr r="0" g="0" b="0"/>
+          </a:fillRef>
+          <a:effectRef idx="0">
+            <a:scrgbClr r="0" g="0" b="0"/>
+          </a:effectRef>
+          <a:fontRef idx="minor"/>
+        </p:style>
+        <p:txBody>
+          <a:bodyPr lIns="90000" tIns="46800" rIns="90000" bIns="46800" anchor="t">
+            <a:noAutofit/>
+          </a:bodyPr>
+          <a:lstStyle/>
+          <a:p>
+            <a:pPr algn="l">
+              <a:lnSpc>
+                <a:spcPct val="100000"/>
+              </a:lnSpc>
+              <a:buNone/>
+            </a:pPr>
+            <a:r>
+              <a:rPr lang="en-US" sz="1800" b="1" strike="noStrike" spc="-1" dirty="0">
+                <a:solidFill>
+                  <a:srgbClr val="045C75"/>
+                </a:solidFill>
+                <a:latin typeface="Times New Roman"/>
+              </a:rPr>
+              <a:t>Ingestion &amp; Risk Scoring</a:t>
+            </a:r>
+          </a:p>
+          <a:p>
+            <a:pPr marL="341280" indent="-339840">
+              <a:lnSpc>
+                <a:spcPct val="100000"/>
+              </a:lnSpc>
+              <a:buClr>
+                <a:srgbClr val="000000"/>
+              </a:buClr>
+              <a:buFont typeface="Arial"/>
+              <a:buChar char="•"/>
+            </a:pPr>
+            <a:r>
+              <a:rPr lang="en-US" sz="1600" b="0" strike="noStrike" spc="-1" dirty="0">
+                <a:solidFill>
+                  <a:srgbClr val="000000"/>
+                </a:solidFill>
+                <a:latin typeface="Times New Roman"/>
+              </a:rPr>
+              <a:t>Incident received from soc_analyst_01 — Risk Score evaluated at critical </a:t>
+            </a:r>
+            <a:r>
+              <a:rPr lang="en-US" sz="1600" b="1" strike="noStrike" spc="-1" dirty="0">
+                <a:solidFill>
+                  <a:srgbClr val="CC2200"/>
+                </a:solidFill>
+                <a:latin typeface="Times New Roman"/>
+              </a:rPr>
+              <a:t>96/100</a:t>
+            </a:r>
+          </a:p>
+          <a:p>
+            <a:pPr algn="l">
+              <a:lnSpc>
+                <a:spcPct val="100000"/>
+              </a:lnSpc>
+              <a:buNone/>
+            </a:pPr>
+            <a:r>
+              <a:rPr lang="en-US" sz="1800" b="1" strike="noStrike" spc="-1" dirty="0">
+                <a:solidFill>
+                  <a:srgbClr val="045C75"/>
+                </a:solidFill>
+                <a:latin typeface="Times New Roman"/>
+              </a:rPr>
+              <a:t>Contextual Analysis</a:t>
+            </a:r>
+          </a:p>
+          <a:p>
+            <a:pPr marL="341280" indent="-339840">
+              <a:lnSpc>
+                <a:spcPct val="100000"/>
+              </a:lnSpc>
+              <a:buClr>
+                <a:srgbClr val="000000"/>
+              </a:buClr>
+              <a:buFont typeface="Arial"/>
+              <a:buChar char="•"/>
+            </a:pPr>
+            <a:r>
+              <a:rPr lang="en-US" sz="1600" b="0" strike="noStrike" spc="-1" dirty="0">
+                <a:solidFill>
+                  <a:srgbClr val="000000"/>
+                </a:solidFill>
+                <a:latin typeface="Times New Roman"/>
+              </a:rPr>
+              <a:t>JSON metadata confirms MFA_bypassed: 1 — verified credential compromise, not a false alert</a:t>
+            </a:r>
+          </a:p>
+          <a:p>
+            <a:pPr algn="l">
+              <a:lnSpc>
+                <a:spcPct val="100000"/>
+              </a:lnSpc>
+              <a:buNone/>
+            </a:pPr>
+            <a:r>
+              <a:rPr lang="en-US" sz="1800" b="1" strike="noStrike" spc="-1" dirty="0">
+                <a:solidFill>
+                  <a:srgbClr val="045C75"/>
+                </a:solidFill>
+                <a:latin typeface="Times New Roman"/>
+              </a:rPr>
+              <a:t>Automated Playbooks — 3 Simultaneous Actions Triggered</a:t>
+            </a:r>
+          </a:p>
+          <a:p>
+            <a:pPr marL="341280" indent="-339840">
+              <a:lnSpc>
+                <a:spcPct val="100000"/>
+              </a:lnSpc>
+              <a:buClr>
+                <a:srgbClr val="000000"/>
+              </a:buClr>
+              <a:buFont typeface="Arial"/>
+              <a:buChar char="•"/>
+            </a:pPr>
+            <a:r>
+              <a:rPr lang="en-US" sz="1600" b="1" strike="noStrike" spc="-1" dirty="0">
+                <a:solidFill>
+                  <a:srgbClr val="000000"/>
+                </a:solidFill>
+                <a:latin typeface="Times New Roman"/>
+              </a:rPr>
+              <a:t>Enforce MFA</a:t>
+            </a:r>
+            <a:r>
+              <a:rPr lang="en-US" sz="1600" b="0" strike="noStrike" spc="-1" dirty="0">
+                <a:solidFill>
+                  <a:srgbClr val="000000"/>
+                </a:solidFill>
+                <a:latin typeface="Times New Roman"/>
+              </a:rPr>
+              <a:t> — forces re-authentication to block attacker access immediately</a:t>
+            </a:r>
+          </a:p>
+          <a:p>
+            <a:pPr marL="341280" indent="-339840">
+              <a:lnSpc>
+                <a:spcPct val="100000"/>
+              </a:lnSpc>
+              <a:buClr>
+                <a:srgbClr val="000000"/>
+              </a:buClr>
+              <a:buFont typeface="Arial"/>
+              <a:buChar char="•"/>
+            </a:pPr>
+            <a:r>
+              <a:rPr lang="en-US" sz="1600" b="1" strike="noStrike" spc="-1" dirty="0">
+                <a:solidFill>
+                  <a:srgbClr val="000000"/>
+                </a:solidFill>
+                <a:latin typeface="Times New Roman"/>
+              </a:rPr>
+              <a:t>Revoke Privileges</a:t>
+            </a:r>
+            <a:r>
+              <a:rPr lang="en-US" sz="1600" b="0" strike="noStrike" spc="-1" dirty="0">
+                <a:solidFill>
+                  <a:srgbClr val="000000"/>
+                </a:solidFill>
+                <a:latin typeface="Times New Roman"/>
+              </a:rPr>
+              <a:t> — strips admin rights instantly to limit blast radius</a:t>
+            </a:r>
+          </a:p>
+          <a:p>
+            <a:pPr marL="341280" indent="-339840">
+              <a:lnSpc>
+                <a:spcPct val="100000"/>
+              </a:lnSpc>
+              <a:buClr>
+                <a:srgbClr val="000000"/>
+              </a:buClr>
+              <a:buFont typeface="Arial"/>
+              <a:buChar char="•"/>
+            </a:pPr>
+            <a:r>
+              <a:rPr lang="en-US" sz="1600" b="1" strike="noStrike" spc="-1" dirty="0">
+                <a:solidFill>
+                  <a:srgbClr val="000000"/>
+                </a:solidFill>
+                <a:latin typeface="Times New Roman"/>
+              </a:rPr>
+              <a:t>Isolate Endpoint</a:t>
+            </a:r>
+            <a:r>
+              <a:rPr lang="en-US" sz="1600" b="0" strike="noStrike" spc="-1" dirty="0">
+                <a:solidFill>
+                  <a:srgbClr val="000000"/>
+                </a:solidFill>
+                <a:latin typeface="Times New Roman"/>
+              </a:rPr>
+              <a:t> — quarantines IP 192.168.1.50 to prevent lateral movement</a:t>
+            </a:r>
+          </a:p>
+          <a:p>
+            <a:pPr algn="l">
+              <a:lnSpc>
+                <a:spcPct val="100000"/>
+              </a:lnSpc>
+              <a:buNone/>
+            </a:pPr>
+            <a:r>
+              <a:rPr lang="en-US" sz="1800" b="1" strike="noStrike" spc="-1" dirty="0">
+                <a:solidFill>
+                  <a:srgbClr val="045C75"/>
+                </a:solidFill>
+                <a:latin typeface="Times New Roman"/>
+              </a:rPr>
+              <a:t>Key Outcomes</a:t>
+            </a:r>
+          </a:p>
+          <a:p>
+            <a:pPr marL="341280" indent="-339840">
+              <a:lnSpc>
+                <a:spcPct val="100000"/>
+              </a:lnSpc>
+              <a:buClr>
+                <a:srgbClr val="000000"/>
+              </a:buClr>
+              <a:buFont typeface="Arial"/>
+              <a:buChar char="•"/>
+            </a:pPr>
+            <a:r>
+              <a:rPr lang="en-US" sz="1600" b="0" strike="noStrike" spc="-1" dirty="0">
+                <a:solidFill>
+                  <a:srgbClr val="000000"/>
+                </a:solidFill>
+                <a:latin typeface="Times New Roman"/>
+              </a:rPr>
+              <a:t>MTTR reduced to milliseconds (logged at 14:12:59) vs. minutes/hours for manual SOC response</a:t>
+            </a:r>
+          </a:p>
+          <a:p>
+            <a:pPr marL="341280" indent="-339840">
+              <a:lnSpc>
+                <a:spcPct val="100000"/>
+              </a:lnSpc>
+              <a:buClr>
+                <a:srgbClr val="000000"/>
+              </a:buClr>
+              <a:buFont typeface="Arial"/>
+              <a:buChar char="•"/>
+            </a:pPr>
+            <a:r>
+              <a:rPr lang="en-US" sz="1600" b="0" strike="noStrike" spc="-1" dirty="0">
+                <a:solidFill>
+                  <a:srgbClr val="000000"/>
+                </a:solidFill>
+                <a:latin typeface="Times New Roman"/>
+              </a:rPr>
+              <a:t>Policy-based orchestration — the playbook is the incident response plan translated into code</a:t>
+            </a:r>
+          </a:p>
+          <a:p>
+            <a:pPr marL="341280" indent="-339840">
+              <a:lnSpc>
+                <a:spcPct val="100000"/>
+              </a:lnSpc>
+              <a:buClr>
+                <a:srgbClr val="000000"/>
+              </a:buClr>
+              <a:buFont typeface="Arial"/>
+              <a:buChar char="•"/>
+            </a:pPr>
+            <a:r>
+              <a:rPr lang="en-US" sz="1600" b="0" strike="noStrike" spc="-1" dirty="0">
+                <a:solidFill>
+                  <a:srgbClr val="000000"/>
+                </a:solidFill>
+                <a:latin typeface="Times New Roman"/>
+              </a:rPr>
+              <a:t>Score 96/100 triggers autonomous device isolation — balancing automation with operational availability</a:t>
+            </a:r>
+          </a:p>
+        </p:txBody>
+      </p:sp>
+      <p:sp>
+        <p:nvSpPr>
+          <p:cNvPr id="901" name="DatePH"/>
+          <p:cNvSpPr/>
+          <p:nvPr/>
+        </p:nvSpPr>
+        <p:spPr>
+          <a:xfrm>
+            <a:off x="457200" y="6356520"/>
+            <a:ext cx="2133720" cy="365040"/>
+          </a:xfrm>
+          <a:prstGeom prst="rect">
+            <a:avLst/>
+          </a:prstGeom>
+          <a:noFill/>
+          <a:ln w="0">
+            <a:noFill/>
+          </a:ln>
+        </p:spPr>
+        <p:style>
+          <a:lnRef idx="0">
+            <a:scrgbClr r="0" g="0" b="0"/>
+          </a:lnRef>
+          <a:fillRef idx="0">
+            <a:scrgbClr r="0" g="0" b="0"/>
+          </a:fillRef>
+          <a:effectRef idx="0">
+            <a:scrgbClr r="0" g="0" b="0"/>
+          </a:effectRef>
+          <a:fontRef idx="minor"/>
+        </p:style>
+        <p:txBody>
+          <a:bodyPr lIns="0" tIns="0" rIns="0" bIns="0" anchor="b">
+            <a:noAutofit/>
+          </a:bodyPr>
+          <a:lstStyle/>
+          <a:p>
+            <a:fld id="{F196C58C-5F04-4C11-8C72-5E9FC22741FA}" type="datetime">
+              <a:rPr lang="en-US" sz="1200" b="0" strike="noStrike" spc="-1">
+                <a:solidFill>
+                  <a:srgbClr val="045C75"/>
+                </a:solidFill>
+                <a:latin typeface="Calibri"/>
+              </a:rPr>
+              <a:t>3/18/2026</a:t>
+            </a:fld>
+            <a:endParaRPr lang="en-US" sz="1200" b="0" strike="noStrike" spc="-1">
+              <a:solidFill>
+                <a:srgbClr val="045C75"/>
+              </a:solidFill>
+              <a:latin typeface="Calibri"/>
+            </a:endParaRPr>
+          </a:p>
+        </p:txBody>
+      </p:sp>
+      <p:sp>
+        <p:nvSpPr>
+          <p:cNvPr id="902" name="SlideNumPH"/>
+          <p:cNvSpPr/>
+          <p:nvPr/>
+        </p:nvSpPr>
+        <p:spPr>
+          <a:xfrm>
+            <a:off x="7924680" y="6356520"/>
+            <a:ext cx="762120" cy="365040"/>
+          </a:xfrm>
+          <a:prstGeom prst="rect">
+            <a:avLst/>
+          </a:prstGeom>
+          <a:noFill/>
+          <a:ln w="0">
+            <a:noFill/>
+          </a:ln>
+        </p:spPr>
+        <p:style>
+          <a:lnRef idx="0">
+            <a:scrgbClr r="0" g="0" b="0"/>
+          </a:lnRef>
+          <a:fillRef idx="0">
+            <a:scrgbClr r="0" g="0" b="0"/>
+          </a:fillRef>
+          <a:effectRef idx="0">
+            <a:scrgbClr r="0" g="0" b="0"/>
+          </a:effectRef>
+          <a:fontRef idx="minor"/>
+        </p:style>
+        <p:txBody>
+          <a:bodyPr lIns="0" tIns="0" rIns="0" bIns="0" anchor="b">
+            <a:noAutofit/>
+          </a:bodyPr>
+          <a:lstStyle/>
+          <a:p>
+            <a:pPr algn="r"/>
+            <a:fld id="{8F570691-39C2-4917-B0B9-61BC158E1D0B}" type="slidenum">
+              <a:rPr lang="en-US" sz="1200" b="0" strike="noStrike" spc="-1">
+                <a:solidFill>
+                  <a:srgbClr val="898989"/>
+                </a:solidFill>
+                <a:latin typeface="Calibri"/>
+              </a:rPr>
+              <a:t>25</a:t>
+            </a:fld>
+            <a:endParaRPr lang="en-US" sz="1200" b="0" strike="noStrike" spc="-1">
+              <a:solidFill>
+                <a:srgbClr val="898989"/>
+              </a:solidFill>
+              <a:latin typeface="Calibri"/>
+            </a:endParaRPr>
+          </a:p>
+        </p:txBody>
+      </p:sp>
+    </p:spTree>
+  </p:cSld>
+  <p:clrMapOvr>
+    <a:masterClrMapping/>
+  </p:clrMapOvr>
+</p:sld>
+</file>
+
+<file path=ppt/slides/slide26.xml><?xml version="1.0" encoding="utf-8"?>
+<p:sld xmlns:a="http://schemas.openxmlformats.org/drawingml/2006/main" xmlns:r="http://schemas.openxmlformats.org/officeDocument/2006/relationships" xmlns:p="http://schemas.openxmlformats.org/presentationml/2006/main">
+  <p:cSld>
+    <p:spTree>
+      <p:nvGrpSpPr>
+        <p:cNvPr id="1" name=""/>
+        <p:cNvGrpSpPr/>
+        <p:nvPr/>
+      </p:nvGrpSpPr>
+      <p:grpSpPr>
+        <a:xfrm>
+          <a:off x="0" y="0"/>
+          <a:ext cx="0" cy="0"/>
+          <a:chOff x="0" y="0"/>
+          <a:chExt cx="0" cy="0"/>
+        </a:xfrm>
+      </p:grpSpPr>
+      <p:sp>
+        <p:nvSpPr>
+          <p:cNvPr id="10" name="Title"/>
+          <p:cNvSpPr/>
+          <p:nvPr/>
+        </p:nvSpPr>
+        <p:spPr>
+          <a:xfrm>
+            <a:off x="179280" y="396720"/>
+            <a:ext cx="8685240" cy="762000"/>
+          </a:xfrm>
+          <a:prstGeom prst="rect">
+            <a:avLst/>
+          </a:prstGeom>
+          <a:noFill/>
+          <a:ln w="0">
+            <a:noFill/>
+          </a:ln>
+        </p:spPr>
+        <p:style>
+          <a:lnRef idx="0">
+            <a:scrgbClr r="0" g="0" b="0"/>
+          </a:lnRef>
+          <a:fillRef idx="0">
+            <a:scrgbClr r="0" g="0" b="0"/>
+          </a:fillRef>
+          <a:effectRef idx="0">
+            <a:scrgbClr r="0" g="0" b="0"/>
+          </a:effectRef>
+          <a:fontRef idx="minor"/>
+        </p:style>
+        <p:txBody>
+          <a:bodyPr lIns="90000" tIns="46800" rIns="90000" bIns="46800" anchor="ctr">
+            <a:noAutofit/>
+          </a:bodyPr>
+          <a:lstStyle/>
+          <a:p>
+            <a:pPr algn="ctr">
+              <a:lnSpc>
+                <a:spcPct val="100000"/>
+              </a:lnSpc>
+            </a:pPr>
+            <a:r>
+              <a:rPr lang="en-US" sz="4400" b="0" strike="noStrike" spc="-1" dirty="0">
+                <a:solidFill>
+                  <a:srgbClr val="000000"/>
+                </a:solidFill>
+                <a:latin typeface="Times New Roman"/>
+              </a:rPr>
+              <a:t>End-to-End Case Study</a:t>
+            </a:r>
+          </a:p>
+        </p:txBody>
+      </p:sp>
+      <p:sp>
+        <p:nvSpPr>
+          <p:cNvPr id="11" name="Content"/>
+          <p:cNvSpPr/>
+          <p:nvPr/>
+        </p:nvSpPr>
+        <p:spPr>
+          <a:xfrm>
+            <a:off x="457200" y="1270000"/>
+            <a:ext cx="8229600" cy="4900000"/>
+          </a:xfrm>
+          <a:prstGeom prst="rect">
+            <a:avLst/>
+          </a:prstGeom>
+          <a:noFill/>
+          <a:ln w="0">
+            <a:noFill/>
+          </a:ln>
+        </p:spPr>
+        <p:style>
+          <a:lnRef idx="0">
+            <a:scrgbClr r="0" g="0" b="0"/>
+          </a:lnRef>
+          <a:fillRef idx="0">
+            <a:scrgbClr r="0" g="0" b="0"/>
+          </a:fillRef>
+          <a:effectRef idx="0">
+            <a:scrgbClr r="0" g="0" b="0"/>
+          </a:effectRef>
+          <a:fontRef idx="minor"/>
+        </p:style>
+        <p:txBody>
+          <a:bodyPr lIns="90000" tIns="46800" rIns="90000" bIns="46800" anchor="t">
+            <a:noAutofit/>
+          </a:bodyPr>
+          <a:lstStyle/>
+          <a:p>
+            <a:pPr algn="l">
+              <a:lnSpc>
+                <a:spcPct val="100000"/>
+              </a:lnSpc>
+              <a:buNone/>
+            </a:pPr>
+            <a:r>
+              <a:rPr lang="en-US" sz="1900" b="1" strike="noStrike" spc="-1" dirty="0">
+                <a:solidFill>
+                  <a:srgbClr val="045C75"/>
+                </a:solidFill>
+                <a:latin typeface="Times New Roman"/>
+              </a:rPr>
+              <a:t>Scenario: Compromised Insider Account Detected</a:t>
+            </a:r>
+          </a:p>
+          <a:p>
+            <a:pPr>
+              <a:lnSpc>
+                <a:spcPct val="70000"/>
+              </a:lnSpc>
+            </a:pPr>
+            <a:endParaRPr lang="en-US" sz="1600" b="0" dirty="0">
+              <a:latin typeface="Calibri"/>
+            </a:endParaRPr>
+          </a:p>
+          <a:p>
+            <a:pPr algn="l">
+              <a:lnSpc>
+                <a:spcPct val="100000"/>
+              </a:lnSpc>
+              <a:buNone/>
+            </a:pPr>
+            <a:r>
+              <a:rPr lang="en-US" sz="1700" b="1" strike="noStrike" spc="-1" dirty="0">
+                <a:solidFill>
+                  <a:srgbClr val="000000"/>
+                </a:solidFill>
+                <a:latin typeface="Times New Roman"/>
+              </a:rPr>
+              <a:t>Input (Raw Behavioral Session Log):</a:t>
+            </a:r>
+          </a:p>
+          <a:p>
+            <a:pPr marL="341280" indent="-339840">
+              <a:lnSpc>
+                <a:spcPct val="100000"/>
+              </a:lnSpc>
+              <a:buClr>
+                <a:srgbClr val="000000"/>
+              </a:buClr>
+              <a:buFont typeface="Arial"/>
+              <a:buChar char="•"/>
+            </a:pPr>
+            <a:r>
+              <a:rPr lang="en-US" sz="1700" b="0" strike="noStrike" spc="-1" dirty="0">
+                <a:solidFill>
+                  <a:srgbClr val="000000"/>
+                </a:solidFill>
+                <a:latin typeface="Times New Roman"/>
+              </a:rPr>
+              <a:t>User logs in at 02:14 AM (off-hours)  →  access_time anomaly signal triggered</a:t>
+            </a:r>
+          </a:p>
+          <a:p>
+            <a:pPr marL="341280" indent="-339840">
+              <a:lnSpc>
+                <a:spcPct val="100000"/>
+              </a:lnSpc>
+              <a:buClr>
+                <a:srgbClr val="000000"/>
+              </a:buClr>
+              <a:buFont typeface="Arial"/>
+              <a:buChar char="•"/>
+            </a:pPr>
+            <a:r>
+              <a:rPr lang="en-US" sz="1700" b="0" strike="noStrike" spc="-1" dirty="0">
+                <a:solidFill>
+                  <a:srgbClr val="000000"/>
+                </a:solidFill>
+                <a:latin typeface="Times New Roman"/>
+              </a:rPr>
+              <a:t>5 consecutive failed logins before success  →  failed_logins = 5 (threshold: 3)</a:t>
+            </a:r>
+          </a:p>
+          <a:p>
+            <a:pPr marL="341280" indent="-339840">
+              <a:lnSpc>
+                <a:spcPct val="100000"/>
+              </a:lnSpc>
+              <a:buClr>
+                <a:srgbClr val="000000"/>
+              </a:buClr>
+              <a:buFont typeface="Arial"/>
+              <a:buChar char="•"/>
+            </a:pPr>
+            <a:r>
+              <a:rPr lang="en-US" sz="1700" b="0" strike="noStrike" spc="-1" dirty="0">
+                <a:solidFill>
+                  <a:srgbClr val="000000"/>
+                </a:solidFill>
+                <a:latin typeface="Times New Roman"/>
+              </a:rPr>
+              <a:t>Privilege escalation attempted on financial records  →  privilege_change_attempted = 1</a:t>
+            </a:r>
+          </a:p>
+          <a:p>
+            <a:pPr marL="341280" indent="-339840">
+              <a:lnSpc>
+                <a:spcPct val="100000"/>
+              </a:lnSpc>
+              <a:buClr>
+                <a:srgbClr val="000000"/>
+              </a:buClr>
+              <a:buFont typeface="Arial"/>
+              <a:buChar char="•"/>
+            </a:pPr>
+            <a:r>
+              <a:rPr lang="en-US" sz="1700" b="0" strike="noStrike" spc="-1" dirty="0">
+                <a:solidFill>
+                  <a:srgbClr val="000000"/>
+                </a:solidFill>
+                <a:latin typeface="Times New Roman"/>
+              </a:rPr>
+              <a:t>MFA challenge bypassed  →  MFA_bypassed = 1</a:t>
+            </a:r>
+          </a:p>
+          <a:p>
+            <a:pPr>
+              <a:lnSpc>
+                <a:spcPct val="70000"/>
+              </a:lnSpc>
+            </a:pPr>
+            <a:endParaRPr lang="en-US" sz="1600" b="0" dirty="0">
+              <a:latin typeface="Calibri"/>
+            </a:endParaRPr>
+          </a:p>
+          <a:p>
+            <a:pPr algn="l">
+              <a:lnSpc>
+                <a:spcPct val="100000"/>
+              </a:lnSpc>
+              <a:buNone/>
+            </a:pPr>
+            <a:r>
+              <a:rPr lang="en-US" sz="1700" b="1" strike="noStrike" spc="-1" dirty="0">
+                <a:solidFill>
+                  <a:srgbClr val="000000"/>
+                </a:solidFill>
+                <a:latin typeface="Times New Roman"/>
+              </a:rPr>
+              <a:t>UEBA Processing:</a:t>
+            </a:r>
+          </a:p>
+          <a:p>
+            <a:pPr marL="341280" indent="-339840">
+              <a:lnSpc>
+                <a:spcPct val="100000"/>
+              </a:lnSpc>
+              <a:buClr>
+                <a:srgbClr val="000000"/>
+              </a:buClr>
+              <a:buFont typeface="Arial"/>
+              <a:buChar char="•"/>
+            </a:pPr>
+            <a:r>
+              <a:rPr lang="en-US" sz="1700" b="0" strike="noStrike" spc="-1" dirty="0">
+                <a:solidFill>
+                  <a:srgbClr val="000000"/>
+                </a:solidFill>
+                <a:latin typeface="Times New Roman"/>
+              </a:rPr>
+              <a:t>Feature vector: [session_dur=480s, failed=5, hour=2, trust=0.3, priv=1, ext=0, mfa=1]</a:t>
+            </a:r>
+          </a:p>
+          <a:p>
+            <a:pPr marL="341280" indent="-339840">
+              <a:lnSpc>
+                <a:spcPct val="100000"/>
+              </a:lnSpc>
+              <a:buClr>
+                <a:srgbClr val="000000"/>
+              </a:buClr>
+              <a:buFont typeface="Arial"/>
+              <a:buChar char="•"/>
+            </a:pPr>
+            <a:r>
+              <a:rPr lang="en-US" sz="1700" b="0" strike="noStrike" spc="-1" dirty="0">
+                <a:solidFill>
+                  <a:srgbClr val="000000"/>
+                </a:solidFill>
+                <a:latin typeface="Times New Roman"/>
+              </a:rPr>
+              <a:t>Isolation Forest anomaly score: -0.42  (well below decision boundary of 0)</a:t>
+            </a:r>
+          </a:p>
+          <a:p>
+            <a:pPr marL="341280" indent="-339840">
+              <a:lnSpc>
+                <a:spcPct val="100000"/>
+              </a:lnSpc>
+              <a:buClr>
+                <a:srgbClr val="000000"/>
+              </a:buClr>
+              <a:buFont typeface="Arial"/>
+              <a:buChar char="•"/>
+            </a:pPr>
+            <a:r>
+              <a:rPr lang="en-US" sz="1700" b="0" strike="noStrike" spc="-1" dirty="0">
+                <a:solidFill>
+                  <a:srgbClr val="000000"/>
+                </a:solidFill>
+                <a:latin typeface="Times New Roman"/>
+              </a:rPr>
+              <a:t>Risk Score assigned: 95  (High Risk)</a:t>
+            </a:r>
+          </a:p>
+          <a:p>
+            <a:pPr>
+              <a:lnSpc>
+                <a:spcPct val="70000"/>
+              </a:lnSpc>
+            </a:pPr>
+            <a:endParaRPr lang="en-US" sz="1600" b="0" dirty="0">
+              <a:latin typeface="Calibri"/>
+            </a:endParaRPr>
+          </a:p>
+          <a:p>
+            <a:pPr algn="l">
+              <a:lnSpc>
+                <a:spcPct val="100000"/>
+              </a:lnSpc>
+              <a:buNone/>
+            </a:pPr>
+            <a:r>
+              <a:rPr lang="en-US" sz="1700" b="1" strike="noStrike" spc="-1" dirty="0">
+                <a:solidFill>
+                  <a:srgbClr val="000000"/>
+                </a:solidFill>
+                <a:latin typeface="Times New Roman"/>
+              </a:rPr>
+              <a:t>SOAR Automated Response (&lt; 10 seconds total):</a:t>
+            </a:r>
+          </a:p>
+          <a:p>
+            <a:pPr marL="341280" indent="-339840">
+              <a:lnSpc>
+                <a:spcPct val="100000"/>
+              </a:lnSpc>
+              <a:buClr>
+                <a:srgbClr val="000000"/>
+              </a:buClr>
+              <a:buFont typeface="Arial"/>
+              <a:buChar char="•"/>
+            </a:pPr>
+            <a:r>
+              <a:rPr lang="en-US" sz="1700" b="0" strike="noStrike" spc="-1" dirty="0">
+                <a:solidFill>
+                  <a:srgbClr val="000000"/>
+                </a:solidFill>
+                <a:latin typeface="Times New Roman"/>
+              </a:rPr>
+              <a:t>MFA re-challenge triggered  +  Session suspended  +  Source IP blocked via Firewall API</a:t>
+            </a:r>
+          </a:p>
+          <a:p>
+            <a:pPr marL="341280" indent="-339840">
+              <a:lnSpc>
+                <a:spcPct val="100000"/>
+              </a:lnSpc>
+              <a:buClr>
+                <a:srgbClr val="000000"/>
+              </a:buClr>
+              <a:buFont typeface="Arial"/>
+              <a:buChar char="•"/>
+            </a:pPr>
+            <a:r>
+              <a:rPr lang="en-US" sz="1700" b="0" strike="noStrike" spc="-1" dirty="0">
+                <a:solidFill>
+                  <a:srgbClr val="000000"/>
+                </a:solidFill>
+                <a:latin typeface="Times New Roman"/>
+              </a:rPr>
+              <a:t>Incident ticket auto-created in SIEM  +  SOC analyst notified with full context</a:t>
+            </a:r>
+          </a:p>
+        </p:txBody>
+      </p:sp>
+      <p:sp>
+        <p:nvSpPr>
+          <p:cNvPr id="901" name="DatePH"/>
+          <p:cNvSpPr/>
+          <p:nvPr/>
+        </p:nvSpPr>
+        <p:spPr>
+          <a:xfrm>
+            <a:off x="457200" y="6356520"/>
+            <a:ext cx="2133720" cy="365040"/>
+          </a:xfrm>
+          <a:prstGeom prst="rect">
+            <a:avLst/>
+          </a:prstGeom>
+          <a:noFill/>
+          <a:ln w="0">
+            <a:noFill/>
+          </a:ln>
+        </p:spPr>
+        <p:style>
+          <a:lnRef idx="0">
+            <a:scrgbClr r="0" g="0" b="0"/>
+          </a:lnRef>
+          <a:fillRef idx="0">
+            <a:scrgbClr r="0" g="0" b="0"/>
+          </a:fillRef>
+          <a:effectRef idx="0">
+            <a:scrgbClr r="0" g="0" b="0"/>
+          </a:effectRef>
+          <a:fontRef idx="minor"/>
+        </p:style>
+        <p:txBody>
+          <a:bodyPr lIns="0" tIns="0" rIns="0" bIns="0" anchor="b">
+            <a:noAutofit/>
+          </a:bodyPr>
+          <a:lstStyle/>
+          <a:p>
+            <a:fld id="{F196C58C-5F04-4C11-8C72-5E9FC22741FA}" type="datetime">
+              <a:rPr lang="en-US" sz="1200" b="0" strike="noStrike" spc="-1">
+                <a:solidFill>
+                  <a:srgbClr val="045C75"/>
+                </a:solidFill>
+                <a:latin typeface="Calibri"/>
+              </a:rPr>
+              <a:t>3/18/2026</a:t>
+            </a:fld>
+            <a:endParaRPr lang="en-US" sz="1200" b="0" strike="noStrike" spc="-1">
+              <a:solidFill>
+                <a:srgbClr val="045C75"/>
+              </a:solidFill>
+              <a:latin typeface="Calibri"/>
+            </a:endParaRPr>
+          </a:p>
+        </p:txBody>
+      </p:sp>
+      <p:sp>
+        <p:nvSpPr>
+          <p:cNvPr id="902" name="SlideNumPH"/>
+          <p:cNvSpPr/>
+          <p:nvPr/>
+        </p:nvSpPr>
+        <p:spPr>
+          <a:xfrm>
+            <a:off x="7924680" y="6356520"/>
+            <a:ext cx="762120" cy="365040"/>
+          </a:xfrm>
+          <a:prstGeom prst="rect">
+            <a:avLst/>
+          </a:prstGeom>
+          <a:noFill/>
+          <a:ln w="0">
+            <a:noFill/>
+          </a:ln>
+        </p:spPr>
+        <p:style>
+          <a:lnRef idx="0">
+            <a:scrgbClr r="0" g="0" b="0"/>
+          </a:lnRef>
+          <a:fillRef idx="0">
+            <a:scrgbClr r="0" g="0" b="0"/>
+          </a:fillRef>
+          <a:effectRef idx="0">
+            <a:scrgbClr r="0" g="0" b="0"/>
+          </a:effectRef>
+          <a:fontRef idx="minor"/>
+        </p:style>
+        <p:txBody>
+          <a:bodyPr lIns="0" tIns="0" rIns="0" bIns="0" anchor="b">
+            <a:noAutofit/>
+          </a:bodyPr>
+          <a:lstStyle/>
+          <a:p>
+            <a:pPr algn="r"/>
+            <a:fld id="{8F570691-39C2-4917-B0B9-61BC158E1D0B}" type="slidenum">
+              <a:rPr lang="en-US" sz="1200" b="0" strike="noStrike" spc="-1">
+                <a:solidFill>
+                  <a:srgbClr val="898989"/>
+                </a:solidFill>
+                <a:latin typeface="Calibri"/>
+              </a:rPr>
+              <a:t>26</a:t>
+            </a:fld>
+            <a:endParaRPr lang="en-US" sz="1200" b="0" strike="noStrike" spc="-1">
+              <a:solidFill>
+                <a:srgbClr val="898989"/>
+              </a:solidFill>
+              <a:latin typeface="Calibri"/>
+            </a:endParaRPr>
+          </a:p>
+        </p:txBody>
+      </p:sp>
+    </p:spTree>
+  </p:cSld>
+  <p:clrMapOvr>
+    <a:masterClrMapping/>
+  </p:clrMapOvr>
+</p:sld>
+</file>
+
+<file path=ppt/slides/slide27.xml><?xml version="1.0" encoding="utf-8"?>
+<p:sld xmlns:a="http://schemas.openxmlformats.org/drawingml/2006/main" xmlns:r="http://schemas.openxmlformats.org/officeDocument/2006/relationships" xmlns:p="http://schemas.openxmlformats.org/presentationml/2006/main">
+  <p:cSld>
+    <p:spTree>
+      <p:nvGrpSpPr>
+        <p:cNvPr id="1" name=""/>
+        <p:cNvGrpSpPr/>
+        <p:nvPr/>
+      </p:nvGrpSpPr>
+      <p:grpSpPr>
+        <a:xfrm>
+          <a:off x="0" y="0"/>
+          <a:ext cx="0" cy="0"/>
+          <a:chOff x="0" y="0"/>
+          <a:chExt cx="0" cy="0"/>
+        </a:xfrm>
+      </p:grpSpPr>
+      <p:sp>
+        <p:nvSpPr>
+          <p:cNvPr id="10" name="Title"/>
+          <p:cNvSpPr/>
+          <p:nvPr/>
+        </p:nvSpPr>
+        <p:spPr>
+          <a:xfrm>
+            <a:off x="179280" y="396720"/>
+            <a:ext cx="8685240" cy="762000"/>
+          </a:xfrm>
+          <a:prstGeom prst="rect">
+            <a:avLst/>
+          </a:prstGeom>
+          <a:noFill/>
+          <a:ln w="0">
+            <a:noFill/>
+          </a:ln>
+        </p:spPr>
+        <p:style>
+          <a:lnRef idx="0">
+            <a:scrgbClr r="0" g="0" b="0"/>
+          </a:lnRef>
+          <a:fillRef idx="0">
+            <a:scrgbClr r="0" g="0" b="0"/>
+          </a:fillRef>
+          <a:effectRef idx="0">
+            <a:scrgbClr r="0" g="0" b="0"/>
+          </a:effectRef>
+          <a:fontRef idx="minor"/>
+        </p:style>
+        <p:txBody>
+          <a:bodyPr lIns="90000" tIns="46800" rIns="90000" bIns="46800" anchor="ctr">
+            <a:noAutofit/>
+          </a:bodyPr>
+          <a:lstStyle/>
+          <a:p>
+            <a:pPr algn="ctr">
+              <a:lnSpc>
+                <a:spcPct val="100000"/>
+              </a:lnSpc>
+            </a:pPr>
+            <a:r>
               <a:rPr lang="en-US" sz="4000" b="0" strike="noStrike" spc="-1" dirty="0">
                 <a:solidFill>
                   <a:srgbClr val="000000"/>
@@ -16760,6 +15942,603 @@
                 <a:latin typeface="Times New Roman"/>
               </a:rPr>
               <a:t>Future enhancements include distributed scalability, adaptive threshold tuning, self-learning playbooks, and expanded hybrid cloud Zero Trust enforcement.</a:t>
+            </a:r>
+          </a:p>
+        </p:txBody>
+      </p:sp>
+      <p:sp>
+        <p:nvSpPr>
+          <p:cNvPr id="901" name="DatePH"/>
+          <p:cNvSpPr/>
+          <p:nvPr/>
+        </p:nvSpPr>
+        <p:spPr>
+          <a:xfrm>
+            <a:off x="457200" y="6356520"/>
+            <a:ext cx="2133720" cy="365040"/>
+          </a:xfrm>
+          <a:prstGeom prst="rect">
+            <a:avLst/>
+          </a:prstGeom>
+          <a:noFill/>
+          <a:ln w="0">
+            <a:noFill/>
+          </a:ln>
+        </p:spPr>
+        <p:style>
+          <a:lnRef idx="0">
+            <a:scrgbClr r="0" g="0" b="0"/>
+          </a:lnRef>
+          <a:fillRef idx="0">
+            <a:scrgbClr r="0" g="0" b="0"/>
+          </a:fillRef>
+          <a:effectRef idx="0">
+            <a:scrgbClr r="0" g="0" b="0"/>
+          </a:effectRef>
+          <a:fontRef idx="minor"/>
+        </p:style>
+        <p:txBody>
+          <a:bodyPr lIns="0" tIns="0" rIns="0" bIns="0" anchor="b">
+            <a:noAutofit/>
+          </a:bodyPr>
+          <a:lstStyle/>
+          <a:p>
+            <a:fld id="{F196C58C-5F04-4C11-8C72-5E9FC22741FA}" type="datetime">
+              <a:rPr lang="en-US" sz="1200" b="0" strike="noStrike" spc="-1">
+                <a:solidFill>
+                  <a:srgbClr val="045C75"/>
+                </a:solidFill>
+                <a:latin typeface="Calibri"/>
+              </a:rPr>
+              <a:t>3/18/2026</a:t>
+            </a:fld>
+            <a:endParaRPr lang="en-US" sz="1200" b="0" strike="noStrike" spc="-1">
+              <a:solidFill>
+                <a:srgbClr val="045C75"/>
+              </a:solidFill>
+              <a:latin typeface="Calibri"/>
+            </a:endParaRPr>
+          </a:p>
+        </p:txBody>
+      </p:sp>
+      <p:sp>
+        <p:nvSpPr>
+          <p:cNvPr id="902" name="SlideNumPH"/>
+          <p:cNvSpPr/>
+          <p:nvPr/>
+        </p:nvSpPr>
+        <p:spPr>
+          <a:xfrm>
+            <a:off x="7924680" y="6356520"/>
+            <a:ext cx="762120" cy="365040"/>
+          </a:xfrm>
+          <a:prstGeom prst="rect">
+            <a:avLst/>
+          </a:prstGeom>
+          <a:noFill/>
+          <a:ln w="0">
+            <a:noFill/>
+          </a:ln>
+        </p:spPr>
+        <p:style>
+          <a:lnRef idx="0">
+            <a:scrgbClr r="0" g="0" b="0"/>
+          </a:lnRef>
+          <a:fillRef idx="0">
+            <a:scrgbClr r="0" g="0" b="0"/>
+          </a:fillRef>
+          <a:effectRef idx="0">
+            <a:scrgbClr r="0" g="0" b="0"/>
+          </a:effectRef>
+          <a:fontRef idx="minor"/>
+        </p:style>
+        <p:txBody>
+          <a:bodyPr lIns="0" tIns="0" rIns="0" bIns="0" anchor="b">
+            <a:noAutofit/>
+          </a:bodyPr>
+          <a:lstStyle/>
+          <a:p>
+            <a:pPr algn="r"/>
+            <a:fld id="{8F570691-39C2-4917-B0B9-61BC158E1D0B}" type="slidenum">
+              <a:rPr lang="en-US" sz="1200" b="0" strike="noStrike" spc="-1">
+                <a:solidFill>
+                  <a:srgbClr val="898989"/>
+                </a:solidFill>
+                <a:latin typeface="Calibri"/>
+              </a:rPr>
+              <a:t>27</a:t>
+            </a:fld>
+            <a:endParaRPr lang="en-US" sz="1200" b="0" strike="noStrike" spc="-1">
+              <a:solidFill>
+                <a:srgbClr val="898989"/>
+              </a:solidFill>
+              <a:latin typeface="Calibri"/>
+            </a:endParaRPr>
+          </a:p>
+        </p:txBody>
+      </p:sp>
+    </p:spTree>
+  </p:cSld>
+  <p:clrMapOvr>
+    <a:masterClrMapping/>
+  </p:clrMapOvr>
+</p:sld>
+</file>
+
+<file path=ppt/slides/slide28.xml><?xml version="1.0" encoding="utf-8"?>
+<p:sld xmlns:a="http://schemas.openxmlformats.org/drawingml/2006/main" xmlns:r="http://schemas.openxmlformats.org/officeDocument/2006/relationships" xmlns:p="http://schemas.openxmlformats.org/presentationml/2006/main">
+  <p:cSld>
+    <p:spTree>
+      <p:nvGrpSpPr>
+        <p:cNvPr id="1" name=""/>
+        <p:cNvGrpSpPr/>
+        <p:nvPr/>
+      </p:nvGrpSpPr>
+      <p:grpSpPr>
+        <a:xfrm>
+          <a:off x="0" y="0"/>
+          <a:ext cx="0" cy="0"/>
+          <a:chOff x="0" y="0"/>
+          <a:chExt cx="0" cy="0"/>
+        </a:xfrm>
+      </p:grpSpPr>
+      <p:sp>
+        <p:nvSpPr>
+          <p:cNvPr id="10" name="Title"/>
+          <p:cNvSpPr/>
+          <p:nvPr/>
+        </p:nvSpPr>
+        <p:spPr>
+          <a:xfrm>
+            <a:off x="179280" y="396720"/>
+            <a:ext cx="8685240" cy="762000"/>
+          </a:xfrm>
+          <a:prstGeom prst="rect">
+            <a:avLst/>
+          </a:prstGeom>
+          <a:noFill/>
+          <a:ln w="0">
+            <a:noFill/>
+          </a:ln>
+        </p:spPr>
+        <p:style>
+          <a:lnRef idx="0">
+            <a:scrgbClr r="0" g="0" b="0"/>
+          </a:lnRef>
+          <a:fillRef idx="0">
+            <a:scrgbClr r="0" g="0" b="0"/>
+          </a:fillRef>
+          <a:effectRef idx="0">
+            <a:scrgbClr r="0" g="0" b="0"/>
+          </a:effectRef>
+          <a:fontRef idx="minor"/>
+        </p:style>
+        <p:txBody>
+          <a:bodyPr lIns="90000" tIns="46800" rIns="90000" bIns="46800" anchor="ctr">
+            <a:noAutofit/>
+          </a:bodyPr>
+          <a:lstStyle/>
+          <a:p>
+            <a:pPr algn="ctr">
+              <a:lnSpc>
+                <a:spcPct val="100000"/>
+              </a:lnSpc>
+            </a:pPr>
+            <a:r>
+              <a:rPr lang="en-US" sz="4000" b="0" strike="noStrike" spc="-1" dirty="0">
+                <a:solidFill>
+                  <a:srgbClr val="000000"/>
+                </a:solidFill>
+                <a:latin typeface="Times New Roman"/>
+              </a:rPr>
+              <a:t>References</a:t>
+            </a:r>
+          </a:p>
+        </p:txBody>
+      </p:sp>
+      <p:sp>
+        <p:nvSpPr>
+          <p:cNvPr id="11" name="Content"/>
+          <p:cNvSpPr/>
+          <p:nvPr/>
+        </p:nvSpPr>
+        <p:spPr>
+          <a:xfrm>
+            <a:off x="457200" y="1200000"/>
+            <a:ext cx="8229600" cy="5000000"/>
+          </a:xfrm>
+          <a:prstGeom prst="rect">
+            <a:avLst/>
+          </a:prstGeom>
+          <a:noFill/>
+          <a:ln w="0">
+            <a:noFill/>
+          </a:ln>
+        </p:spPr>
+        <p:style>
+          <a:lnRef idx="0">
+            <a:scrgbClr r="0" g="0" b="0"/>
+          </a:lnRef>
+          <a:fillRef idx="0">
+            <a:scrgbClr r="0" g="0" b="0"/>
+          </a:fillRef>
+          <a:effectRef idx="0">
+            <a:scrgbClr r="0" g="0" b="0"/>
+          </a:effectRef>
+          <a:fontRef idx="minor"/>
+        </p:style>
+        <p:txBody>
+          <a:bodyPr lIns="90000" tIns="46800" rIns="90000" bIns="46800" anchor="t">
+            <a:noAutofit/>
+          </a:bodyPr>
+          <a:lstStyle/>
+          <a:p>
+            <a:pPr marL="341280" indent="-339840">
+              <a:lnSpc>
+                <a:spcPct val="100000"/>
+              </a:lnSpc>
+              <a:buClr>
+                <a:srgbClr val="000000"/>
+              </a:buClr>
+              <a:buFont typeface="Arial"/>
+              <a:buChar char="•"/>
+            </a:pPr>
+            <a:r>
+              <a:rPr lang="en-US" b="0" strike="noStrike" spc="-1" dirty="0">
+                <a:solidFill>
+                  <a:srgbClr val="000000"/>
+                </a:solidFill>
+                <a:latin typeface="Times New Roman"/>
+              </a:rPr>
+              <a:t>Rose, S., Borchert, O., Mitchell, S., &amp; Connelly, S. (2020). Zero Trust Architecture. NIST Special Publication 800-207. doi:10.6028/NIST.SP.800-207.</a:t>
+            </a:r>
+          </a:p>
+          <a:p>
+            <a:pPr marL="341280" indent="-339840">
+              <a:lnSpc>
+                <a:spcPct val="100000"/>
+              </a:lnSpc>
+              <a:buClr>
+                <a:srgbClr val="000000"/>
+              </a:buClr>
+              <a:buFont typeface="Arial"/>
+              <a:buChar char="•"/>
+            </a:pPr>
+            <a:r>
+              <a:rPr lang="en-US" b="0" strike="noStrike" spc="-1" dirty="0">
+                <a:solidFill>
+                  <a:srgbClr val="000000"/>
+                </a:solidFill>
+                <a:latin typeface="Times New Roman"/>
+              </a:rPr>
+              <a:t>Syed, N. F., Shah, S. W., </a:t>
+            </a:r>
+            <a:r>
+              <a:rPr lang="en-US" b="0" strike="noStrike" spc="-1" dirty="0" err="1">
+                <a:solidFill>
+                  <a:srgbClr val="000000"/>
+                </a:solidFill>
+                <a:latin typeface="Times New Roman"/>
+              </a:rPr>
+              <a:t>Shaghaghi</a:t>
+            </a:r>
+            <a:r>
+              <a:rPr lang="en-US" b="0" strike="noStrike" spc="-1" dirty="0">
+                <a:solidFill>
+                  <a:srgbClr val="000000"/>
+                </a:solidFill>
+                <a:latin typeface="Times New Roman"/>
+              </a:rPr>
+              <a:t>, A., et al. (2022). Zero trust architecture (ZTA): A comprehensive survey. IEEE Access, 10, 57143-57179.</a:t>
+            </a:r>
+          </a:p>
+          <a:p>
+            <a:pPr marL="341280" indent="-339840">
+              <a:lnSpc>
+                <a:spcPct val="100000"/>
+              </a:lnSpc>
+              <a:buClr>
+                <a:srgbClr val="000000"/>
+              </a:buClr>
+              <a:buFont typeface="Arial"/>
+              <a:buChar char="•"/>
+            </a:pPr>
+            <a:r>
+              <a:rPr lang="en-US" b="0" strike="noStrike" spc="-1" dirty="0">
+                <a:solidFill>
+                  <a:srgbClr val="000000"/>
+                </a:solidFill>
+                <a:latin typeface="Times New Roman"/>
+              </a:rPr>
+              <a:t>Marri, H., Patel, K., &amp; Agarwal, P. (2024). Machine learning in SIEM systems: Enhancing threat detection. IEEE Trans. Information Forensics &amp; Security, 19, 250-270.</a:t>
+            </a:r>
+          </a:p>
+          <a:p>
+            <a:pPr marL="341280" indent="-339840">
+              <a:lnSpc>
+                <a:spcPct val="100000"/>
+              </a:lnSpc>
+              <a:buClr>
+                <a:srgbClr val="000000"/>
+              </a:buClr>
+              <a:buFont typeface="Arial"/>
+              <a:buChar char="•"/>
+            </a:pPr>
+            <a:r>
+              <a:rPr lang="en-US" b="0" strike="noStrike" spc="-1" dirty="0">
+                <a:solidFill>
+                  <a:srgbClr val="000000"/>
+                </a:solidFill>
+                <a:latin typeface="Times New Roman"/>
+              </a:rPr>
+              <a:t>Hariri, S., Moustafa, N., &amp; Sitnikova, E. (2021). Adversarial ML in network intrusion detection. Neural Computing and Applications, 33, 10231-10261.</a:t>
+            </a:r>
+          </a:p>
+          <a:p>
+            <a:pPr marL="341280" indent="-339840">
+              <a:lnSpc>
+                <a:spcPct val="100000"/>
+              </a:lnSpc>
+              <a:buClr>
+                <a:srgbClr val="000000"/>
+              </a:buClr>
+              <a:buFont typeface="Arial"/>
+              <a:buChar char="•"/>
+            </a:pPr>
+            <a:r>
+              <a:rPr lang="en-US" b="0" strike="noStrike" spc="-1" dirty="0">
+                <a:solidFill>
+                  <a:srgbClr val="000000"/>
+                </a:solidFill>
+                <a:latin typeface="Times New Roman"/>
+              </a:rPr>
+              <a:t>Schlette, D., et al. (2024). Do you play it by the books? A study on incident response playbooks. IEEE Symposium on Security and Privacy.</a:t>
+            </a:r>
+          </a:p>
+          <a:p>
+            <a:pPr marL="341280" indent="-339840">
+              <a:lnSpc>
+                <a:spcPct val="100000"/>
+              </a:lnSpc>
+              <a:buClr>
+                <a:srgbClr val="000000"/>
+              </a:buClr>
+              <a:buFont typeface="Arial"/>
+              <a:buChar char="•"/>
+            </a:pPr>
+            <a:r>
+              <a:rPr lang="en-US" b="0" strike="noStrike" spc="-1" dirty="0">
+                <a:solidFill>
+                  <a:srgbClr val="000000"/>
+                </a:solidFill>
+                <a:latin typeface="Times New Roman"/>
+              </a:rPr>
+              <a:t>Lin, P.-C., et al. (2019). Endpoint detection and response: A survey and open research issues. IEEE Access, 7, 170351-170365.</a:t>
+            </a:r>
+          </a:p>
+          <a:p>
+            <a:pPr marL="341280" indent="-339840">
+              <a:lnSpc>
+                <a:spcPct val="100000"/>
+              </a:lnSpc>
+              <a:buClr>
+                <a:srgbClr val="000000"/>
+              </a:buClr>
+              <a:buFont typeface="Arial"/>
+              <a:buChar char="•"/>
+            </a:pPr>
+            <a:r>
+              <a:rPr lang="en-US" b="0" strike="noStrike" spc="-1" dirty="0">
+                <a:solidFill>
+                  <a:srgbClr val="000000"/>
+                </a:solidFill>
+                <a:latin typeface="Times New Roman"/>
+              </a:rPr>
+              <a:t>Hassan, A., Rauf, A., Shafqat, N., Latif, R., &amp; Khan, H. (2025). </a:t>
+            </a:r>
+            <a:r>
+              <a:rPr lang="en-US" b="0" strike="noStrike" spc="-1" dirty="0" err="1">
+                <a:solidFill>
+                  <a:srgbClr val="000000"/>
+                </a:solidFill>
+                <a:latin typeface="Times New Roman"/>
+              </a:rPr>
+              <a:t>ZenGuard</a:t>
+            </a:r>
+            <a:r>
+              <a:rPr lang="en-US" b="0" strike="noStrike" spc="-1" dirty="0">
+                <a:solidFill>
+                  <a:srgbClr val="000000"/>
+                </a:solidFill>
+                <a:latin typeface="Times New Roman"/>
+              </a:rPr>
+              <a:t>: ML-based Zero Trust framework. Scientific Reports, 15, 35871.</a:t>
+            </a:r>
+          </a:p>
+        </p:txBody>
+      </p:sp>
+      <p:sp>
+        <p:nvSpPr>
+          <p:cNvPr id="901" name="DatePH"/>
+          <p:cNvSpPr/>
+          <p:nvPr/>
+        </p:nvSpPr>
+        <p:spPr>
+          <a:xfrm>
+            <a:off x="457200" y="6356520"/>
+            <a:ext cx="2133720" cy="365040"/>
+          </a:xfrm>
+          <a:prstGeom prst="rect">
+            <a:avLst/>
+          </a:prstGeom>
+          <a:noFill/>
+          <a:ln w="0">
+            <a:noFill/>
+          </a:ln>
+        </p:spPr>
+        <p:style>
+          <a:lnRef idx="0">
+            <a:scrgbClr r="0" g="0" b="0"/>
+          </a:lnRef>
+          <a:fillRef idx="0">
+            <a:scrgbClr r="0" g="0" b="0"/>
+          </a:fillRef>
+          <a:effectRef idx="0">
+            <a:scrgbClr r="0" g="0" b="0"/>
+          </a:effectRef>
+          <a:fontRef idx="minor"/>
+        </p:style>
+        <p:txBody>
+          <a:bodyPr lIns="0" tIns="0" rIns="0" bIns="0" anchor="b">
+            <a:noAutofit/>
+          </a:bodyPr>
+          <a:lstStyle/>
+          <a:p>
+            <a:fld id="{F196C58C-5F04-4C11-8C72-5E9FC22741FA}" type="datetime">
+              <a:rPr lang="en-US" sz="1200" b="0" strike="noStrike" spc="-1">
+                <a:solidFill>
+                  <a:srgbClr val="045C75"/>
+                </a:solidFill>
+                <a:latin typeface="Calibri"/>
+              </a:rPr>
+              <a:t>3/18/2026</a:t>
+            </a:fld>
+            <a:endParaRPr lang="en-US" sz="1200" b="0" strike="noStrike" spc="-1">
+              <a:solidFill>
+                <a:srgbClr val="045C75"/>
+              </a:solidFill>
+              <a:latin typeface="Calibri"/>
+            </a:endParaRPr>
+          </a:p>
+        </p:txBody>
+      </p:sp>
+      <p:sp>
+        <p:nvSpPr>
+          <p:cNvPr id="902" name="SlideNumPH"/>
+          <p:cNvSpPr/>
+          <p:nvPr/>
+        </p:nvSpPr>
+        <p:spPr>
+          <a:xfrm>
+            <a:off x="7924680" y="6356520"/>
+            <a:ext cx="762120" cy="365040"/>
+          </a:xfrm>
+          <a:prstGeom prst="rect">
+            <a:avLst/>
+          </a:prstGeom>
+          <a:noFill/>
+          <a:ln w="0">
+            <a:noFill/>
+          </a:ln>
+        </p:spPr>
+        <p:style>
+          <a:lnRef idx="0">
+            <a:scrgbClr r="0" g="0" b="0"/>
+          </a:lnRef>
+          <a:fillRef idx="0">
+            <a:scrgbClr r="0" g="0" b="0"/>
+          </a:fillRef>
+          <a:effectRef idx="0">
+            <a:scrgbClr r="0" g="0" b="0"/>
+          </a:effectRef>
+          <a:fontRef idx="minor"/>
+        </p:style>
+        <p:txBody>
+          <a:bodyPr lIns="0" tIns="0" rIns="0" bIns="0" anchor="b">
+            <a:noAutofit/>
+          </a:bodyPr>
+          <a:lstStyle/>
+          <a:p>
+            <a:pPr algn="r"/>
+            <a:fld id="{8F570691-39C2-4917-B0B9-61BC158E1D0B}" type="slidenum">
+              <a:rPr lang="en-US" sz="1200" b="0" strike="noStrike" spc="-1">
+                <a:solidFill>
+                  <a:srgbClr val="898989"/>
+                </a:solidFill>
+                <a:latin typeface="Calibri"/>
+              </a:rPr>
+              <a:t>28</a:t>
+            </a:fld>
+            <a:endParaRPr lang="en-US" sz="1200" b="0" strike="noStrike" spc="-1">
+              <a:solidFill>
+                <a:srgbClr val="898989"/>
+              </a:solidFill>
+              <a:latin typeface="Calibri"/>
+            </a:endParaRPr>
+          </a:p>
+        </p:txBody>
+      </p:sp>
+    </p:spTree>
+  </p:cSld>
+  <p:clrMapOvr>
+    <a:masterClrMapping/>
+  </p:clrMapOvr>
+</p:sld>
+</file>
+
+<file path=ppt/slides/slide29.xml><?xml version="1.0" encoding="utf-8"?>
+<p:sld xmlns:a="http://schemas.openxmlformats.org/drawingml/2006/main" xmlns:r="http://schemas.openxmlformats.org/officeDocument/2006/relationships" xmlns:p="http://schemas.openxmlformats.org/presentationml/2006/main">
+  <p:cSld>
+    <p:spTree>
+      <p:nvGrpSpPr>
+        <p:cNvPr id="1" name=""/>
+        <p:cNvGrpSpPr/>
+        <p:nvPr/>
+      </p:nvGrpSpPr>
+      <p:grpSpPr>
+        <a:xfrm>
+          <a:off x="0" y="0"/>
+          <a:ext cx="0" cy="0"/>
+          <a:chOff x="0" y="0"/>
+          <a:chExt cx="0" cy="0"/>
+        </a:xfrm>
+      </p:grpSpPr>
+      <p:sp>
+        <p:nvSpPr>
+          <p:cNvPr id="50" name="TY"/>
+          <p:cNvSpPr/>
+          <p:nvPr/>
+        </p:nvSpPr>
+        <p:spPr>
+          <a:xfrm>
+            <a:off x="457200" y="2500000"/>
+            <a:ext cx="8229600" cy="1800000"/>
+          </a:xfrm>
+          <a:prstGeom prst="rect">
+            <a:avLst/>
+          </a:prstGeom>
+          <a:noFill/>
+          <a:ln w="0">
+            <a:noFill/>
+          </a:ln>
+        </p:spPr>
+        <p:style>
+          <a:lnRef idx="0">
+            <a:scrgbClr r="0" g="0" b="0"/>
+          </a:lnRef>
+          <a:fillRef idx="0">
+            <a:scrgbClr r="0" g="0" b="0"/>
+          </a:fillRef>
+          <a:effectRef idx="0">
+            <a:scrgbClr r="0" g="0" b="0"/>
+          </a:effectRef>
+          <a:fontRef idx="minor"/>
+        </p:style>
+        <p:txBody>
+          <a:bodyPr lIns="90000" tIns="46800" rIns="90000" bIns="46800" anchor="ctr">
+            <a:noAutofit/>
+          </a:bodyPr>
+          <a:lstStyle/>
+          <a:p>
+            <a:pPr algn="ctr"/>
+            <a:r>
+              <a:rPr lang="en-US" sz="6000" b="1" strike="noStrike" spc="-1">
+                <a:solidFill>
+                  <a:srgbClr val="1F5C8B"/>
+                </a:solidFill>
+                <a:latin typeface="Times New Roman"/>
+              </a:rPr>
+              <a:t>THANK YOU</a:t>
             </a:r>
           </a:p>
         </p:txBody>
@@ -17198,603 +16977,6 @@
                 <a:latin typeface="Calibri"/>
               </a:rPr>
               <a:t>3</a:t>
-            </a:fld>
-            <a:endParaRPr lang="en-US" sz="1200" b="0" strike="noStrike" spc="-1">
-              <a:solidFill>
-                <a:srgbClr val="898989"/>
-              </a:solidFill>
-              <a:latin typeface="Calibri"/>
-            </a:endParaRPr>
-          </a:p>
-        </p:txBody>
-      </p:sp>
-    </p:spTree>
-  </p:cSld>
-  <p:clrMapOvr>
-    <a:masterClrMapping/>
-  </p:clrMapOvr>
-</p:sld>
-</file>
-
-<file path=ppt/slides/slide30.xml><?xml version="1.0" encoding="utf-8"?>
-<p:sld xmlns:a="http://schemas.openxmlformats.org/drawingml/2006/main" xmlns:r="http://schemas.openxmlformats.org/officeDocument/2006/relationships" xmlns:p="http://schemas.openxmlformats.org/presentationml/2006/main">
-  <p:cSld>
-    <p:spTree>
-      <p:nvGrpSpPr>
-        <p:cNvPr id="1" name=""/>
-        <p:cNvGrpSpPr/>
-        <p:nvPr/>
-      </p:nvGrpSpPr>
-      <p:grpSpPr>
-        <a:xfrm>
-          <a:off x="0" y="0"/>
-          <a:ext cx="0" cy="0"/>
-          <a:chOff x="0" y="0"/>
-          <a:chExt cx="0" cy="0"/>
-        </a:xfrm>
-      </p:grpSpPr>
-      <p:sp>
-        <p:nvSpPr>
-          <p:cNvPr id="10" name="Title"/>
-          <p:cNvSpPr/>
-          <p:nvPr/>
-        </p:nvSpPr>
-        <p:spPr>
-          <a:xfrm>
-            <a:off x="179280" y="396720"/>
-            <a:ext cx="8685240" cy="762000"/>
-          </a:xfrm>
-          <a:prstGeom prst="rect">
-            <a:avLst/>
-          </a:prstGeom>
-          <a:noFill/>
-          <a:ln w="0">
-            <a:noFill/>
-          </a:ln>
-        </p:spPr>
-        <p:style>
-          <a:lnRef idx="0">
-            <a:scrgbClr r="0" g="0" b="0"/>
-          </a:lnRef>
-          <a:fillRef idx="0">
-            <a:scrgbClr r="0" g="0" b="0"/>
-          </a:fillRef>
-          <a:effectRef idx="0">
-            <a:scrgbClr r="0" g="0" b="0"/>
-          </a:effectRef>
-          <a:fontRef idx="minor"/>
-        </p:style>
-        <p:txBody>
-          <a:bodyPr lIns="90000" tIns="46800" rIns="90000" bIns="46800" anchor="ctr">
-            <a:noAutofit/>
-          </a:bodyPr>
-          <a:lstStyle/>
-          <a:p>
-            <a:pPr algn="ctr">
-              <a:lnSpc>
-                <a:spcPct val="100000"/>
-              </a:lnSpc>
-            </a:pPr>
-            <a:r>
-              <a:rPr lang="en-US" sz="4000" b="0" strike="noStrike" spc="-1" dirty="0">
-                <a:solidFill>
-                  <a:srgbClr val="000000"/>
-                </a:solidFill>
-                <a:latin typeface="Times New Roman"/>
-              </a:rPr>
-              <a:t>References</a:t>
-            </a:r>
-          </a:p>
-        </p:txBody>
-      </p:sp>
-      <p:sp>
-        <p:nvSpPr>
-          <p:cNvPr id="11" name="Content"/>
-          <p:cNvSpPr/>
-          <p:nvPr/>
-        </p:nvSpPr>
-        <p:spPr>
-          <a:xfrm>
-            <a:off x="457200" y="1200000"/>
-            <a:ext cx="8229600" cy="5000000"/>
-          </a:xfrm>
-          <a:prstGeom prst="rect">
-            <a:avLst/>
-          </a:prstGeom>
-          <a:noFill/>
-          <a:ln w="0">
-            <a:noFill/>
-          </a:ln>
-        </p:spPr>
-        <p:style>
-          <a:lnRef idx="0">
-            <a:scrgbClr r="0" g="0" b="0"/>
-          </a:lnRef>
-          <a:fillRef idx="0">
-            <a:scrgbClr r="0" g="0" b="0"/>
-          </a:fillRef>
-          <a:effectRef idx="0">
-            <a:scrgbClr r="0" g="0" b="0"/>
-          </a:effectRef>
-          <a:fontRef idx="minor"/>
-        </p:style>
-        <p:txBody>
-          <a:bodyPr lIns="90000" tIns="46800" rIns="90000" bIns="46800" anchor="t">
-            <a:noAutofit/>
-          </a:bodyPr>
-          <a:lstStyle/>
-          <a:p>
-            <a:pPr marL="341280" indent="-339840">
-              <a:lnSpc>
-                <a:spcPct val="100000"/>
-              </a:lnSpc>
-              <a:buClr>
-                <a:srgbClr val="000000"/>
-              </a:buClr>
-              <a:buFont typeface="Arial"/>
-              <a:buChar char="•"/>
-            </a:pPr>
-            <a:r>
-              <a:rPr lang="en-US" b="0" strike="noStrike" spc="-1" dirty="0">
-                <a:solidFill>
-                  <a:srgbClr val="000000"/>
-                </a:solidFill>
-                <a:latin typeface="Times New Roman"/>
-              </a:rPr>
-              <a:t>Rose, S., Borchert, O., Mitchell, S., &amp; Connelly, S. (2020). Zero Trust Architecture. NIST Special Publication 800-207. doi:10.6028/NIST.SP.800-207.</a:t>
-            </a:r>
-          </a:p>
-          <a:p>
-            <a:pPr marL="341280" indent="-339840">
-              <a:lnSpc>
-                <a:spcPct val="100000"/>
-              </a:lnSpc>
-              <a:buClr>
-                <a:srgbClr val="000000"/>
-              </a:buClr>
-              <a:buFont typeface="Arial"/>
-              <a:buChar char="•"/>
-            </a:pPr>
-            <a:r>
-              <a:rPr lang="en-US" b="0" strike="noStrike" spc="-1" dirty="0">
-                <a:solidFill>
-                  <a:srgbClr val="000000"/>
-                </a:solidFill>
-                <a:latin typeface="Times New Roman"/>
-              </a:rPr>
-              <a:t>Syed, N. F., Shah, S. W., </a:t>
-            </a:r>
-            <a:r>
-              <a:rPr lang="en-US" b="0" strike="noStrike" spc="-1" dirty="0" err="1">
-                <a:solidFill>
-                  <a:srgbClr val="000000"/>
-                </a:solidFill>
-                <a:latin typeface="Times New Roman"/>
-              </a:rPr>
-              <a:t>Shaghaghi</a:t>
-            </a:r>
-            <a:r>
-              <a:rPr lang="en-US" b="0" strike="noStrike" spc="-1" dirty="0">
-                <a:solidFill>
-                  <a:srgbClr val="000000"/>
-                </a:solidFill>
-                <a:latin typeface="Times New Roman"/>
-              </a:rPr>
-              <a:t>, A., et al. (2022). Zero trust architecture (ZTA): A comprehensive survey. IEEE Access, 10, 57143-57179.</a:t>
-            </a:r>
-          </a:p>
-          <a:p>
-            <a:pPr marL="341280" indent="-339840">
-              <a:lnSpc>
-                <a:spcPct val="100000"/>
-              </a:lnSpc>
-              <a:buClr>
-                <a:srgbClr val="000000"/>
-              </a:buClr>
-              <a:buFont typeface="Arial"/>
-              <a:buChar char="•"/>
-            </a:pPr>
-            <a:r>
-              <a:rPr lang="en-US" b="0" strike="noStrike" spc="-1" dirty="0">
-                <a:solidFill>
-                  <a:srgbClr val="000000"/>
-                </a:solidFill>
-                <a:latin typeface="Times New Roman"/>
-              </a:rPr>
-              <a:t>Marri, H., Patel, K., &amp; Agarwal, P. (2024). Machine learning in SIEM systems: Enhancing threat detection. IEEE Trans. Information Forensics &amp; Security, 19, 250-270.</a:t>
-            </a:r>
-          </a:p>
-          <a:p>
-            <a:pPr marL="341280" indent="-339840">
-              <a:lnSpc>
-                <a:spcPct val="100000"/>
-              </a:lnSpc>
-              <a:buClr>
-                <a:srgbClr val="000000"/>
-              </a:buClr>
-              <a:buFont typeface="Arial"/>
-              <a:buChar char="•"/>
-            </a:pPr>
-            <a:r>
-              <a:rPr lang="en-US" b="0" strike="noStrike" spc="-1" dirty="0">
-                <a:solidFill>
-                  <a:srgbClr val="000000"/>
-                </a:solidFill>
-                <a:latin typeface="Times New Roman"/>
-              </a:rPr>
-              <a:t>Hariri, S., Moustafa, N., &amp; Sitnikova, E. (2021). Adversarial ML in network intrusion detection. Neural Computing and Applications, 33, 10231-10261.</a:t>
-            </a:r>
-          </a:p>
-          <a:p>
-            <a:pPr marL="341280" indent="-339840">
-              <a:lnSpc>
-                <a:spcPct val="100000"/>
-              </a:lnSpc>
-              <a:buClr>
-                <a:srgbClr val="000000"/>
-              </a:buClr>
-              <a:buFont typeface="Arial"/>
-              <a:buChar char="•"/>
-            </a:pPr>
-            <a:r>
-              <a:rPr lang="en-US" b="0" strike="noStrike" spc="-1" dirty="0">
-                <a:solidFill>
-                  <a:srgbClr val="000000"/>
-                </a:solidFill>
-                <a:latin typeface="Times New Roman"/>
-              </a:rPr>
-              <a:t>Schlette, D., et al. (2024). Do you play it by the books? A study on incident response playbooks. IEEE Symposium on Security and Privacy.</a:t>
-            </a:r>
-          </a:p>
-          <a:p>
-            <a:pPr marL="341280" indent="-339840">
-              <a:lnSpc>
-                <a:spcPct val="100000"/>
-              </a:lnSpc>
-              <a:buClr>
-                <a:srgbClr val="000000"/>
-              </a:buClr>
-              <a:buFont typeface="Arial"/>
-              <a:buChar char="•"/>
-            </a:pPr>
-            <a:r>
-              <a:rPr lang="en-US" b="0" strike="noStrike" spc="-1" dirty="0">
-                <a:solidFill>
-                  <a:srgbClr val="000000"/>
-                </a:solidFill>
-                <a:latin typeface="Times New Roman"/>
-              </a:rPr>
-              <a:t>Lin, P.-C., et al. (2019). Endpoint detection and response: A survey and open research issues. IEEE Access, 7, 170351-170365.</a:t>
-            </a:r>
-          </a:p>
-          <a:p>
-            <a:pPr marL="341280" indent="-339840">
-              <a:lnSpc>
-                <a:spcPct val="100000"/>
-              </a:lnSpc>
-              <a:buClr>
-                <a:srgbClr val="000000"/>
-              </a:buClr>
-              <a:buFont typeface="Arial"/>
-              <a:buChar char="•"/>
-            </a:pPr>
-            <a:r>
-              <a:rPr lang="en-US" b="0" strike="noStrike" spc="-1" dirty="0">
-                <a:solidFill>
-                  <a:srgbClr val="000000"/>
-                </a:solidFill>
-                <a:latin typeface="Times New Roman"/>
-              </a:rPr>
-              <a:t>Hassan, A., Rauf, A., Shafqat, N., Latif, R., &amp; Khan, H. (2025). </a:t>
-            </a:r>
-            <a:r>
-              <a:rPr lang="en-US" b="0" strike="noStrike" spc="-1" dirty="0" err="1">
-                <a:solidFill>
-                  <a:srgbClr val="000000"/>
-                </a:solidFill>
-                <a:latin typeface="Times New Roman"/>
-              </a:rPr>
-              <a:t>ZenGuard</a:t>
-            </a:r>
-            <a:r>
-              <a:rPr lang="en-US" b="0" strike="noStrike" spc="-1" dirty="0">
-                <a:solidFill>
-                  <a:srgbClr val="000000"/>
-                </a:solidFill>
-                <a:latin typeface="Times New Roman"/>
-              </a:rPr>
-              <a:t>: ML-based Zero Trust framework. Scientific Reports, 15, 35871.</a:t>
-            </a:r>
-          </a:p>
-        </p:txBody>
-      </p:sp>
-      <p:sp>
-        <p:nvSpPr>
-          <p:cNvPr id="901" name="DatePH"/>
-          <p:cNvSpPr/>
-          <p:nvPr/>
-        </p:nvSpPr>
-        <p:spPr>
-          <a:xfrm>
-            <a:off x="457200" y="6356520"/>
-            <a:ext cx="2133720" cy="365040"/>
-          </a:xfrm>
-          <a:prstGeom prst="rect">
-            <a:avLst/>
-          </a:prstGeom>
-          <a:noFill/>
-          <a:ln w="0">
-            <a:noFill/>
-          </a:ln>
-        </p:spPr>
-        <p:style>
-          <a:lnRef idx="0">
-            <a:scrgbClr r="0" g="0" b="0"/>
-          </a:lnRef>
-          <a:fillRef idx="0">
-            <a:scrgbClr r="0" g="0" b="0"/>
-          </a:fillRef>
-          <a:effectRef idx="0">
-            <a:scrgbClr r="0" g="0" b="0"/>
-          </a:effectRef>
-          <a:fontRef idx="minor"/>
-        </p:style>
-        <p:txBody>
-          <a:bodyPr lIns="0" tIns="0" rIns="0" bIns="0" anchor="b">
-            <a:noAutofit/>
-          </a:bodyPr>
-          <a:lstStyle/>
-          <a:p>
-            <a:fld id="{F196C58C-5F04-4C11-8C72-5E9FC22741FA}" type="datetime">
-              <a:rPr lang="en-US" sz="1200" b="0" strike="noStrike" spc="-1">
-                <a:solidFill>
-                  <a:srgbClr val="045C75"/>
-                </a:solidFill>
-                <a:latin typeface="Calibri"/>
-              </a:rPr>
-              <a:t>3/18/2026</a:t>
-            </a:fld>
-            <a:endParaRPr lang="en-US" sz="1200" b="0" strike="noStrike" spc="-1">
-              <a:solidFill>
-                <a:srgbClr val="045C75"/>
-              </a:solidFill>
-              <a:latin typeface="Calibri"/>
-            </a:endParaRPr>
-          </a:p>
-        </p:txBody>
-      </p:sp>
-      <p:sp>
-        <p:nvSpPr>
-          <p:cNvPr id="902" name="SlideNumPH"/>
-          <p:cNvSpPr/>
-          <p:nvPr/>
-        </p:nvSpPr>
-        <p:spPr>
-          <a:xfrm>
-            <a:off x="7924680" y="6356520"/>
-            <a:ext cx="762120" cy="365040"/>
-          </a:xfrm>
-          <a:prstGeom prst="rect">
-            <a:avLst/>
-          </a:prstGeom>
-          <a:noFill/>
-          <a:ln w="0">
-            <a:noFill/>
-          </a:ln>
-        </p:spPr>
-        <p:style>
-          <a:lnRef idx="0">
-            <a:scrgbClr r="0" g="0" b="0"/>
-          </a:lnRef>
-          <a:fillRef idx="0">
-            <a:scrgbClr r="0" g="0" b="0"/>
-          </a:fillRef>
-          <a:effectRef idx="0">
-            <a:scrgbClr r="0" g="0" b="0"/>
-          </a:effectRef>
-          <a:fontRef idx="minor"/>
-        </p:style>
-        <p:txBody>
-          <a:bodyPr lIns="0" tIns="0" rIns="0" bIns="0" anchor="b">
-            <a:noAutofit/>
-          </a:bodyPr>
-          <a:lstStyle/>
-          <a:p>
-            <a:pPr algn="r"/>
-            <a:fld id="{8F570691-39C2-4917-B0B9-61BC158E1D0B}" type="slidenum">
-              <a:rPr lang="en-US" sz="1200" b="0" strike="noStrike" spc="-1">
-                <a:solidFill>
-                  <a:srgbClr val="898989"/>
-                </a:solidFill>
-                <a:latin typeface="Calibri"/>
-              </a:rPr>
-              <a:t>30</a:t>
-            </a:fld>
-            <a:endParaRPr lang="en-US" sz="1200" b="0" strike="noStrike" spc="-1">
-              <a:solidFill>
-                <a:srgbClr val="898989"/>
-              </a:solidFill>
-              <a:latin typeface="Calibri"/>
-            </a:endParaRPr>
-          </a:p>
-        </p:txBody>
-      </p:sp>
-    </p:spTree>
-  </p:cSld>
-  <p:clrMapOvr>
-    <a:masterClrMapping/>
-  </p:clrMapOvr>
-</p:sld>
-</file>
-
-<file path=ppt/slides/slide31.xml><?xml version="1.0" encoding="utf-8"?>
-<p:sld xmlns:a="http://schemas.openxmlformats.org/drawingml/2006/main" xmlns:r="http://schemas.openxmlformats.org/officeDocument/2006/relationships" xmlns:p="http://schemas.openxmlformats.org/presentationml/2006/main">
-  <p:cSld>
-    <p:spTree>
-      <p:nvGrpSpPr>
-        <p:cNvPr id="1" name=""/>
-        <p:cNvGrpSpPr/>
-        <p:nvPr/>
-      </p:nvGrpSpPr>
-      <p:grpSpPr>
-        <a:xfrm>
-          <a:off x="0" y="0"/>
-          <a:ext cx="0" cy="0"/>
-          <a:chOff x="0" y="0"/>
-          <a:chExt cx="0" cy="0"/>
-        </a:xfrm>
-      </p:grpSpPr>
-      <p:sp>
-        <p:nvSpPr>
-          <p:cNvPr id="50" name="TY"/>
-          <p:cNvSpPr/>
-          <p:nvPr/>
-        </p:nvSpPr>
-        <p:spPr>
-          <a:xfrm>
-            <a:off x="457200" y="2500000"/>
-            <a:ext cx="8229600" cy="1800000"/>
-          </a:xfrm>
-          <a:prstGeom prst="rect">
-            <a:avLst/>
-          </a:prstGeom>
-          <a:noFill/>
-          <a:ln w="0">
-            <a:noFill/>
-          </a:ln>
-        </p:spPr>
-        <p:style>
-          <a:lnRef idx="0">
-            <a:scrgbClr r="0" g="0" b="0"/>
-          </a:lnRef>
-          <a:fillRef idx="0">
-            <a:scrgbClr r="0" g="0" b="0"/>
-          </a:fillRef>
-          <a:effectRef idx="0">
-            <a:scrgbClr r="0" g="0" b="0"/>
-          </a:effectRef>
-          <a:fontRef idx="minor"/>
-        </p:style>
-        <p:txBody>
-          <a:bodyPr lIns="90000" tIns="46800" rIns="90000" bIns="46800" anchor="ctr">
-            <a:noAutofit/>
-          </a:bodyPr>
-          <a:lstStyle/>
-          <a:p>
-            <a:pPr algn="ctr"/>
-            <a:r>
-              <a:rPr lang="en-US" sz="6000" b="1" strike="noStrike" spc="-1">
-                <a:solidFill>
-                  <a:srgbClr val="1F5C8B"/>
-                </a:solidFill>
-                <a:latin typeface="Times New Roman"/>
-              </a:rPr>
-              <a:t>THANK YOU</a:t>
-            </a:r>
-          </a:p>
-        </p:txBody>
-      </p:sp>
-      <p:sp>
-        <p:nvSpPr>
-          <p:cNvPr id="901" name="DatePH"/>
-          <p:cNvSpPr/>
-          <p:nvPr/>
-        </p:nvSpPr>
-        <p:spPr>
-          <a:xfrm>
-            <a:off x="457200" y="6356520"/>
-            <a:ext cx="2133720" cy="365040"/>
-          </a:xfrm>
-          <a:prstGeom prst="rect">
-            <a:avLst/>
-          </a:prstGeom>
-          <a:noFill/>
-          <a:ln w="0">
-            <a:noFill/>
-          </a:ln>
-        </p:spPr>
-        <p:style>
-          <a:lnRef idx="0">
-            <a:scrgbClr r="0" g="0" b="0"/>
-          </a:lnRef>
-          <a:fillRef idx="0">
-            <a:scrgbClr r="0" g="0" b="0"/>
-          </a:fillRef>
-          <a:effectRef idx="0">
-            <a:scrgbClr r="0" g="0" b="0"/>
-          </a:effectRef>
-          <a:fontRef idx="minor"/>
-        </p:style>
-        <p:txBody>
-          <a:bodyPr lIns="0" tIns="0" rIns="0" bIns="0" anchor="b">
-            <a:noAutofit/>
-          </a:bodyPr>
-          <a:lstStyle/>
-          <a:p>
-            <a:fld id="{F196C58C-5F04-4C11-8C72-5E9FC22741FA}" type="datetime">
-              <a:rPr lang="en-US" sz="1200" b="0" strike="noStrike" spc="-1">
-                <a:solidFill>
-                  <a:srgbClr val="045C75"/>
-                </a:solidFill>
-                <a:latin typeface="Calibri"/>
-              </a:rPr>
-              <a:t>3/18/2026</a:t>
-            </a:fld>
-            <a:endParaRPr lang="en-US" sz="1200" b="0" strike="noStrike" spc="-1">
-              <a:solidFill>
-                <a:srgbClr val="045C75"/>
-              </a:solidFill>
-              <a:latin typeface="Calibri"/>
-            </a:endParaRPr>
-          </a:p>
-        </p:txBody>
-      </p:sp>
-      <p:sp>
-        <p:nvSpPr>
-          <p:cNvPr id="902" name="SlideNumPH"/>
-          <p:cNvSpPr/>
-          <p:nvPr/>
-        </p:nvSpPr>
-        <p:spPr>
-          <a:xfrm>
-            <a:off x="7924680" y="6356520"/>
-            <a:ext cx="762120" cy="365040"/>
-          </a:xfrm>
-          <a:prstGeom prst="rect">
-            <a:avLst/>
-          </a:prstGeom>
-          <a:noFill/>
-          <a:ln w="0">
-            <a:noFill/>
-          </a:ln>
-        </p:spPr>
-        <p:style>
-          <a:lnRef idx="0">
-            <a:scrgbClr r="0" g="0" b="0"/>
-          </a:lnRef>
-          <a:fillRef idx="0">
-            <a:scrgbClr r="0" g="0" b="0"/>
-          </a:fillRef>
-          <a:effectRef idx="0">
-            <a:scrgbClr r="0" g="0" b="0"/>
-          </a:effectRef>
-          <a:fontRef idx="minor"/>
-        </p:style>
-        <p:txBody>
-          <a:bodyPr lIns="0" tIns="0" rIns="0" bIns="0" anchor="b">
-            <a:noAutofit/>
-          </a:bodyPr>
-          <a:lstStyle/>
-          <a:p>
-            <a:pPr algn="r"/>
-            <a:fld id="{8F570691-39C2-4917-B0B9-61BC158E1D0B}" type="slidenum">
-              <a:rPr lang="en-US" sz="1200" b="0" strike="noStrike" spc="-1">
-                <a:solidFill>
-                  <a:srgbClr val="898989"/>
-                </a:solidFill>
-                <a:latin typeface="Calibri"/>
-              </a:rPr>
-              <a:t>31</a:t>
             </a:fld>
             <a:endParaRPr lang="en-US" sz="1200" b="0" strike="noStrike" spc="-1">
               <a:solidFill>
